--- a/docs/The_Next_Ravi_Varma_Milestone2_Review.pptx
+++ b/docs/The_Next_Ravi_Varma_Milestone2_Review.pptx
@@ -119,14 +119,14 @@
   <p:extLst>
     <p:ext uri="{521415D9-36F7-43E2-AB2F-B90AF26B5E84}">
       <p14:sectionLst xmlns:p14="http://schemas.microsoft.com/office/powerpoint/2010/main">
-        <p14:section name="Intro" id="{00547e25-d235-7ea1-4d42-8bb9f2a8f155}">
+        <p14:section name="Intro" id="{0cd9cf00-b7f6-53bc-3ccb-655297ddd425}">
           <p14:sldIdLst>
             <p14:sldId id="256"/>
             <p14:sldId id="257"/>
             <p14:sldId id="258"/>
           </p14:sldIdLst>
         </p14:section>
-        <p14:section name="Work done" id="{2c56df8e-4db5-6808-994a-6cd5371d70b6}">
+        <p14:section name="Work done" id="{dc3293ba-f8e5-39bb-2f92-28c53b29abe5}">
           <p14:sldIdLst>
             <p14:sldId id="259"/>
             <p14:sldId id="260"/>
@@ -134,7 +134,7 @@
             <p14:sldId id="262"/>
           </p14:sldIdLst>
         </p14:section>
-        <p14:section name="Results" id="{e1ff39b5-86eb-a418-852e-4183f41fc458}">
+        <p14:section name="Results" id="{bc8f6c51-b21c-c61f-df47-7b0defdff9b9}">
           <p14:sldIdLst>
             <p14:sldId id="263"/>
             <p14:sldId id="264"/>
@@ -142,7 +142,7 @@
             <p14:sldId id="266"/>
           </p14:sldIdLst>
         </p14:section>
-        <p14:section name="Next" id="{f07669ac-3272-dece-b91a-7eaf3387fcf4}">
+        <p14:section name="Next" id="{b9a364df-9a81-d48b-f016-e460236ca115}">
           <p14:sldIdLst>
             <p14:sldId id="267"/>
             <p14:sldId id="268"/>
@@ -552,7 +552,7 @@
           <a:p>
             <a:r>
               <a:rPr lang="en-US" dirty="0"/>
-              <a:t>Introduce yourself and the project name. Mention this is the progress presentation for the first two milestones.</a:t>
+              <a:t>Introduce yourself and the project name. Mention this is the progress presentation for the first two milestones. The background shows real Ravi Varma paintings from our dataset.</a:t>
             </a:r>
             <a:endParaRPr lang="en-US" dirty="0"/>
           </a:p>
@@ -1682,12 +1682,19 @@
 
 <file path=ppt/slideLayouts/slideLayout2.xml><?xml version="1.0" encoding="utf-8"?>
 <p:sldLayout xmlns:a="http://schemas.openxmlformats.org/drawingml/2006/main" xmlns:r="http://schemas.openxmlformats.org/officeDocument/2006/relationships" xmlns:p="http://schemas.openxmlformats.org/presentationml/2006/main" preserve="1">
-  <p:cSld name="TITLE">
+  <p:cSld name="COVER">
     <p:bg>
       <p:bgPr>
-        <a:solidFill>
-          <a:schemeClr val="bg1"/>
-        </a:solidFill>
+        <a:blipFill dpi="0" rotWithShape="1">
+          <a:blip r:embed="rId1">
+            <a:lum/>
+          </a:blip>
+          <a:srcRect/>
+          <a:stretch>
+            <a:fillRect/>
+          </a:stretch>
+        </a:blipFill>
+        <a:effectLst/>
       </p:bgPr>
     </p:bg>
     <p:spTree>
@@ -1714,8 +1721,8 @@
         </p:nvSpPr>
         <p:spPr>
           <a:xfrm>
-            <a:off x="731520" y="2011680"/>
-            <a:ext cx="10698480" cy="1097280"/>
+            <a:off x="731520" y="1737360"/>
+            <a:ext cx="6858000" cy="1188720"/>
           </a:xfrm>
           <a:prstGeom prst="rect">
             <a:avLst/>
@@ -1728,9 +1735,9 @@
           <a:lstStyle>
             <a:lvl1pPr algn="l" indent="0" marL="0">
               <a:buNone/>
-              <a:defRPr lang="en-US" sz="4400" b="1" dirty="0">
-                <a:solidFill>
-                  <a:schemeClr val="tx2"/>
+              <a:defRPr lang="en-US" sz="5000" b="1" dirty="0">
+                <a:solidFill>
+                  <a:schemeClr val="bg1"/>
                 </a:solidFill>
               </a:defRPr>
             </a:lvl1pPr>
@@ -1739,7 +1746,7 @@
             <a:pPr algn="l" indent="0" marL="0">
               <a:buNone/>
             </a:pPr>
-            <a:endParaRPr lang="en-US" sz="4400" dirty="0"/>
+            <a:endParaRPr lang="en-US" sz="5000" dirty="0"/>
           </a:p>
         </p:txBody>
       </p:sp>
@@ -1753,8 +1760,8 @@
         </p:nvSpPr>
         <p:spPr>
           <a:xfrm>
-            <a:off x="731520" y="3246120"/>
-            <a:ext cx="10698480" cy="2377440"/>
+            <a:off x="731520" y="3108960"/>
+            <a:ext cx="7498080" cy="2926080"/>
           </a:xfrm>
           <a:prstGeom prst="rect">
             <a:avLst/>
@@ -1769,7 +1776,7 @@
               <a:buNone/>
               <a:defRPr lang="en-US" sz="2000" dirty="0">
                 <a:solidFill>
-                  <a:schemeClr val="tx1"/>
+                  <a:schemeClr val="accent5"/>
                 </a:solidFill>
               </a:defRPr>
             </a:lvl1pPr>
@@ -1791,6 +1798,123 @@
 </file>
 
 <file path=ppt/slideLayouts/slideLayout3.xml><?xml version="1.0" encoding="utf-8"?>
+<p:sldLayout xmlns:a="http://schemas.openxmlformats.org/drawingml/2006/main" xmlns:r="http://schemas.openxmlformats.org/officeDocument/2006/relationships" xmlns:p="http://schemas.openxmlformats.org/presentationml/2006/main" preserve="1">
+  <p:cSld name="END">
+    <p:bg>
+      <p:bgPr>
+        <a:blipFill dpi="0" rotWithShape="1">
+          <a:blip r:embed="rId1">
+            <a:lum/>
+          </a:blip>
+          <a:srcRect/>
+          <a:stretch>
+            <a:fillRect/>
+          </a:stretch>
+        </a:blipFill>
+        <a:effectLst/>
+      </p:bgPr>
+    </p:bg>
+    <p:spTree>
+      <p:nvGrpSpPr>
+        <p:cNvPr id="1" name=""/>
+        <p:cNvGrpSpPr/>
+        <p:nvPr/>
+      </p:nvGrpSpPr>
+      <p:grpSpPr>
+        <a:xfrm>
+          <a:off x="0" y="0"/>
+          <a:ext cx="0" cy="0"/>
+          <a:chOff x="0" y="0"/>
+          <a:chExt cx="0" cy="0"/>
+        </a:xfrm>
+      </p:grpSpPr>
+      <p:sp>
+        <p:nvSpPr>
+          <p:cNvPr id="2" name="Text 0"/>
+          <p:cNvSpPr/>
+          <p:nvPr>
+            <p:ph idx="100" type="title" hasCustomPrompt="1"/>
+          </p:nvPr>
+        </p:nvSpPr>
+        <p:spPr>
+          <a:xfrm>
+            <a:off x="731520" y="2103120"/>
+            <a:ext cx="10698480" cy="1280160"/>
+          </a:xfrm>
+          <a:prstGeom prst="rect">
+            <a:avLst/>
+          </a:prstGeom>
+          <a:noFill/>
+          <a:ln/>
+        </p:spPr>
+        <p:txBody>
+          <a:bodyPr wrap="square" rtlCol="0"/>
+          <a:lstStyle>
+            <a:lvl1pPr algn="ctr" indent="0" marL="0">
+              <a:buNone/>
+              <a:defRPr lang="en-US" sz="5400" b="1" dirty="0">
+                <a:solidFill>
+                  <a:schemeClr val="bg1"/>
+                </a:solidFill>
+              </a:defRPr>
+            </a:lvl1pPr>
+          </a:lstStyle>
+          <a:p>
+            <a:pPr algn="ctr" indent="0" marL="0">
+              <a:buNone/>
+            </a:pPr>
+            <a:endParaRPr lang="en-US" sz="5400" dirty="0"/>
+          </a:p>
+        </p:txBody>
+      </p:sp>
+      <p:sp>
+        <p:nvSpPr>
+          <p:cNvPr id="3" name="Text 0"/>
+          <p:cNvSpPr/>
+          <p:nvPr>
+            <p:ph idx="101" type="body" hasCustomPrompt="1"/>
+          </p:nvPr>
+        </p:nvSpPr>
+        <p:spPr>
+          <a:xfrm>
+            <a:off x="731520" y="3566160"/>
+            <a:ext cx="10698480" cy="1463040"/>
+          </a:xfrm>
+          <a:prstGeom prst="rect">
+            <a:avLst/>
+          </a:prstGeom>
+          <a:noFill/>
+          <a:ln/>
+        </p:spPr>
+        <p:txBody>
+          <a:bodyPr wrap="square" rtlCol="0"/>
+          <a:lstStyle>
+            <a:lvl1pPr algn="ctr" indent="0" marL="0">
+              <a:buNone/>
+              <a:defRPr lang="en-US" sz="2000" dirty="0">
+                <a:solidFill>
+                  <a:schemeClr val="accent5"/>
+                </a:solidFill>
+              </a:defRPr>
+            </a:lvl1pPr>
+          </a:lstStyle>
+          <a:p>
+            <a:pPr algn="ctr" indent="0" marL="0">
+              <a:buNone/>
+            </a:pPr>
+            <a:endParaRPr lang="en-US" sz="2000" dirty="0"/>
+          </a:p>
+        </p:txBody>
+      </p:sp>
+    </p:spTree>
+  </p:cSld>
+  <p:clrMapOvr>
+    <a:masterClrMapping/>
+  </p:clrMapOvr>
+</p:sldLayout>
+</file>
+
+<file path=ppt/slideLayouts/slideLayout4.xml><?xml version="1.0" encoding="utf-8"?>
 <p:sldLayout xmlns:a="http://schemas.openxmlformats.org/drawingml/2006/main" xmlns:r="http://schemas.openxmlformats.org/officeDocument/2006/relationships" xmlns:p="http://schemas.openxmlformats.org/presentationml/2006/main" preserve="1">
   <p:cSld name="CONTENT">
     <p:bg>
@@ -1855,6 +1979,42 @@
       </p:sp>
       <p:sp>
         <p:nvSpPr>
+          <p:cNvPr id="3" name="Text 0"/>
+          <p:cNvSpPr/>
+          <p:nvPr/>
+        </p:nvSpPr>
+        <p:spPr>
+          <a:xfrm>
+            <a:off x="548640" y="6400800"/>
+            <a:ext cx="4572000" cy="274320"/>
+          </a:xfrm>
+          <a:prstGeom prst="rect">
+            <a:avLst/>
+          </a:prstGeom>
+          <a:noFill/>
+          <a:ln/>
+        </p:spPr>
+        <p:txBody>
+          <a:bodyPr wrap="square" lIns="0" tIns="0" rIns="0" bIns="0" rtlCol="0" anchor="ctr"/>
+          <a:lstStyle/>
+          <a:p>
+            <a:pPr indent="0" marL="0">
+              <a:buNone/>
+            </a:pPr>
+            <a:r>
+              <a:rPr lang="en-US" sz="1000" dirty="0">
+                <a:solidFill>
+                  <a:schemeClr val="accent4"/>
+                </a:solidFill>
+              </a:rPr>
+              <a:t>The Next Ravi Varma</a:t>
+            </a:r>
+            <a:endParaRPr lang="en-US" sz="1000" dirty="0"/>
+          </a:p>
+        </p:txBody>
+      </p:sp>
+      <p:sp>
+        <p:nvSpPr>
           <p:cNvPr id="25" name="Slide Number Placeholder 0"/>
           <p:cNvSpPr>
             <a:spLocks noGrp="1"/>
@@ -1881,7 +2041,7 @@
           <a:bodyPr/>
           <a:lstStyle>
             <a:lvl1pPr>
-              <a:defRPr sz="1100">
+              <a:defRPr sz="1000">
                 <a:solidFill>
                   <a:schemeClr val="accent4"/>
                 </a:solidFill>
@@ -1892,7 +2052,7 @@
             <a:pPr algn="r"/>
             <a:fld id="{F7021451-1387-4CA6-816F-3879F97B5CBC}" type="slidenum">
               <a:rPr b="0" lang="en-US"/>
-              <a:t>1003</a:t>
+              <a:t>1004</a:t>
             </a:fld>
             <a:endParaRPr lang="en-US"/>
           </a:p>
@@ -1951,7 +2111,7 @@
           <a:bodyPr/>
           <a:lstStyle>
             <a:lvl1pPr>
-              <a:defRPr sz="1100">
+              <a:defRPr sz="1000">
                 <a:solidFill>
                   <a:schemeClr val="accent4"/>
                 </a:solidFill>
@@ -1975,6 +2135,7 @@
     <p:sldLayoutId id="2147483649" r:id="rId1"/>
     <p:sldLayoutId id="2147483650" r:id="rId2"/>
     <p:sldLayoutId id="2147483651" r:id="rId3"/>
+    <p:sldLayoutId id="2147483652" r:id="rId4"/>
   </p:sldLayoutIdLst>
   <p:hf sldNum="0" hdr="0" ftr="0" dt="0"/>
   <p:txStyles>
@@ -2257,8 +2418,8 @@
         </p:nvSpPr>
         <p:spPr>
           <a:xfrm>
-            <a:off x="731520" y="2011680"/>
-            <a:ext cx="10698480" cy="1097280"/>
+            <a:off x="731520" y="1737360"/>
+            <a:ext cx="6858000" cy="1188720"/>
           </a:xfrm>
           <a:prstGeom prst="rect">
             <a:avLst/>
@@ -2274,14 +2435,14 @@
               <a:buNone/>
             </a:pPr>
             <a:r>
-              <a:rPr lang="en-US" sz="4400" b="1" dirty="0">
-                <a:solidFill>
-                  <a:schemeClr val="tx2"/>
+              <a:rPr lang="en-US" sz="5000" b="1" dirty="0">
+                <a:solidFill>
+                  <a:schemeClr val="bg1"/>
                 </a:solidFill>
               </a:rPr>
               <a:t>The Next Ravi Varma</a:t>
             </a:r>
-            <a:endParaRPr lang="en-US" sz="4400" dirty="0"/>
+            <a:endParaRPr lang="en-US" sz="5000" dirty="0"/>
           </a:p>
         </p:txBody>
       </p:sp>
@@ -2295,8 +2456,8 @@
         </p:nvSpPr>
         <p:spPr>
           <a:xfrm>
-            <a:off x="731520" y="3246120"/>
-            <a:ext cx="10698480" cy="2377440"/>
+            <a:off x="731520" y="3108960"/>
+            <a:ext cx="7498080" cy="2926080"/>
           </a:xfrm>
           <a:prstGeom prst="rect">
             <a:avLst/>
@@ -2314,7 +2475,7 @@
             <a:r>
               <a:rPr lang="en-US" sz="2000" dirty="0">
                 <a:solidFill>
-                  <a:schemeClr val="tx1"/>
+                  <a:schemeClr val="accent5"/>
                 </a:solidFill>
               </a:rPr>
               <a:t>Generating Ravi Varma style paintings using Stable Diffusion + LoRA</a:t>
@@ -2325,6 +2486,14 @@
             <a:pPr algn="l" indent="0" marL="0">
               <a:buNone/>
             </a:pPr>
+            <a:r>
+              <a:rPr lang="en-US" sz="1000" dirty="0">
+                <a:solidFill>
+                  <a:schemeClr val="accent5"/>
+                </a:solidFill>
+              </a:rPr>
+              <a:t> </a:t>
+            </a:r>
             <a:endParaRPr lang="en-US" sz="2000" dirty="0"/>
           </a:p>
           <a:p>
@@ -2332,12 +2501,40 @@
               <a:buNone/>
             </a:pPr>
             <a:r>
+              <a:rPr lang="en-US" sz="2000" b="1" dirty="0">
+                <a:solidFill>
+                  <a:schemeClr val="bg1"/>
+                </a:solidFill>
+              </a:rPr>
+              <a:t>Progress Presentation (Milestones 1 and 2)</a:t>
+            </a:r>
+            <a:endParaRPr lang="en-US" sz="2000" dirty="0"/>
+          </a:p>
+          <a:p>
+            <a:pPr algn="l" indent="0" marL="0">
+              <a:buNone/>
+            </a:pPr>
+            <a:r>
+              <a:rPr lang="en-US" sz="1000" dirty="0">
+                <a:solidFill>
+                  <a:schemeClr val="accent5"/>
+                </a:solidFill>
+              </a:rPr>
+              <a:t> </a:t>
+            </a:r>
+            <a:endParaRPr lang="en-US" sz="2000" dirty="0"/>
+          </a:p>
+          <a:p>
+            <a:pPr algn="l" indent="0" marL="0">
+              <a:buNone/>
+            </a:pPr>
+            <a:r>
               <a:rPr lang="en-US" sz="2000" dirty="0">
                 <a:solidFill>
-                  <a:schemeClr val="tx1"/>
-                </a:solidFill>
-              </a:rPr>
-              <a:t>Progress Presentation (Milestones 1 and 2)</a:t>
+                  <a:schemeClr val="accent5"/>
+                </a:solidFill>
+              </a:rPr>
+              <a:t>Shashwat Sahu</a:t>
             </a:r>
             <a:endParaRPr lang="en-US" sz="2000" dirty="0"/>
           </a:p>
@@ -2345,95 +2542,15 @@
             <a:pPr algn="l" indent="0" marL="0">
               <a:buNone/>
             </a:pPr>
+            <a:r>
+              <a:rPr lang="en-US" sz="2000" dirty="0">
+                <a:solidFill>
+                  <a:schemeClr val="accent5"/>
+                </a:solidFill>
+              </a:rPr>
+              <a:t>BITS Pilani, K K Birla Goa Campus</a:t>
+            </a:r>
             <a:endParaRPr lang="en-US" sz="2000" dirty="0"/>
-          </a:p>
-          <a:p>
-            <a:pPr algn="l" indent="0" marL="0">
-              <a:buNone/>
-            </a:pPr>
-            <a:r>
-              <a:rPr lang="en-US" sz="2000" dirty="0">
-                <a:solidFill>
-                  <a:schemeClr val="tx1"/>
-                </a:solidFill>
-              </a:rPr>
-              <a:t>Shashwat Sahu</a:t>
-            </a:r>
-            <a:endParaRPr lang="en-US" sz="2000" dirty="0"/>
-          </a:p>
-          <a:p>
-            <a:pPr algn="l" indent="0" marL="0">
-              <a:buNone/>
-            </a:pPr>
-            <a:r>
-              <a:rPr lang="en-US" sz="2000" dirty="0">
-                <a:solidFill>
-                  <a:schemeClr val="tx1"/>
-                </a:solidFill>
-              </a:rPr>
-              <a:t>BITS Pilani, K K Birla Goa Campus</a:t>
-            </a:r>
-            <a:endParaRPr lang="en-US" sz="2000" dirty="0"/>
-          </a:p>
-        </p:txBody>
-      </p:sp>
-      <p:pic>
-        <p:nvPicPr>
-          <p:cNvPr id="4" name="title-image" descr="/private/tmp/claude-501/-Users-shashwatsahu-Desktop-the-next-ravi-varma/b50e4b20-09e3-45d0-8877-560ccb85868c/scratchpad/deck/assets/local_check.jpg">    </p:cNvPr>
-          <p:cNvPicPr>
-            <a:picLocks noChangeAspect="1"/>
-          </p:cNvPicPr>
-          <p:nvPr/>
-        </p:nvPicPr>
-        <p:blipFill>
-          <a:blip r:embed="rId1"/>
-          <a:stretch>
-            <a:fillRect/>
-          </a:stretch>
-        </p:blipFill>
-        <p:spPr>
-          <a:xfrm>
-            <a:off x="9052560" y="914400"/>
-            <a:ext cx="2377440" cy="3392424"/>
-          </a:xfrm>
-          <a:prstGeom prst="rect">
-            <a:avLst/>
-          </a:prstGeom>
-        </p:spPr>
-      </p:pic>
-      <p:sp>
-        <p:nvSpPr>
-          <p:cNvPr id="5" name="caption"/>
-          <p:cNvSpPr txBox="1"/>
-          <p:nvPr/>
-        </p:nvSpPr>
-        <p:spPr>
-          <a:xfrm>
-            <a:off x="9052560" y="4389120"/>
-            <a:ext cx="2377440" cy="274320"/>
-          </a:xfrm>
-          <a:prstGeom prst="rect">
-            <a:avLst/>
-          </a:prstGeom>
-          <a:noFill/>
-          <a:ln/>
-        </p:spPr>
-        <p:txBody>
-          <a:bodyPr wrap="square" lIns="0" tIns="0" rIns="0" bIns="0" rtlCol="0" anchor="ctr"/>
-          <a:lstStyle/>
-          <a:p>
-            <a:pPr algn="ctr" indent="0" marL="0">
-              <a:buNone/>
-            </a:pPr>
-            <a:r>
-              <a:rPr lang="en-US" sz="1200" i="1" dirty="0">
-                <a:solidFill>
-                  <a:schemeClr val="accent4"/>
-                </a:solidFill>
-              </a:rPr>
-              <a:t>(generated by our model)</a:t>
-            </a:r>
-            <a:endParaRPr lang="en-US" sz="1200" dirty="0"/>
           </a:p>
         </p:txBody>
       </p:sp>
@@ -2516,12 +2633,19 @@
         </p:blipFill>
         <p:spPr>
           <a:xfrm>
-            <a:off x="548640" y="1188720"/>
+            <a:off x="548640" y="1234440"/>
             <a:ext cx="5760720" cy="4005072"/>
           </a:xfrm>
           <a:prstGeom prst="rect">
             <a:avLst/>
           </a:prstGeom>
+          <a:effectLst>
+            <a:outerShdw sx="100000" sy="100000" kx="0" ky="0" algn="bl" rotWithShape="0" blurRad="76200" dist="38100" dir="2700000">
+              <a:srgbClr val="000000">
+                <a:alpha val="28000"/>
+              </a:srgbClr>
+            </a:outerShdw>
+          </a:effectLst>
         </p:spPr>
       </p:pic>
       <p:sp>
@@ -2532,7 +2656,7 @@
         </p:nvSpPr>
         <p:spPr>
           <a:xfrm>
-            <a:off x="548640" y="5257800"/>
+            <a:off x="548640" y="5349240"/>
             <a:ext cx="5760720" cy="274320"/>
           </a:xfrm>
           <a:prstGeom prst="rect">
@@ -2562,14 +2686,36 @@
       </p:sp>
       <p:sp>
         <p:nvSpPr>
-          <p:cNvPr id="5" name="found-head"/>
+          <p:cNvPr id="5" name="found-box"/>
+          <p:cNvSpPr/>
+          <p:nvPr/>
+        </p:nvSpPr>
+        <p:spPr>
+          <a:xfrm>
+            <a:off x="6675120" y="1234440"/>
+            <a:ext cx="4937760" cy="2148840"/>
+          </a:xfrm>
+          <a:prstGeom prst="roundRect">
+            <a:avLst>
+              <a:gd name="adj" fmla="val 4255"/>
+            </a:avLst>
+          </a:prstGeom>
+          <a:solidFill>
+            <a:schemeClr val="accent6"/>
+          </a:solidFill>
+          <a:ln/>
+        </p:spPr>
+      </p:sp>
+      <p:sp>
+        <p:nvSpPr>
+          <p:cNvPr id="6" name="found-head"/>
           <p:cNvSpPr txBox="1"/>
           <p:nvPr/>
         </p:nvSpPr>
         <p:spPr>
           <a:xfrm>
-            <a:off x="6675120" y="1234440"/>
-            <a:ext cx="4937760" cy="411480"/>
+            <a:off x="6903720" y="1325880"/>
+            <a:ext cx="4572000" cy="411480"/>
           </a:xfrm>
           <a:prstGeom prst="rect">
             <a:avLst/>
@@ -2585,27 +2731,27 @@
               <a:buNone/>
             </a:pPr>
             <a:r>
-              <a:rPr lang="en-US" sz="2000" b="1" dirty="0">
-                <a:solidFill>
-                  <a:schemeClr val="tx2"/>
+              <a:rPr lang="en-US" sz="1900" b="1" dirty="0">
+                <a:solidFill>
+                  <a:schemeClr val="accent2"/>
                 </a:solidFill>
               </a:rPr>
               <a:t>What we found</a:t>
             </a:r>
-            <a:endParaRPr lang="en-US" sz="2000" dirty="0"/>
-          </a:p>
-        </p:txBody>
-      </p:sp>
-      <p:sp>
-        <p:nvSpPr>
-          <p:cNvPr id="6" name="points"/>
+            <a:endParaRPr lang="en-US" sz="1900" dirty="0"/>
+          </a:p>
+        </p:txBody>
+      </p:sp>
+      <p:sp>
+        <p:nvSpPr>
+          <p:cNvPr id="7" name="points"/>
           <p:cNvSpPr txBox="1"/>
           <p:nvPr/>
         </p:nvSpPr>
         <p:spPr>
           <a:xfrm>
-            <a:off x="6675120" y="1737360"/>
-            <a:ext cx="4937760" cy="1920240"/>
+            <a:off x="6903720" y="1783080"/>
+            <a:ext cx="4572000" cy="1554480"/>
           </a:xfrm>
           <a:prstGeom prst="rect">
             <a:avLst/>
@@ -2625,14 +2771,14 @@
               <a:buChar char="•"/>
             </a:pPr>
             <a:r>
-              <a:rPr lang="en-US" sz="1600" dirty="0">
+              <a:rPr lang="en-US" sz="1500" dirty="0">
                 <a:solidFill>
                   <a:schemeClr val="tx1"/>
                 </a:solidFill>
               </a:rPr>
               <a:t>CLIP style score increased only slightly (0.669 to 0.681), even though the images look clearly different.</a:t>
             </a:r>
-            <a:endParaRPr lang="en-US" sz="1600" dirty="0"/>
+            <a:endParaRPr lang="en-US" sz="1500" dirty="0"/>
           </a:p>
           <a:p>
             <a:pPr marL="342900" indent="-342900">
@@ -2643,27 +2789,49 @@
               <a:buChar char="•"/>
             </a:pPr>
             <a:r>
-              <a:rPr lang="en-US" sz="1600" dirty="0">
+              <a:rPr lang="en-US" sz="1500" dirty="0">
                 <a:solidFill>
                   <a:schemeClr val="tx1"/>
                 </a:solidFill>
               </a:rPr>
               <a:t>No image was a copy of a training image.</a:t>
             </a:r>
-            <a:endParaRPr lang="en-US" sz="1600" dirty="0"/>
-          </a:p>
-        </p:txBody>
-      </p:sp>
-      <p:sp>
-        <p:nvSpPr>
-          <p:cNvPr id="7" name="problems-head"/>
+            <a:endParaRPr lang="en-US" sz="1500" dirty="0"/>
+          </a:p>
+        </p:txBody>
+      </p:sp>
+      <p:sp>
+        <p:nvSpPr>
+          <p:cNvPr id="8" name="problems-box"/>
+          <p:cNvSpPr/>
+          <p:nvPr/>
+        </p:nvSpPr>
+        <p:spPr>
+          <a:xfrm>
+            <a:off x="6675120" y="3566160"/>
+            <a:ext cx="4937760" cy="2148840"/>
+          </a:xfrm>
+          <a:prstGeom prst="roundRect">
+            <a:avLst>
+              <a:gd name="adj" fmla="val 4255"/>
+            </a:avLst>
+          </a:prstGeom>
+          <a:solidFill>
+            <a:srgbClr val="F6E6E6"/>
+          </a:solidFill>
+          <a:ln/>
+        </p:spPr>
+      </p:sp>
+      <p:sp>
+        <p:nvSpPr>
+          <p:cNvPr id="9" name="problems-head"/>
           <p:cNvSpPr txBox="1"/>
           <p:nvPr/>
         </p:nvSpPr>
         <p:spPr>
           <a:xfrm>
-            <a:off x="6675120" y="3703320"/>
-            <a:ext cx="4937760" cy="411480"/>
+            <a:off x="6903720" y="3657600"/>
+            <a:ext cx="4572000" cy="411480"/>
           </a:xfrm>
           <a:prstGeom prst="rect">
             <a:avLst/>
@@ -2679,27 +2847,27 @@
               <a:buNone/>
             </a:pPr>
             <a:r>
-              <a:rPr lang="en-US" sz="2000" b="1" dirty="0">
-                <a:solidFill>
-                  <a:schemeClr val="tx2"/>
+              <a:rPr lang="en-US" sz="1900" b="1" dirty="0">
+                <a:solidFill>
+                  <a:schemeClr val="accent3"/>
                 </a:solidFill>
               </a:rPr>
               <a:t>Problems</a:t>
             </a:r>
-            <a:endParaRPr lang="en-US" sz="2000" dirty="0"/>
-          </a:p>
-        </p:txBody>
-      </p:sp>
-      <p:sp>
-        <p:nvSpPr>
-          <p:cNvPr id="8" name="points"/>
+            <a:endParaRPr lang="en-US" sz="1900" dirty="0"/>
+          </a:p>
+        </p:txBody>
+      </p:sp>
+      <p:sp>
+        <p:nvSpPr>
+          <p:cNvPr id="10" name="points"/>
           <p:cNvSpPr txBox="1"/>
           <p:nvPr/>
         </p:nvSpPr>
         <p:spPr>
           <a:xfrm>
-            <a:off x="6675120" y="4206240"/>
-            <a:ext cx="4937760" cy="1920240"/>
+            <a:off x="6903720" y="4114800"/>
+            <a:ext cx="4572000" cy="1554480"/>
           </a:xfrm>
           <a:prstGeom prst="rect">
             <a:avLst/>
@@ -2719,14 +2887,14 @@
               <a:buChar char="•"/>
             </a:pPr>
             <a:r>
-              <a:rPr lang="en-US" sz="1600" dirty="0">
+              <a:rPr lang="en-US" sz="1500" dirty="0">
                 <a:solidFill>
                   <a:schemeClr val="tx1"/>
                 </a:solidFill>
               </a:rPr>
               <a:t>Some women's faces get a dark shadow above the lip.</a:t>
             </a:r>
-            <a:endParaRPr lang="en-US" sz="1600" dirty="0"/>
+            <a:endParaRPr lang="en-US" sz="1500" dirty="0"/>
           </a:p>
           <a:p>
             <a:pPr marL="342900" indent="-342900">
@@ -2737,14 +2905,14 @@
               <a:buChar char="•"/>
             </a:pPr>
             <a:r>
-              <a:rPr lang="en-US" sz="1600" dirty="0">
+              <a:rPr lang="en-US" sz="1500" dirty="0">
                 <a:solidFill>
                   <a:schemeClr val="tx1"/>
                 </a:solidFill>
               </a:rPr>
               <a:t>Small signature-like marks appear in the corners.</a:t>
             </a:r>
-            <a:endParaRPr lang="en-US" sz="1600" dirty="0"/>
+            <a:endParaRPr lang="en-US" sz="1500" dirty="0"/>
           </a:p>
           <a:p>
             <a:pPr marL="342900" indent="-342900">
@@ -2755,14 +2923,14 @@
               <a:buChar char="•"/>
             </a:pPr>
             <a:r>
-              <a:rPr lang="en-US" sz="1600" dirty="0">
+              <a:rPr lang="en-US" sz="1500" dirty="0">
                 <a:solidFill>
                   <a:schemeClr val="tx1"/>
                 </a:solidFill>
               </a:rPr>
               <a:t>Group scenes still look like posters.</a:t>
             </a:r>
-            <a:endParaRPr lang="en-US" sz="1600" dirty="0"/>
+            <a:endParaRPr lang="en-US" sz="1500" dirty="0"/>
           </a:p>
         </p:txBody>
       </p:sp>
@@ -2794,7 +2962,7 @@
           <a:bodyPr/>
           <a:lstStyle>
             <a:lvl1pPr>
-              <a:defRPr sz="1100">
+              <a:defRPr sz="1000">
                 <a:solidFill>
                   <a:schemeClr val="accent4"/>
                 </a:solidFill>
@@ -2876,14 +3044,80 @@
       </p:sp>
       <p:sp>
         <p:nvSpPr>
-          <p:cNvPr id="3" name="points"/>
+          <p:cNvPr id="3" name="ch-0"/>
+          <p:cNvSpPr/>
+          <p:nvPr/>
+        </p:nvSpPr>
+        <p:spPr>
+          <a:xfrm>
+            <a:off x="548640" y="1234440"/>
+            <a:ext cx="11064240" cy="822960"/>
+          </a:xfrm>
+          <a:prstGeom prst="roundRect">
+            <a:avLst>
+              <a:gd name="adj" fmla="val 11111"/>
+            </a:avLst>
+          </a:prstGeom>
+          <a:solidFill>
+            <a:schemeClr val="accent5"/>
+          </a:solidFill>
+          <a:ln/>
+        </p:spPr>
+      </p:sp>
+      <p:sp>
+        <p:nvSpPr>
+          <p:cNvPr id="4" name="ch-c-0"/>
+          <p:cNvSpPr/>
+          <p:nvPr/>
+        </p:nvSpPr>
+        <p:spPr>
+          <a:xfrm>
+            <a:off x="731520" y="1353312"/>
+            <a:ext cx="585216" cy="585216"/>
+          </a:xfrm>
+          <a:prstGeom prst="ellipse">
+            <a:avLst/>
+          </a:prstGeom>
+          <a:solidFill>
+            <a:schemeClr val="tx2"/>
+          </a:solidFill>
+          <a:ln/>
+        </p:spPr>
+      </p:sp>
+      <p:pic>
+        <p:nvPicPr>
+          <p:cNvPr id="5" name="ch-i-0" descr="preencoded.png">    </p:cNvPr>
+          <p:cNvPicPr>
+            <a:picLocks noChangeAspect="1"/>
+          </p:cNvPicPr>
+          <p:nvPr/>
+        </p:nvPicPr>
+        <p:blipFill>
+          <a:blip r:embed="rId1"/>
+          <a:stretch>
+            <a:fillRect/>
+          </a:stretch>
+        </p:blipFill>
+        <p:spPr>
+          <a:xfrm>
+            <a:off x="877824" y="1499616"/>
+            <a:ext cx="292608" cy="292608"/>
+          </a:xfrm>
+          <a:prstGeom prst="rect">
+            <a:avLst/>
+          </a:prstGeom>
+        </p:spPr>
+      </p:pic>
+      <p:sp>
+        <p:nvSpPr>
+          <p:cNvPr id="6" name="ch-t-0"/>
           <p:cNvSpPr txBox="1"/>
           <p:nvPr/>
         </p:nvSpPr>
         <p:spPr>
           <a:xfrm>
-            <a:off x="548640" y="1280160"/>
-            <a:ext cx="11064240" cy="4846320"/>
+            <a:off x="1554480" y="1234440"/>
+            <a:ext cx="9875520" cy="822960"/>
           </a:xfrm>
           <a:prstGeom prst="rect">
             <a:avLst/>
@@ -2892,97 +3126,429 @@
           <a:ln/>
         </p:spPr>
         <p:txBody>
-          <a:bodyPr wrap="square" lIns="0" tIns="0" rIns="0" bIns="0" rtlCol="0" anchor="t"/>
-          <a:lstStyle/>
-          <a:p>
-            <a:pPr marL="342900" indent="-342900">
-              <a:spcAft>
-                <a:spcPts val="1000"/>
-              </a:spcAft>
-              <a:buSzPct val="100000"/>
-              <a:buChar char="•"/>
-            </a:pPr>
-            <a:r>
-              <a:rPr lang="en-US" sz="1800" dirty="0">
+          <a:bodyPr wrap="square" lIns="0" tIns="0" rIns="0" bIns="0" rtlCol="0" anchor="ctr"/>
+          <a:lstStyle/>
+          <a:p>
+            <a:pPr indent="0" marL="0">
+              <a:buNone/>
+            </a:pPr>
+            <a:r>
+              <a:rPr lang="en-US" sz="1700" dirty="0">
                 <a:solidFill>
                   <a:schemeClr val="tx1"/>
                 </a:solidFill>
               </a:rPr>
               <a:t>Many images in the dataset were duplicates or had been upscaled, so we had to check every image.</a:t>
             </a:r>
-            <a:endParaRPr lang="en-US" sz="1800" dirty="0"/>
-          </a:p>
-          <a:p>
-            <a:pPr marL="342900" indent="-342900">
-              <a:spcAft>
-                <a:spcPts val="1000"/>
-              </a:spcAft>
-              <a:buSzPct val="100000"/>
-              <a:buChar char="•"/>
-            </a:pPr>
-            <a:r>
-              <a:rPr lang="en-US" sz="1800" dirty="0">
+            <a:endParaRPr lang="en-US" sz="1700" dirty="0"/>
+          </a:p>
+        </p:txBody>
+      </p:sp>
+      <p:sp>
+        <p:nvSpPr>
+          <p:cNvPr id="7" name="ch-1"/>
+          <p:cNvSpPr/>
+          <p:nvPr/>
+        </p:nvSpPr>
+        <p:spPr>
+          <a:xfrm>
+            <a:off x="548640" y="2221992"/>
+            <a:ext cx="11064240" cy="822960"/>
+          </a:xfrm>
+          <a:prstGeom prst="roundRect">
+            <a:avLst>
+              <a:gd name="adj" fmla="val 11111"/>
+            </a:avLst>
+          </a:prstGeom>
+          <a:solidFill>
+            <a:schemeClr val="bg2"/>
+          </a:solidFill>
+          <a:ln/>
+        </p:spPr>
+      </p:sp>
+      <p:sp>
+        <p:nvSpPr>
+          <p:cNvPr id="8" name="ch-c-1"/>
+          <p:cNvSpPr/>
+          <p:nvPr/>
+        </p:nvSpPr>
+        <p:spPr>
+          <a:xfrm>
+            <a:off x="731520" y="2340864"/>
+            <a:ext cx="585216" cy="585216"/>
+          </a:xfrm>
+          <a:prstGeom prst="ellipse">
+            <a:avLst/>
+          </a:prstGeom>
+          <a:solidFill>
+            <a:schemeClr val="tx2"/>
+          </a:solidFill>
+          <a:ln/>
+        </p:spPr>
+      </p:sp>
+      <p:pic>
+        <p:nvPicPr>
+          <p:cNvPr id="9" name="ch-i-1" descr="preencoded.png">    </p:cNvPr>
+          <p:cNvPicPr>
+            <a:picLocks noChangeAspect="1"/>
+          </p:cNvPicPr>
+          <p:nvPr/>
+        </p:nvPicPr>
+        <p:blipFill>
+          <a:blip r:embed="rId2"/>
+          <a:stretch>
+            <a:fillRect/>
+          </a:stretch>
+        </p:blipFill>
+        <p:spPr>
+          <a:xfrm>
+            <a:off x="877824" y="2487168"/>
+            <a:ext cx="292608" cy="292608"/>
+          </a:xfrm>
+          <a:prstGeom prst="rect">
+            <a:avLst/>
+          </a:prstGeom>
+        </p:spPr>
+      </p:pic>
+      <p:sp>
+        <p:nvSpPr>
+          <p:cNvPr id="10" name="ch-t-1"/>
+          <p:cNvSpPr txBox="1"/>
+          <p:nvPr/>
+        </p:nvSpPr>
+        <p:spPr>
+          <a:xfrm>
+            <a:off x="1554480" y="2221992"/>
+            <a:ext cx="9875520" cy="822960"/>
+          </a:xfrm>
+          <a:prstGeom prst="rect">
+            <a:avLst/>
+          </a:prstGeom>
+          <a:noFill/>
+          <a:ln/>
+        </p:spPr>
+        <p:txBody>
+          <a:bodyPr wrap="square" lIns="0" tIns="0" rIns="0" bIns="0" rtlCol="0" anchor="ctr"/>
+          <a:lstStyle/>
+          <a:p>
+            <a:pPr indent="0" marL="0">
+              <a:buNone/>
+            </a:pPr>
+            <a:r>
+              <a:rPr lang="en-US" sz="1700" dirty="0">
                 <a:solidFill>
                   <a:schemeClr val="tx1"/>
                 </a:solidFill>
               </a:rPr>
               <a:t>The original Stable Diffusion 1.5 model was removed from Hugging Face, so we switched to the official mirror.</a:t>
             </a:r>
-            <a:endParaRPr lang="en-US" sz="1800" dirty="0"/>
-          </a:p>
-          <a:p>
-            <a:pPr marL="342900" indent="-342900">
-              <a:spcAft>
-                <a:spcPts val="1000"/>
-              </a:spcAft>
-              <a:buSzPct val="100000"/>
-              <a:buChar char="•"/>
-            </a:pPr>
-            <a:r>
-              <a:rPr lang="en-US" sz="1800" dirty="0">
+            <a:endParaRPr lang="en-US" sz="1700" dirty="0"/>
+          </a:p>
+        </p:txBody>
+      </p:sp>
+      <p:sp>
+        <p:nvSpPr>
+          <p:cNvPr id="11" name="ch-2"/>
+          <p:cNvSpPr/>
+          <p:nvPr/>
+        </p:nvSpPr>
+        <p:spPr>
+          <a:xfrm>
+            <a:off x="548640" y="3209544"/>
+            <a:ext cx="11064240" cy="822960"/>
+          </a:xfrm>
+          <a:prstGeom prst="roundRect">
+            <a:avLst>
+              <a:gd name="adj" fmla="val 11111"/>
+            </a:avLst>
+          </a:prstGeom>
+          <a:solidFill>
+            <a:schemeClr val="accent5"/>
+          </a:solidFill>
+          <a:ln/>
+        </p:spPr>
+      </p:sp>
+      <p:sp>
+        <p:nvSpPr>
+          <p:cNvPr id="12" name="ch-c-2"/>
+          <p:cNvSpPr/>
+          <p:nvPr/>
+        </p:nvSpPr>
+        <p:spPr>
+          <a:xfrm>
+            <a:off x="731520" y="3328416"/>
+            <a:ext cx="585216" cy="585216"/>
+          </a:xfrm>
+          <a:prstGeom prst="ellipse">
+            <a:avLst/>
+          </a:prstGeom>
+          <a:solidFill>
+            <a:schemeClr val="tx2"/>
+          </a:solidFill>
+          <a:ln/>
+        </p:spPr>
+      </p:sp>
+      <p:pic>
+        <p:nvPicPr>
+          <p:cNvPr id="13" name="ch-i-2" descr="preencoded.png">    </p:cNvPr>
+          <p:cNvPicPr>
+            <a:picLocks noChangeAspect="1"/>
+          </p:cNvPicPr>
+          <p:nvPr/>
+        </p:nvPicPr>
+        <p:blipFill>
+          <a:blip r:embed="rId3"/>
+          <a:stretch>
+            <a:fillRect/>
+          </a:stretch>
+        </p:blipFill>
+        <p:spPr>
+          <a:xfrm>
+            <a:off x="877824" y="3474720"/>
+            <a:ext cx="292608" cy="292608"/>
+          </a:xfrm>
+          <a:prstGeom prst="rect">
+            <a:avLst/>
+          </a:prstGeom>
+        </p:spPr>
+      </p:pic>
+      <p:sp>
+        <p:nvSpPr>
+          <p:cNvPr id="14" name="ch-t-2"/>
+          <p:cNvSpPr txBox="1"/>
+          <p:nvPr/>
+        </p:nvSpPr>
+        <p:spPr>
+          <a:xfrm>
+            <a:off x="1554480" y="3209544"/>
+            <a:ext cx="9875520" cy="822960"/>
+          </a:xfrm>
+          <a:prstGeom prst="rect">
+            <a:avLst/>
+          </a:prstGeom>
+          <a:noFill/>
+          <a:ln/>
+        </p:spPr>
+        <p:txBody>
+          <a:bodyPr wrap="square" lIns="0" tIns="0" rIns="0" bIns="0" rtlCol="0" anchor="ctr"/>
+          <a:lstStyle/>
+          <a:p>
+            <a:pPr indent="0" marL="0">
+              <a:buNone/>
+            </a:pPr>
+            <a:r>
+              <a:rPr lang="en-US" sz="1700" dirty="0">
                 <a:solidFill>
                   <a:schemeClr val="tx1"/>
                 </a:solidFill>
               </a:rPr>
               <a:t>Version conflicts on Google Colab (xformers, bitsandbytes) broke training at first.</a:t>
             </a:r>
-            <a:endParaRPr lang="en-US" sz="1800" dirty="0"/>
-          </a:p>
-          <a:p>
-            <a:pPr marL="342900" indent="-342900">
-              <a:spcAft>
-                <a:spcPts val="1000"/>
-              </a:spcAft>
-              <a:buSzPct val="100000"/>
-              <a:buChar char="•"/>
-            </a:pPr>
-            <a:r>
-              <a:rPr lang="en-US" sz="1800" dirty="0">
+            <a:endParaRPr lang="en-US" sz="1700" dirty="0"/>
+          </a:p>
+        </p:txBody>
+      </p:sp>
+      <p:sp>
+        <p:nvSpPr>
+          <p:cNvPr id="15" name="ch-3"/>
+          <p:cNvSpPr/>
+          <p:nvPr/>
+        </p:nvSpPr>
+        <p:spPr>
+          <a:xfrm>
+            <a:off x="548640" y="4197096"/>
+            <a:ext cx="11064240" cy="822960"/>
+          </a:xfrm>
+          <a:prstGeom prst="roundRect">
+            <a:avLst>
+              <a:gd name="adj" fmla="val 11111"/>
+            </a:avLst>
+          </a:prstGeom>
+          <a:solidFill>
+            <a:schemeClr val="bg2"/>
+          </a:solidFill>
+          <a:ln/>
+        </p:spPr>
+      </p:sp>
+      <p:sp>
+        <p:nvSpPr>
+          <p:cNvPr id="16" name="ch-c-3"/>
+          <p:cNvSpPr/>
+          <p:nvPr/>
+        </p:nvSpPr>
+        <p:spPr>
+          <a:xfrm>
+            <a:off x="731520" y="4315968"/>
+            <a:ext cx="585216" cy="585216"/>
+          </a:xfrm>
+          <a:prstGeom prst="ellipse">
+            <a:avLst/>
+          </a:prstGeom>
+          <a:solidFill>
+            <a:schemeClr val="tx2"/>
+          </a:solidFill>
+          <a:ln/>
+        </p:spPr>
+      </p:sp>
+      <p:pic>
+        <p:nvPicPr>
+          <p:cNvPr id="17" name="ch-i-3" descr="preencoded.png">    </p:cNvPr>
+          <p:cNvPicPr>
+            <a:picLocks noChangeAspect="1"/>
+          </p:cNvPicPr>
+          <p:nvPr/>
+        </p:nvPicPr>
+        <p:blipFill>
+          <a:blip r:embed="rId4"/>
+          <a:stretch>
+            <a:fillRect/>
+          </a:stretch>
+        </p:blipFill>
+        <p:spPr>
+          <a:xfrm>
+            <a:off x="877824" y="4462272"/>
+            <a:ext cx="292608" cy="292608"/>
+          </a:xfrm>
+          <a:prstGeom prst="rect">
+            <a:avLst/>
+          </a:prstGeom>
+        </p:spPr>
+      </p:pic>
+      <p:sp>
+        <p:nvSpPr>
+          <p:cNvPr id="18" name="ch-t-3"/>
+          <p:cNvSpPr txBox="1"/>
+          <p:nvPr/>
+        </p:nvSpPr>
+        <p:spPr>
+          <a:xfrm>
+            <a:off x="1554480" y="4197096"/>
+            <a:ext cx="9875520" cy="822960"/>
+          </a:xfrm>
+          <a:prstGeom prst="rect">
+            <a:avLst/>
+          </a:prstGeom>
+          <a:noFill/>
+          <a:ln/>
+        </p:spPr>
+        <p:txBody>
+          <a:bodyPr wrap="square" lIns="0" tIns="0" rIns="0" bIns="0" rtlCol="0" anchor="ctr"/>
+          <a:lstStyle/>
+          <a:p>
+            <a:pPr indent="0" marL="0">
+              <a:buNone/>
+            </a:pPr>
+            <a:r>
+              <a:rPr lang="en-US" sz="1700" dirty="0">
                 <a:solidFill>
                   <a:schemeClr val="tx1"/>
                 </a:solidFill>
               </a:rPr>
               <a:t>On the Mac, images came out completely black because of an fp16 issue; fixed by changing a setting.</a:t>
             </a:r>
-            <a:endParaRPr lang="en-US" sz="1800" dirty="0"/>
-          </a:p>
-          <a:p>
-            <a:pPr marL="342900" indent="-342900">
-              <a:spcAft>
-                <a:spcPts val="1000"/>
-              </a:spcAft>
-              <a:buSzPct val="100000"/>
-              <a:buChar char="•"/>
-            </a:pPr>
-            <a:r>
-              <a:rPr lang="en-US" sz="1800" dirty="0">
+            <a:endParaRPr lang="en-US" sz="1700" dirty="0"/>
+          </a:p>
+        </p:txBody>
+      </p:sp>
+      <p:sp>
+        <p:nvSpPr>
+          <p:cNvPr id="19" name="ch-4"/>
+          <p:cNvSpPr/>
+          <p:nvPr/>
+        </p:nvSpPr>
+        <p:spPr>
+          <a:xfrm>
+            <a:off x="548640" y="5184648"/>
+            <a:ext cx="11064240" cy="822960"/>
+          </a:xfrm>
+          <a:prstGeom prst="roundRect">
+            <a:avLst>
+              <a:gd name="adj" fmla="val 11111"/>
+            </a:avLst>
+          </a:prstGeom>
+          <a:solidFill>
+            <a:schemeClr val="accent5"/>
+          </a:solidFill>
+          <a:ln/>
+        </p:spPr>
+      </p:sp>
+      <p:sp>
+        <p:nvSpPr>
+          <p:cNvPr id="20" name="ch-c-4"/>
+          <p:cNvSpPr/>
+          <p:nvPr/>
+        </p:nvSpPr>
+        <p:spPr>
+          <a:xfrm>
+            <a:off x="731520" y="5303520"/>
+            <a:ext cx="585216" cy="585216"/>
+          </a:xfrm>
+          <a:prstGeom prst="ellipse">
+            <a:avLst/>
+          </a:prstGeom>
+          <a:solidFill>
+            <a:schemeClr val="tx2"/>
+          </a:solidFill>
+          <a:ln/>
+        </p:spPr>
+      </p:sp>
+      <p:pic>
+        <p:nvPicPr>
+          <p:cNvPr id="21" name="ch-i-4" descr="preencoded.png">    </p:cNvPr>
+          <p:cNvPicPr>
+            <a:picLocks noChangeAspect="1"/>
+          </p:cNvPicPr>
+          <p:nvPr/>
+        </p:nvPicPr>
+        <p:blipFill>
+          <a:blip r:embed="rId5"/>
+          <a:stretch>
+            <a:fillRect/>
+          </a:stretch>
+        </p:blipFill>
+        <p:spPr>
+          <a:xfrm>
+            <a:off x="877824" y="5449824"/>
+            <a:ext cx="292608" cy="292608"/>
+          </a:xfrm>
+          <a:prstGeom prst="rect">
+            <a:avLst/>
+          </a:prstGeom>
+        </p:spPr>
+      </p:pic>
+      <p:sp>
+        <p:nvSpPr>
+          <p:cNvPr id="22" name="ch-t-4"/>
+          <p:cNvSpPr txBox="1"/>
+          <p:nvPr/>
+        </p:nvSpPr>
+        <p:spPr>
+          <a:xfrm>
+            <a:off x="1554480" y="5184648"/>
+            <a:ext cx="9875520" cy="822960"/>
+          </a:xfrm>
+          <a:prstGeom prst="rect">
+            <a:avLst/>
+          </a:prstGeom>
+          <a:noFill/>
+          <a:ln/>
+        </p:spPr>
+        <p:txBody>
+          <a:bodyPr wrap="square" lIns="0" tIns="0" rIns="0" bIns="0" rtlCol="0" anchor="ctr"/>
+          <a:lstStyle/>
+          <a:p>
+            <a:pPr indent="0" marL="0">
+              <a:buNone/>
+            </a:pPr>
+            <a:r>
+              <a:rPr lang="en-US" sz="1700" dirty="0">
                 <a:solidFill>
                   <a:schemeClr val="tx1"/>
                 </a:solidFill>
               </a:rPr>
               <a:t>Free Colab has limited GPU time, so we added checkpoints to resume training if it disconnects.</a:t>
             </a:r>
-            <a:endParaRPr lang="en-US" sz="1800" dirty="0"/>
+            <a:endParaRPr lang="en-US" sz="1700" dirty="0"/>
           </a:p>
         </p:txBody>
       </p:sp>
@@ -3014,7 +3580,7 @@
           <a:bodyPr/>
           <a:lstStyle>
             <a:lvl1pPr>
-              <a:defRPr sz="1100">
+              <a:defRPr sz="1000">
                 <a:solidFill>
                   <a:schemeClr val="accent4"/>
                 </a:solidFill>
@@ -3096,14 +3662,34 @@
       </p:sp>
       <p:sp>
         <p:nvSpPr>
-          <p:cNvPr id="3" name="points"/>
+          <p:cNvPr id="3" name="fw-0-circle"/>
+          <p:cNvSpPr/>
+          <p:nvPr/>
+        </p:nvSpPr>
+        <p:spPr>
+          <a:xfrm>
+            <a:off x="548640" y="1389888"/>
+            <a:ext cx="548640" cy="548640"/>
+          </a:xfrm>
+          <a:prstGeom prst="ellipse">
+            <a:avLst/>
+          </a:prstGeom>
+          <a:solidFill>
+            <a:schemeClr val="accent3"/>
+          </a:solidFill>
+          <a:ln/>
+        </p:spPr>
+      </p:sp>
+      <p:sp>
+        <p:nvSpPr>
+          <p:cNvPr id="4" name="fw-0-num"/>
           <p:cNvSpPr txBox="1"/>
           <p:nvPr/>
         </p:nvSpPr>
         <p:spPr>
           <a:xfrm>
-            <a:off x="548640" y="1280160"/>
-            <a:ext cx="6949440" cy="4754880"/>
+            <a:off x="548640" y="1389888"/>
+            <a:ext cx="548640" cy="548640"/>
           </a:xfrm>
           <a:prstGeom prst="rect">
             <a:avLst/>
@@ -3112,85 +3698,339 @@
           <a:ln/>
         </p:spPr>
         <p:txBody>
-          <a:bodyPr wrap="square" lIns="0" tIns="0" rIns="0" bIns="0" rtlCol="0" anchor="t"/>
-          <a:lstStyle/>
-          <a:p>
-            <a:pPr marL="342900" indent="-342900">
-              <a:spcAft>
-                <a:spcPts val="1000"/>
-              </a:spcAft>
-              <a:buSzPct val="100000"/>
-              <a:buChar char="•"/>
-            </a:pPr>
-            <a:r>
-              <a:rPr lang="en-US" sz="1800" dirty="0">
+          <a:bodyPr wrap="square" lIns="0" tIns="0" rIns="0" bIns="0" rtlCol="0" anchor="ctr"/>
+          <a:lstStyle/>
+          <a:p>
+            <a:pPr algn="ctr" indent="0" marL="0">
+              <a:buNone/>
+            </a:pPr>
+            <a:r>
+              <a:rPr lang="en-US" sz="1560" b="1" dirty="0">
+                <a:solidFill>
+                  <a:schemeClr val="bg1"/>
+                </a:solidFill>
+              </a:rPr>
+              <a:t>1</a:t>
+            </a:r>
+            <a:endParaRPr lang="en-US" sz="1560" dirty="0"/>
+          </a:p>
+        </p:txBody>
+      </p:sp>
+      <p:sp>
+        <p:nvSpPr>
+          <p:cNvPr id="5" name="fw-t-0"/>
+          <p:cNvSpPr txBox="1"/>
+          <p:nvPr/>
+        </p:nvSpPr>
+        <p:spPr>
+          <a:xfrm>
+            <a:off x="1325880" y="1280160"/>
+            <a:ext cx="6309360" cy="777240"/>
+          </a:xfrm>
+          <a:prstGeom prst="rect">
+            <a:avLst/>
+          </a:prstGeom>
+          <a:noFill/>
+          <a:ln/>
+        </p:spPr>
+        <p:txBody>
+          <a:bodyPr wrap="square" lIns="0" tIns="0" rIns="0" bIns="0" rtlCol="0" anchor="ctr"/>
+          <a:lstStyle/>
+          <a:p>
+            <a:pPr indent="0" marL="0">
+              <a:buNone/>
+            </a:pPr>
+            <a:r>
+              <a:rPr lang="en-US" sz="1700" dirty="0">
                 <a:solidFill>
                   <a:schemeClr val="tx1"/>
                 </a:solidFill>
               </a:rPr>
               <a:t>Fix the face shadow and signature problems by improving the captions.</a:t>
             </a:r>
-            <a:endParaRPr lang="en-US" sz="1800" dirty="0"/>
-          </a:p>
-          <a:p>
-            <a:pPr marL="342900" indent="-342900">
-              <a:spcAft>
-                <a:spcPts val="1000"/>
-              </a:spcAft>
-              <a:buSzPct val="100000"/>
-              <a:buChar char="•"/>
-            </a:pPr>
-            <a:r>
-              <a:rPr lang="en-US" sz="1800" dirty="0">
+            <a:endParaRPr lang="en-US" sz="1700" dirty="0"/>
+          </a:p>
+        </p:txBody>
+      </p:sp>
+      <p:sp>
+        <p:nvSpPr>
+          <p:cNvPr id="6" name="fw-1-circle"/>
+          <p:cNvSpPr/>
+          <p:nvPr/>
+        </p:nvSpPr>
+        <p:spPr>
+          <a:xfrm>
+            <a:off x="548640" y="2578608"/>
+            <a:ext cx="548640" cy="548640"/>
+          </a:xfrm>
+          <a:prstGeom prst="ellipse">
+            <a:avLst/>
+          </a:prstGeom>
+          <a:solidFill>
+            <a:schemeClr val="accent2"/>
+          </a:solidFill>
+          <a:ln/>
+        </p:spPr>
+      </p:sp>
+      <p:sp>
+        <p:nvSpPr>
+          <p:cNvPr id="7" name="fw-1-num"/>
+          <p:cNvSpPr txBox="1"/>
+          <p:nvPr/>
+        </p:nvSpPr>
+        <p:spPr>
+          <a:xfrm>
+            <a:off x="548640" y="2578608"/>
+            <a:ext cx="548640" cy="548640"/>
+          </a:xfrm>
+          <a:prstGeom prst="rect">
+            <a:avLst/>
+          </a:prstGeom>
+          <a:noFill/>
+          <a:ln/>
+        </p:spPr>
+        <p:txBody>
+          <a:bodyPr wrap="square" lIns="0" tIns="0" rIns="0" bIns="0" rtlCol="0" anchor="ctr"/>
+          <a:lstStyle/>
+          <a:p>
+            <a:pPr algn="ctr" indent="0" marL="0">
+              <a:buNone/>
+            </a:pPr>
+            <a:r>
+              <a:rPr lang="en-US" sz="1560" b="1" dirty="0">
+                <a:solidFill>
+                  <a:schemeClr val="bg1"/>
+                </a:solidFill>
+              </a:rPr>
+              <a:t>2</a:t>
+            </a:r>
+            <a:endParaRPr lang="en-US" sz="1560" dirty="0"/>
+          </a:p>
+        </p:txBody>
+      </p:sp>
+      <p:sp>
+        <p:nvSpPr>
+          <p:cNvPr id="8" name="fw-t-1"/>
+          <p:cNvSpPr txBox="1"/>
+          <p:nvPr/>
+        </p:nvSpPr>
+        <p:spPr>
+          <a:xfrm>
+            <a:off x="1325880" y="2468880"/>
+            <a:ext cx="6309360" cy="777240"/>
+          </a:xfrm>
+          <a:prstGeom prst="rect">
+            <a:avLst/>
+          </a:prstGeom>
+          <a:noFill/>
+          <a:ln/>
+        </p:spPr>
+        <p:txBody>
+          <a:bodyPr wrap="square" lIns="0" tIns="0" rIns="0" bIns="0" rtlCol="0" anchor="ctr"/>
+          <a:lstStyle/>
+          <a:p>
+            <a:pPr indent="0" marL="0">
+              <a:buNone/>
+            </a:pPr>
+            <a:r>
+              <a:rPr lang="en-US" sz="1700" dirty="0">
                 <a:solidFill>
                   <a:schemeClr val="tx1"/>
                 </a:solidFill>
               </a:rPr>
               <a:t>Milestone 3: use an LLM to turn a story description into a detailed prompt (e.g. "Krishna and Arjuna at Kurukshetra").</a:t>
             </a:r>
-            <a:endParaRPr lang="en-US" sz="1800" dirty="0"/>
-          </a:p>
-          <a:p>
-            <a:pPr marL="342900" indent="-342900">
-              <a:spcAft>
-                <a:spcPts val="1000"/>
-              </a:spcAft>
-              <a:buSzPct val="100000"/>
-              <a:buChar char="•"/>
-            </a:pPr>
-            <a:r>
-              <a:rPr lang="en-US" sz="1800" dirty="0">
+            <a:endParaRPr lang="en-US" sz="1700" dirty="0"/>
+          </a:p>
+        </p:txBody>
+      </p:sp>
+      <p:sp>
+        <p:nvSpPr>
+          <p:cNvPr id="9" name="fw-2-circle"/>
+          <p:cNvSpPr/>
+          <p:nvPr/>
+        </p:nvSpPr>
+        <p:spPr>
+          <a:xfrm>
+            <a:off x="548640" y="3767328"/>
+            <a:ext cx="548640" cy="548640"/>
+          </a:xfrm>
+          <a:prstGeom prst="ellipse">
+            <a:avLst/>
+          </a:prstGeom>
+          <a:solidFill>
+            <a:schemeClr val="accent2"/>
+          </a:solidFill>
+          <a:ln/>
+        </p:spPr>
+      </p:sp>
+      <p:sp>
+        <p:nvSpPr>
+          <p:cNvPr id="10" name="fw-2-num"/>
+          <p:cNvSpPr txBox="1"/>
+          <p:nvPr/>
+        </p:nvSpPr>
+        <p:spPr>
+          <a:xfrm>
+            <a:off x="548640" y="3767328"/>
+            <a:ext cx="548640" cy="548640"/>
+          </a:xfrm>
+          <a:prstGeom prst="rect">
+            <a:avLst/>
+          </a:prstGeom>
+          <a:noFill/>
+          <a:ln/>
+        </p:spPr>
+        <p:txBody>
+          <a:bodyPr wrap="square" lIns="0" tIns="0" rIns="0" bIns="0" rtlCol="0" anchor="ctr"/>
+          <a:lstStyle/>
+          <a:p>
+            <a:pPr algn="ctr" indent="0" marL="0">
+              <a:buNone/>
+            </a:pPr>
+            <a:r>
+              <a:rPr lang="en-US" sz="1560" b="1" dirty="0">
+                <a:solidFill>
+                  <a:schemeClr val="bg1"/>
+                </a:solidFill>
+              </a:rPr>
+              <a:t>3</a:t>
+            </a:r>
+            <a:endParaRPr lang="en-US" sz="1560" dirty="0"/>
+          </a:p>
+        </p:txBody>
+      </p:sp>
+      <p:sp>
+        <p:nvSpPr>
+          <p:cNvPr id="11" name="fw-t-2"/>
+          <p:cNvSpPr txBox="1"/>
+          <p:nvPr/>
+        </p:nvSpPr>
+        <p:spPr>
+          <a:xfrm>
+            <a:off x="1325880" y="3657600"/>
+            <a:ext cx="6309360" cy="777240"/>
+          </a:xfrm>
+          <a:prstGeom prst="rect">
+            <a:avLst/>
+          </a:prstGeom>
+          <a:noFill/>
+          <a:ln/>
+        </p:spPr>
+        <p:txBody>
+          <a:bodyPr wrap="square" lIns="0" tIns="0" rIns="0" bIns="0" rtlCol="0" anchor="ctr"/>
+          <a:lstStyle/>
+          <a:p>
+            <a:pPr indent="0" marL="0">
+              <a:buNone/>
+            </a:pPr>
+            <a:r>
+              <a:rPr lang="en-US" sz="1700" dirty="0">
                 <a:solidFill>
                   <a:schemeClr val="tx1"/>
                 </a:solidFill>
               </a:rPr>
               <a:t>Milestone 4: add ControlNet so the user can control the pose of the people.</a:t>
             </a:r>
-            <a:endParaRPr lang="en-US" sz="1800" dirty="0"/>
-          </a:p>
-          <a:p>
-            <a:pPr marL="342900" indent="-342900">
-              <a:spcAft>
-                <a:spcPts val="1000"/>
-              </a:spcAft>
-              <a:buSzPct val="100000"/>
-              <a:buChar char="•"/>
-            </a:pPr>
-            <a:r>
-              <a:rPr lang="en-US" sz="1800" dirty="0">
+            <a:endParaRPr lang="en-US" sz="1700" dirty="0"/>
+          </a:p>
+        </p:txBody>
+      </p:sp>
+      <p:sp>
+        <p:nvSpPr>
+          <p:cNvPr id="12" name="fw-3-circle"/>
+          <p:cNvSpPr/>
+          <p:nvPr/>
+        </p:nvSpPr>
+        <p:spPr>
+          <a:xfrm>
+            <a:off x="548640" y="4956048"/>
+            <a:ext cx="548640" cy="548640"/>
+          </a:xfrm>
+          <a:prstGeom prst="ellipse">
+            <a:avLst/>
+          </a:prstGeom>
+          <a:solidFill>
+            <a:schemeClr val="accent2"/>
+          </a:solidFill>
+          <a:ln/>
+        </p:spPr>
+      </p:sp>
+      <p:sp>
+        <p:nvSpPr>
+          <p:cNvPr id="13" name="fw-3-num"/>
+          <p:cNvSpPr txBox="1"/>
+          <p:nvPr/>
+        </p:nvSpPr>
+        <p:spPr>
+          <a:xfrm>
+            <a:off x="548640" y="4956048"/>
+            <a:ext cx="548640" cy="548640"/>
+          </a:xfrm>
+          <a:prstGeom prst="rect">
+            <a:avLst/>
+          </a:prstGeom>
+          <a:noFill/>
+          <a:ln/>
+        </p:spPr>
+        <p:txBody>
+          <a:bodyPr wrap="square" lIns="0" tIns="0" rIns="0" bIns="0" rtlCol="0" anchor="ctr"/>
+          <a:lstStyle/>
+          <a:p>
+            <a:pPr algn="ctr" indent="0" marL="0">
+              <a:buNone/>
+            </a:pPr>
+            <a:r>
+              <a:rPr lang="en-US" sz="1560" b="1" dirty="0">
+                <a:solidFill>
+                  <a:schemeClr val="bg1"/>
+                </a:solidFill>
+              </a:rPr>
+              <a:t>4</a:t>
+            </a:r>
+            <a:endParaRPr lang="en-US" sz="1560" dirty="0"/>
+          </a:p>
+        </p:txBody>
+      </p:sp>
+      <p:sp>
+        <p:nvSpPr>
+          <p:cNvPr id="14" name="fw-t-3"/>
+          <p:cNvSpPr txBox="1"/>
+          <p:nvPr/>
+        </p:nvSpPr>
+        <p:spPr>
+          <a:xfrm>
+            <a:off x="1325880" y="4846320"/>
+            <a:ext cx="6309360" cy="777240"/>
+          </a:xfrm>
+          <a:prstGeom prst="rect">
+            <a:avLst/>
+          </a:prstGeom>
+          <a:noFill/>
+          <a:ln/>
+        </p:spPr>
+        <p:txBody>
+          <a:bodyPr wrap="square" lIns="0" tIns="0" rIns="0" bIns="0" rtlCol="0" anchor="ctr"/>
+          <a:lstStyle/>
+          <a:p>
+            <a:pPr indent="0" marL="0">
+              <a:buNone/>
+            </a:pPr>
+            <a:r>
+              <a:rPr lang="en-US" sz="1700" dirty="0">
                 <a:solidFill>
                   <a:schemeClr val="tx1"/>
                 </a:solidFill>
               </a:rPr>
               <a:t>Build a simple web interface (Gradio) and do a better evaluation, including human ratings.</a:t>
             </a:r>
-            <a:endParaRPr lang="en-US" sz="1800" dirty="0"/>
+            <a:endParaRPr lang="en-US" sz="1700" dirty="0"/>
           </a:p>
         </p:txBody>
       </p:sp>
       <p:pic>
         <p:nvPicPr>
-          <p:cNvPr id="4" name="krishna-image" descr="/private/tmp/claude-501/-Users-shashwatsahu-Desktop-the-next-ravi-varma/b50e4b20-09e3-45d0-8877-560ccb85868c/scratchpad/deck/assets/krishna_lora.jpg">    </p:cNvPr>
+          <p:cNvPr id="15" name="krishna-image" descr="/private/tmp/claude-501/-Users-shashwatsahu-Desktop-the-next-ravi-varma/b50e4b20-09e3-45d0-8877-560ccb85868c/scratchpad/deck/assets/krishna_lora.jpg">    </p:cNvPr>
           <p:cNvPicPr>
             <a:picLocks noChangeAspect="1"/>
           </p:cNvPicPr>
@@ -3204,23 +4044,30 @@
         </p:blipFill>
         <p:spPr>
           <a:xfrm>
-            <a:off x="7955280" y="1463040"/>
+            <a:off x="8001000" y="1463040"/>
             <a:ext cx="3657600" cy="2560320"/>
           </a:xfrm>
           <a:prstGeom prst="rect">
             <a:avLst/>
           </a:prstGeom>
+          <a:effectLst>
+            <a:outerShdw sx="100000" sy="100000" kx="0" ky="0" algn="bl" rotWithShape="0" blurRad="76200" dist="38100" dir="2700000">
+              <a:srgbClr val="000000">
+                <a:alpha val="28000"/>
+              </a:srgbClr>
+            </a:outerShdw>
+          </a:effectLst>
         </p:spPr>
       </p:pic>
       <p:sp>
         <p:nvSpPr>
-          <p:cNvPr id="5" name="caption"/>
+          <p:cNvPr id="16" name="caption"/>
           <p:cNvSpPr txBox="1"/>
           <p:nvPr/>
         </p:nvSpPr>
         <p:spPr>
           <a:xfrm>
-            <a:off x="7680960" y="4114800"/>
+            <a:off x="7726680" y="4160520"/>
             <a:ext cx="4206240" cy="274320"/>
           </a:xfrm>
           <a:prstGeom prst="rect">
@@ -3276,7 +4123,7 @@
           <a:bodyPr/>
           <a:lstStyle>
             <a:lvl1pPr>
-              <a:defRPr sz="1100">
+              <a:defRPr sz="1000">
                 <a:solidFill>
                   <a:schemeClr val="accent4"/>
                 </a:solidFill>
@@ -3328,8 +4175,8 @@
         </p:nvSpPr>
         <p:spPr>
           <a:xfrm>
-            <a:off x="731520" y="2011680"/>
-            <a:ext cx="10698480" cy="1097280"/>
+            <a:off x="731520" y="2103120"/>
+            <a:ext cx="10698480" cy="1280160"/>
           </a:xfrm>
           <a:prstGeom prst="rect">
             <a:avLst/>
@@ -3341,18 +4188,18 @@
           <a:bodyPr wrap="square" lIns="0" tIns="0" rIns="0" bIns="0" rtlCol="0" anchor="b"/>
           <a:lstStyle/>
           <a:p>
-            <a:pPr algn="l" indent="0" marL="0">
-              <a:buNone/>
-            </a:pPr>
-            <a:r>
-              <a:rPr lang="en-US" sz="4400" b="1" dirty="0">
-                <a:solidFill>
-                  <a:schemeClr val="tx2"/>
+            <a:pPr algn="ctr" indent="0" marL="0">
+              <a:buNone/>
+            </a:pPr>
+            <a:r>
+              <a:rPr lang="en-US" sz="5400" b="1" dirty="0">
+                <a:solidFill>
+                  <a:schemeClr val="bg1"/>
                 </a:solidFill>
               </a:rPr>
               <a:t>Thank You</a:t>
             </a:r>
-            <a:endParaRPr lang="en-US" sz="4400" dirty="0"/>
+            <a:endParaRPr lang="en-US" sz="5400" dirty="0"/>
           </a:p>
         </p:txBody>
       </p:sp>
@@ -3366,8 +4213,8 @@
         </p:nvSpPr>
         <p:spPr>
           <a:xfrm>
-            <a:off x="731520" y="3246120"/>
-            <a:ext cx="10698480" cy="2377440"/>
+            <a:off x="731520" y="3566160"/>
+            <a:ext cx="10698480" cy="1463040"/>
           </a:xfrm>
           <a:prstGeom prst="rect">
             <a:avLst/>
@@ -3379,13 +4226,13 @@
           <a:bodyPr wrap="square" lIns="0" tIns="0" rIns="0" bIns="0" rtlCol="0" anchor="t"/>
           <a:lstStyle/>
           <a:p>
-            <a:pPr algn="l" indent="0" marL="0">
+            <a:pPr algn="ctr" indent="0" marL="0">
               <a:buNone/>
             </a:pPr>
             <a:r>
               <a:rPr lang="en-US" sz="2000" dirty="0">
                 <a:solidFill>
-                  <a:schemeClr val="tx1"/>
+                  <a:schemeClr val="accent5"/>
                 </a:solidFill>
               </a:rPr>
               <a:t>Questions?</a:t>
@@ -3393,19 +4240,19 @@
             <a:endParaRPr lang="en-US" sz="2000" dirty="0"/>
           </a:p>
           <a:p>
-            <a:pPr algn="l" indent="0" marL="0">
+            <a:pPr algn="ctr" indent="0" marL="0">
               <a:buNone/>
             </a:pPr>
             <a:endParaRPr lang="en-US" sz="2000" dirty="0"/>
           </a:p>
           <a:p>
-            <a:pPr algn="l" indent="0" marL="0">
+            <a:pPr algn="ctr" indent="0" marL="0">
               <a:buNone/>
             </a:pPr>
             <a:r>
               <a:rPr lang="en-US" sz="2000" dirty="0">
                 <a:solidFill>
-                  <a:schemeClr val="tx1"/>
+                  <a:schemeClr val="accent5"/>
                 </a:solidFill>
               </a:rPr>
               <a:t>Code and results: github.com/f20240684-cmd/the-next-ravi-varma-v2</a:t>
@@ -3485,8 +4332,8 @@
         </p:nvSpPr>
         <p:spPr>
           <a:xfrm>
-            <a:off x="548640" y="1280160"/>
-            <a:ext cx="6949440" cy="4754880"/>
+            <a:off x="548640" y="1325880"/>
+            <a:ext cx="6949440" cy="3108960"/>
           </a:xfrm>
           <a:prstGeom prst="rect">
             <a:avLst/>
@@ -3506,14 +4353,14 @@
               <a:buChar char="•"/>
             </a:pPr>
             <a:r>
-              <a:rPr lang="en-US" sz="1800" dirty="0">
+              <a:rPr lang="en-US" sz="1700" dirty="0">
                 <a:solidFill>
                   <a:schemeClr val="tx1"/>
                 </a:solidFill>
               </a:rPr>
               <a:t>Raja Ravi Varma (1848-1906) was a famous Indian painter known for realistic oil paintings of Indian mythology and royal portraits.</a:t>
             </a:r>
-            <a:endParaRPr lang="en-US" sz="1800" dirty="0"/>
+            <a:endParaRPr lang="en-US" sz="1700" dirty="0"/>
           </a:p>
           <a:p>
             <a:pPr marL="342900" indent="-342900">
@@ -3524,14 +4371,14 @@
               <a:buChar char="•"/>
             </a:pPr>
             <a:r>
-              <a:rPr lang="en-US" sz="1800" dirty="0">
+              <a:rPr lang="en-US" sz="1700" dirty="0">
                 <a:solidFill>
                   <a:schemeClr val="tx1"/>
                 </a:solidFill>
               </a:rPr>
               <a:t>Inspired by "The Next Rembrandt" project, which generated a new painting in Rembrandt's style.</a:t>
             </a:r>
-            <a:endParaRPr lang="en-US" sz="1800" dirty="0"/>
+            <a:endParaRPr lang="en-US" sz="1700" dirty="0"/>
           </a:p>
           <a:p>
             <a:pPr marL="342900" indent="-342900">
@@ -3542,30 +4389,81 @@
               <a:buChar char="•"/>
             </a:pPr>
             <a:r>
+              <a:rPr lang="en-US" sz="1700" dirty="0">
+                <a:solidFill>
+                  <a:schemeClr val="tx1"/>
+                </a:solidFill>
+              </a:rPr>
+              <a:t>We use Stable Diffusion 1.5 and fine-tune it with LoRA on Ravi Varma's paintings.</a:t>
+            </a:r>
+            <a:endParaRPr lang="en-US" sz="1700" dirty="0"/>
+          </a:p>
+        </p:txBody>
+      </p:sp>
+      <p:sp>
+        <p:nvSpPr>
+          <p:cNvPr id="4" name="goal-box"/>
+          <p:cNvSpPr/>
+          <p:nvPr/>
+        </p:nvSpPr>
+        <p:spPr>
+          <a:xfrm>
+            <a:off x="548640" y="4526280"/>
+            <a:ext cx="6949440" cy="1325880"/>
+          </a:xfrm>
+          <a:prstGeom prst="roundRect">
+            <a:avLst>
+              <a:gd name="adj" fmla="val 6897"/>
+            </a:avLst>
+          </a:prstGeom>
+          <a:solidFill>
+            <a:schemeClr val="accent5"/>
+          </a:solidFill>
+          <a:ln/>
+        </p:spPr>
+      </p:sp>
+      <p:sp>
+        <p:nvSpPr>
+          <p:cNvPr id="5" name="goal-text"/>
+          <p:cNvSpPr txBox="1"/>
+          <p:nvPr/>
+        </p:nvSpPr>
+        <p:spPr>
+          <a:xfrm>
+            <a:off x="777240" y="4617720"/>
+            <a:ext cx="6492240" cy="1143000"/>
+          </a:xfrm>
+          <a:prstGeom prst="rect">
+            <a:avLst/>
+          </a:prstGeom>
+          <a:noFill/>
+          <a:ln/>
+        </p:spPr>
+        <p:txBody>
+          <a:bodyPr wrap="square" lIns="0" tIns="0" rIns="0" bIns="0" rtlCol="0" anchor="ctr"/>
+          <a:lstStyle/>
+          <a:p>
+            <a:pPr indent="0" marL="0">
+              <a:buNone/>
+            </a:pPr>
+            <a:r>
+              <a:rPr lang="en-US" sz="1800" b="1" dirty="0">
+                <a:solidFill>
+                  <a:schemeClr val="tx2"/>
+                </a:solidFill>
+              </a:rPr>
+              <a:t>Our goal: </a:t>
+            </a:r>
+            <a:pPr indent="0" marL="0">
+              <a:buNone/>
+            </a:pPr>
+            <a:r>
               <a:rPr lang="en-US" sz="1800" dirty="0">
                 <a:solidFill>
                   <a:schemeClr val="tx1"/>
                 </a:solidFill>
               </a:rPr>
-              <a:t>Our goal: give a text description of a scene and generate a new image in Ravi Varma's style.</a:t>
-            </a:r>
-            <a:endParaRPr lang="en-US" sz="1800" dirty="0"/>
-          </a:p>
-          <a:p>
-            <a:pPr marL="342900" indent="-342900">
-              <a:spcAft>
-                <a:spcPts val="1000"/>
-              </a:spcAft>
-              <a:buSzPct val="100000"/>
-              <a:buChar char="•"/>
-            </a:pPr>
-            <a:r>
-              <a:rPr lang="en-US" sz="1800" dirty="0">
-                <a:solidFill>
-                  <a:schemeClr val="tx1"/>
-                </a:solidFill>
-              </a:rPr>
-              <a:t>We use Stable Diffusion 1.5 and fine-tune it with LoRA on Ravi Varma's paintings.</a:t>
+              <a:t>give a text description of a scene and generate a new image in Ravi Varma's style.</a:t>
             </a:r>
             <a:endParaRPr lang="en-US" sz="1800" dirty="0"/>
           </a:p>
@@ -3573,7 +4471,7 @@
       </p:sp>
       <p:pic>
         <p:nvPicPr>
-          <p:cNvPr id="4" name="varma-painting" descr="/private/tmp/claude-501/-Users-shashwatsahu-Desktop-the-next-ravi-varma/b50e4b20-09e3-45d0-8877-560ccb85868c/scratchpad/deck/assets/caption_example.jpg">    </p:cNvPr>
+          <p:cNvPr id="6" name="varma-painting" descr="/private/tmp/claude-501/-Users-shashwatsahu-Desktop-the-next-ravi-varma/b50e4b20-09e3-45d0-8877-560ccb85868c/scratchpad/deck/assets/caption_example.jpg">    </p:cNvPr>
           <p:cNvPicPr>
             <a:picLocks noChangeAspect="1"/>
           </p:cNvPicPr>
@@ -3593,17 +4491,24 @@
           <a:prstGeom prst="rect">
             <a:avLst/>
           </a:prstGeom>
+          <a:effectLst>
+            <a:outerShdw sx="100000" sy="100000" kx="0" ky="0" algn="bl" rotWithShape="0" blurRad="76200" dist="38100" dir="2700000">
+              <a:srgbClr val="000000">
+                <a:alpha val="28000"/>
+              </a:srgbClr>
+            </a:outerShdw>
+          </a:effectLst>
         </p:spPr>
       </p:pic>
       <p:sp>
         <p:nvSpPr>
-          <p:cNvPr id="5" name="caption"/>
+          <p:cNvPr id="7" name="caption"/>
           <p:cNvSpPr txBox="1"/>
           <p:nvPr/>
         </p:nvSpPr>
         <p:spPr>
           <a:xfrm>
-            <a:off x="7772400" y="5852160"/>
+            <a:off x="7772400" y="5897880"/>
             <a:ext cx="3657600" cy="274320"/>
           </a:xfrm>
           <a:prstGeom prst="rect">
@@ -3659,7 +4564,7 @@
           <a:bodyPr/>
           <a:lstStyle>
             <a:lvl1pPr>
-              <a:defRPr sz="1100">
+              <a:defRPr sz="1000">
                 <a:solidFill>
                   <a:schemeClr val="accent4"/>
                 </a:solidFill>
@@ -3739,936 +4644,58 @@
           </a:p>
         </p:txBody>
       </p:sp>
-      <p:graphicFrame>
-        <p:nvGraphicFramePr>
-          <p:cNvPr id="4" name="milestone-table"/>
-          <p:cNvGraphicFramePr>
-            <a:graphicFrameLocks noGrp="1"/>
-          </p:cNvGraphicFramePr>
-          <p:nvPr>
-            <p:extLst>
-              <p:ext uri="{D42A27DB-BD31-4B8C-83A1-F6EECF244321}">
-                <p14:modId xmlns:p14="http://schemas.microsoft.com/office/powerpoint/2010/main" val="1579011935"/>
-              </p:ext>
-            </p:extLst>
-          </p:nvPr>
-        </p:nvGraphicFramePr>
-        <p:xfrm>
-          <a:off x="548640" y="1371600"/>
-          <a:ext cx="11064240" cy="914400"/>
-        </p:xfrm>
-        <a:graphic>
-          <a:graphicData uri="http://schemas.openxmlformats.org/drawingml/2006/table">
-            <a:tbl>
-              <a:tblPr/>
-              <a:tblGrid>
-                <a:gridCol w="1463040"/>
-                <a:gridCol w="7132320"/>
-                <a:gridCol w="2468880"/>
-              </a:tblGrid>
-              <a:tr h="640080">
-                <a:tc>
-                  <a:txBody>
-                    <a:bodyPr/>
-                    <a:lstStyle/>
-                    <a:p>
-                      <a:pPr indent="0" marL="0">
-                        <a:buNone/>
-                      </a:pPr>
-                      <a:r>
-                        <a:rPr lang="en-US" sz="1800" b="1" dirty="0">
-                          <a:solidFill>
-                            <a:schemeClr val="bg1"/>
-                          </a:solidFill>
-                        </a:rPr>
-                        <a:t>Milestone</a:t>
-                      </a:r>
-                      <a:endParaRPr lang="en-US" sz="1800" dirty="0"/>
-                    </a:p>
-                  </a:txBody>
-                  <a:tcPr marL="91440" marR="91440" marT="45720" marB="45720" anchor="ctr">
-                    <a:lnL w="12700" cap="flat" cmpd="sng" algn="ctr">
-                      <a:solidFill>
-                        <a:srgbClr val="D9D9D9"/>
-                      </a:solidFill>
-                      <a:prstDash val="solid"/>
-                      <a:round/>
-                      <a:headEnd type="none" w="med" len="med"/>
-                      <a:tailEnd type="none" w="med" len="med"/>
-                    </a:lnL>
-                    <a:lnR w="12700" cap="flat" cmpd="sng" algn="ctr">
-                      <a:solidFill>
-                        <a:srgbClr val="D9D9D9"/>
-                      </a:solidFill>
-                      <a:prstDash val="solid"/>
-                      <a:round/>
-                      <a:headEnd type="none" w="med" len="med"/>
-                      <a:tailEnd type="none" w="med" len="med"/>
-                    </a:lnR>
-                    <a:lnT w="12700" cap="flat" cmpd="sng" algn="ctr">
-                      <a:solidFill>
-                        <a:srgbClr val="D9D9D9"/>
-                      </a:solidFill>
-                      <a:prstDash val="solid"/>
-                      <a:round/>
-                      <a:headEnd type="none" w="med" len="med"/>
-                      <a:tailEnd type="none" w="med" len="med"/>
-                    </a:lnT>
-                    <a:lnB w="12700" cap="flat" cmpd="sng" algn="ctr">
-                      <a:solidFill>
-                        <a:srgbClr val="D9D9D9"/>
-                      </a:solidFill>
-                      <a:prstDash val="solid"/>
-                      <a:round/>
-                      <a:headEnd type="none" w="med" len="med"/>
-                      <a:tailEnd type="none" w="med" len="med"/>
-                    </a:lnB>
-                    <a:solidFill>
-                      <a:schemeClr val="tx2"/>
-                    </a:solidFill>
-                  </a:tcPr>
-                </a:tc>
-                <a:tc>
-                  <a:txBody>
-                    <a:bodyPr/>
-                    <a:lstStyle/>
-                    <a:p>
-                      <a:pPr indent="0" marL="0">
-                        <a:buNone/>
-                      </a:pPr>
-                      <a:r>
-                        <a:rPr lang="en-US" sz="1800" b="1" dirty="0">
-                          <a:solidFill>
-                            <a:schemeClr val="bg1"/>
-                          </a:solidFill>
-                        </a:rPr>
-                        <a:t>Work</a:t>
-                      </a:r>
-                      <a:endParaRPr lang="en-US" sz="1800" dirty="0"/>
-                    </a:p>
-                  </a:txBody>
-                  <a:tcPr marL="91440" marR="91440" marT="45720" marB="45720" anchor="ctr">
-                    <a:lnL w="12700" cap="flat" cmpd="sng" algn="ctr">
-                      <a:solidFill>
-                        <a:srgbClr val="D9D9D9"/>
-                      </a:solidFill>
-                      <a:prstDash val="solid"/>
-                      <a:round/>
-                      <a:headEnd type="none" w="med" len="med"/>
-                      <a:tailEnd type="none" w="med" len="med"/>
-                    </a:lnL>
-                    <a:lnR w="12700" cap="flat" cmpd="sng" algn="ctr">
-                      <a:solidFill>
-                        <a:srgbClr val="D9D9D9"/>
-                      </a:solidFill>
-                      <a:prstDash val="solid"/>
-                      <a:round/>
-                      <a:headEnd type="none" w="med" len="med"/>
-                      <a:tailEnd type="none" w="med" len="med"/>
-                    </a:lnR>
-                    <a:lnT w="12700" cap="flat" cmpd="sng" algn="ctr">
-                      <a:solidFill>
-                        <a:srgbClr val="D9D9D9"/>
-                      </a:solidFill>
-                      <a:prstDash val="solid"/>
-                      <a:round/>
-                      <a:headEnd type="none" w="med" len="med"/>
-                      <a:tailEnd type="none" w="med" len="med"/>
-                    </a:lnT>
-                    <a:lnB w="12700" cap="flat" cmpd="sng" algn="ctr">
-                      <a:solidFill>
-                        <a:srgbClr val="D9D9D9"/>
-                      </a:solidFill>
-                      <a:prstDash val="solid"/>
-                      <a:round/>
-                      <a:headEnd type="none" w="med" len="med"/>
-                      <a:tailEnd type="none" w="med" len="med"/>
-                    </a:lnB>
-                    <a:solidFill>
-                      <a:schemeClr val="tx2"/>
-                    </a:solidFill>
-                  </a:tcPr>
-                </a:tc>
-                <a:tc>
-                  <a:txBody>
-                    <a:bodyPr/>
-                    <a:lstStyle/>
-                    <a:p>
-                      <a:pPr indent="0" marL="0">
-                        <a:buNone/>
-                      </a:pPr>
-                      <a:r>
-                        <a:rPr lang="en-US" sz="1800" b="1" dirty="0">
-                          <a:solidFill>
-                            <a:schemeClr val="bg1"/>
-                          </a:solidFill>
-                        </a:rPr>
-                        <a:t>Status</a:t>
-                      </a:r>
-                      <a:endParaRPr lang="en-US" sz="1800" dirty="0"/>
-                    </a:p>
-                  </a:txBody>
-                  <a:tcPr marL="91440" marR="91440" marT="45720" marB="45720" anchor="ctr">
-                    <a:lnL w="12700" cap="flat" cmpd="sng" algn="ctr">
-                      <a:solidFill>
-                        <a:srgbClr val="D9D9D9"/>
-                      </a:solidFill>
-                      <a:prstDash val="solid"/>
-                      <a:round/>
-                      <a:headEnd type="none" w="med" len="med"/>
-                      <a:tailEnd type="none" w="med" len="med"/>
-                    </a:lnL>
-                    <a:lnR w="12700" cap="flat" cmpd="sng" algn="ctr">
-                      <a:solidFill>
-                        <a:srgbClr val="D9D9D9"/>
-                      </a:solidFill>
-                      <a:prstDash val="solid"/>
-                      <a:round/>
-                      <a:headEnd type="none" w="med" len="med"/>
-                      <a:tailEnd type="none" w="med" len="med"/>
-                    </a:lnR>
-                    <a:lnT w="12700" cap="flat" cmpd="sng" algn="ctr">
-                      <a:solidFill>
-                        <a:srgbClr val="D9D9D9"/>
-                      </a:solidFill>
-                      <a:prstDash val="solid"/>
-                      <a:round/>
-                      <a:headEnd type="none" w="med" len="med"/>
-                      <a:tailEnd type="none" w="med" len="med"/>
-                    </a:lnT>
-                    <a:lnB w="12700" cap="flat" cmpd="sng" algn="ctr">
-                      <a:solidFill>
-                        <a:srgbClr val="D9D9D9"/>
-                      </a:solidFill>
-                      <a:prstDash val="solid"/>
-                      <a:round/>
-                      <a:headEnd type="none" w="med" len="med"/>
-                      <a:tailEnd type="none" w="med" len="med"/>
-                    </a:lnB>
-                    <a:solidFill>
-                      <a:schemeClr val="tx2"/>
-                    </a:solidFill>
-                  </a:tcPr>
-                </a:tc>
-              </a:tr>
-              <a:tr h="640080">
-                <a:tc>
-                  <a:txBody>
-                    <a:bodyPr/>
-                    <a:lstStyle/>
-                    <a:p>
-                      <a:pPr indent="0" marL="0">
-                        <a:buNone/>
-                      </a:pPr>
-                      <a:r>
-                        <a:rPr lang="en-US" sz="1800" dirty="0">
-                          <a:solidFill>
-                            <a:schemeClr val="tx1"/>
-                          </a:solidFill>
-                        </a:rPr>
-                        <a:t>1</a:t>
-                      </a:r>
-                      <a:endParaRPr lang="en-US" sz="1800" dirty="0"/>
-                    </a:p>
-                  </a:txBody>
-                  <a:tcPr marL="91440" marR="91440" marT="45720" marB="45720" anchor="ctr">
-                    <a:lnL w="12700" cap="flat" cmpd="sng" algn="ctr">
-                      <a:solidFill>
-                        <a:srgbClr val="D9D9D9"/>
-                      </a:solidFill>
-                      <a:prstDash val="solid"/>
-                      <a:round/>
-                      <a:headEnd type="none" w="med" len="med"/>
-                      <a:tailEnd type="none" w="med" len="med"/>
-                    </a:lnL>
-                    <a:lnR w="12700" cap="flat" cmpd="sng" algn="ctr">
-                      <a:solidFill>
-                        <a:srgbClr val="D9D9D9"/>
-                      </a:solidFill>
-                      <a:prstDash val="solid"/>
-                      <a:round/>
-                      <a:headEnd type="none" w="med" len="med"/>
-                      <a:tailEnd type="none" w="med" len="med"/>
-                    </a:lnR>
-                    <a:lnT w="12700" cap="flat" cmpd="sng" algn="ctr">
-                      <a:solidFill>
-                        <a:srgbClr val="D9D9D9"/>
-                      </a:solidFill>
-                      <a:prstDash val="solid"/>
-                      <a:round/>
-                      <a:headEnd type="none" w="med" len="med"/>
-                      <a:tailEnd type="none" w="med" len="med"/>
-                    </a:lnT>
-                    <a:lnB w="12700" cap="flat" cmpd="sng" algn="ctr">
-                      <a:solidFill>
-                        <a:srgbClr val="D9D9D9"/>
-                      </a:solidFill>
-                      <a:prstDash val="solid"/>
-                      <a:round/>
-                      <a:headEnd type="none" w="med" len="med"/>
-                      <a:tailEnd type="none" w="med" len="med"/>
-                    </a:lnB>
-                  </a:tcPr>
-                </a:tc>
-                <a:tc>
-                  <a:txBody>
-                    <a:bodyPr/>
-                    <a:lstStyle/>
-                    <a:p>
-                      <a:pPr indent="0" marL="0">
-                        <a:buNone/>
-                      </a:pPr>
-                      <a:r>
-                        <a:rPr lang="en-US" sz="1800" dirty="0">
-                          <a:solidFill>
-                            <a:schemeClr val="tx1"/>
-                          </a:solidFill>
-                        </a:rPr>
-                        <a:t>Dataset collection, cleaning and captioning</a:t>
-                      </a:r>
-                      <a:endParaRPr lang="en-US" sz="1800" dirty="0"/>
-                    </a:p>
-                  </a:txBody>
-                  <a:tcPr marL="91440" marR="91440" marT="45720" marB="45720" anchor="ctr">
-                    <a:lnL w="12700" cap="flat" cmpd="sng" algn="ctr">
-                      <a:solidFill>
-                        <a:srgbClr val="D9D9D9"/>
-                      </a:solidFill>
-                      <a:prstDash val="solid"/>
-                      <a:round/>
-                      <a:headEnd type="none" w="med" len="med"/>
-                      <a:tailEnd type="none" w="med" len="med"/>
-                    </a:lnL>
-                    <a:lnR w="12700" cap="flat" cmpd="sng" algn="ctr">
-                      <a:solidFill>
-                        <a:srgbClr val="D9D9D9"/>
-                      </a:solidFill>
-                      <a:prstDash val="solid"/>
-                      <a:round/>
-                      <a:headEnd type="none" w="med" len="med"/>
-                      <a:tailEnd type="none" w="med" len="med"/>
-                    </a:lnR>
-                    <a:lnT w="12700" cap="flat" cmpd="sng" algn="ctr">
-                      <a:solidFill>
-                        <a:srgbClr val="D9D9D9"/>
-                      </a:solidFill>
-                      <a:prstDash val="solid"/>
-                      <a:round/>
-                      <a:headEnd type="none" w="med" len="med"/>
-                      <a:tailEnd type="none" w="med" len="med"/>
-                    </a:lnT>
-                    <a:lnB w="12700" cap="flat" cmpd="sng" algn="ctr">
-                      <a:solidFill>
-                        <a:srgbClr val="D9D9D9"/>
-                      </a:solidFill>
-                      <a:prstDash val="solid"/>
-                      <a:round/>
-                      <a:headEnd type="none" w="med" len="med"/>
-                      <a:tailEnd type="none" w="med" len="med"/>
-                    </a:lnB>
-                  </a:tcPr>
-                </a:tc>
-                <a:tc>
-                  <a:txBody>
-                    <a:bodyPr/>
-                    <a:lstStyle/>
-                    <a:p>
-                      <a:pPr indent="0" marL="0">
-                        <a:buNone/>
-                      </a:pPr>
-                      <a:r>
-                        <a:rPr lang="en-US" sz="1800" b="1" dirty="0">
-                          <a:solidFill>
-                            <a:schemeClr val="accent2"/>
-                          </a:solidFill>
-                        </a:rPr>
-                        <a:t>Done</a:t>
-                      </a:r>
-                      <a:endParaRPr lang="en-US" sz="1800" dirty="0"/>
-                    </a:p>
-                  </a:txBody>
-                  <a:tcPr marL="91440" marR="91440" marT="45720" marB="45720" anchor="ctr">
-                    <a:lnL w="12700" cap="flat" cmpd="sng" algn="ctr">
-                      <a:solidFill>
-                        <a:srgbClr val="D9D9D9"/>
-                      </a:solidFill>
-                      <a:prstDash val="solid"/>
-                      <a:round/>
-                      <a:headEnd type="none" w="med" len="med"/>
-                      <a:tailEnd type="none" w="med" len="med"/>
-                    </a:lnL>
-                    <a:lnR w="12700" cap="flat" cmpd="sng" algn="ctr">
-                      <a:solidFill>
-                        <a:srgbClr val="D9D9D9"/>
-                      </a:solidFill>
-                      <a:prstDash val="solid"/>
-                      <a:round/>
-                      <a:headEnd type="none" w="med" len="med"/>
-                      <a:tailEnd type="none" w="med" len="med"/>
-                    </a:lnR>
-                    <a:lnT w="12700" cap="flat" cmpd="sng" algn="ctr">
-                      <a:solidFill>
-                        <a:srgbClr val="D9D9D9"/>
-                      </a:solidFill>
-                      <a:prstDash val="solid"/>
-                      <a:round/>
-                      <a:headEnd type="none" w="med" len="med"/>
-                      <a:tailEnd type="none" w="med" len="med"/>
-                    </a:lnT>
-                    <a:lnB w="12700" cap="flat" cmpd="sng" algn="ctr">
-                      <a:solidFill>
-                        <a:srgbClr val="D9D9D9"/>
-                      </a:solidFill>
-                      <a:prstDash val="solid"/>
-                      <a:round/>
-                      <a:headEnd type="none" w="med" len="med"/>
-                      <a:tailEnd type="none" w="med" len="med"/>
-                    </a:lnB>
-                  </a:tcPr>
-                </a:tc>
-              </a:tr>
-              <a:tr h="640080">
-                <a:tc>
-                  <a:txBody>
-                    <a:bodyPr/>
-                    <a:lstStyle/>
-                    <a:p>
-                      <a:pPr indent="0" marL="0">
-                        <a:buNone/>
-                      </a:pPr>
-                      <a:r>
-                        <a:rPr lang="en-US" sz="1800" dirty="0">
-                          <a:solidFill>
-                            <a:schemeClr val="tx1"/>
-                          </a:solidFill>
-                        </a:rPr>
-                        <a:t>2</a:t>
-                      </a:r>
-                      <a:endParaRPr lang="en-US" sz="1800" dirty="0"/>
-                    </a:p>
-                  </a:txBody>
-                  <a:tcPr marL="91440" marR="91440" marT="45720" marB="45720" anchor="ctr">
-                    <a:lnL w="12700" cap="flat" cmpd="sng" algn="ctr">
-                      <a:solidFill>
-                        <a:srgbClr val="D9D9D9"/>
-                      </a:solidFill>
-                      <a:prstDash val="solid"/>
-                      <a:round/>
-                      <a:headEnd type="none" w="med" len="med"/>
-                      <a:tailEnd type="none" w="med" len="med"/>
-                    </a:lnL>
-                    <a:lnR w="12700" cap="flat" cmpd="sng" algn="ctr">
-                      <a:solidFill>
-                        <a:srgbClr val="D9D9D9"/>
-                      </a:solidFill>
-                      <a:prstDash val="solid"/>
-                      <a:round/>
-                      <a:headEnd type="none" w="med" len="med"/>
-                      <a:tailEnd type="none" w="med" len="med"/>
-                    </a:lnR>
-                    <a:lnT w="12700" cap="flat" cmpd="sng" algn="ctr">
-                      <a:solidFill>
-                        <a:srgbClr val="D9D9D9"/>
-                      </a:solidFill>
-                      <a:prstDash val="solid"/>
-                      <a:round/>
-                      <a:headEnd type="none" w="med" len="med"/>
-                      <a:tailEnd type="none" w="med" len="med"/>
-                    </a:lnT>
-                    <a:lnB w="12700" cap="flat" cmpd="sng" algn="ctr">
-                      <a:solidFill>
-                        <a:srgbClr val="D9D9D9"/>
-                      </a:solidFill>
-                      <a:prstDash val="solid"/>
-                      <a:round/>
-                      <a:headEnd type="none" w="med" len="med"/>
-                      <a:tailEnd type="none" w="med" len="med"/>
-                    </a:lnB>
-                  </a:tcPr>
-                </a:tc>
-                <a:tc>
-                  <a:txBody>
-                    <a:bodyPr/>
-                    <a:lstStyle/>
-                    <a:p>
-                      <a:pPr indent="0" marL="0">
-                        <a:buNone/>
-                      </a:pPr>
-                      <a:r>
-                        <a:rPr lang="en-US" sz="1800" dirty="0">
-                          <a:solidFill>
-                            <a:schemeClr val="tx1"/>
-                          </a:solidFill>
-                        </a:rPr>
-                        <a:t>LoRA fine-tuning of Stable Diffusion</a:t>
-                      </a:r>
-                      <a:endParaRPr lang="en-US" sz="1800" dirty="0"/>
-                    </a:p>
-                  </a:txBody>
-                  <a:tcPr marL="91440" marR="91440" marT="45720" marB="45720" anchor="ctr">
-                    <a:lnL w="12700" cap="flat" cmpd="sng" algn="ctr">
-                      <a:solidFill>
-                        <a:srgbClr val="D9D9D9"/>
-                      </a:solidFill>
-                      <a:prstDash val="solid"/>
-                      <a:round/>
-                      <a:headEnd type="none" w="med" len="med"/>
-                      <a:tailEnd type="none" w="med" len="med"/>
-                    </a:lnL>
-                    <a:lnR w="12700" cap="flat" cmpd="sng" algn="ctr">
-                      <a:solidFill>
-                        <a:srgbClr val="D9D9D9"/>
-                      </a:solidFill>
-                      <a:prstDash val="solid"/>
-                      <a:round/>
-                      <a:headEnd type="none" w="med" len="med"/>
-                      <a:tailEnd type="none" w="med" len="med"/>
-                    </a:lnR>
-                    <a:lnT w="12700" cap="flat" cmpd="sng" algn="ctr">
-                      <a:solidFill>
-                        <a:srgbClr val="D9D9D9"/>
-                      </a:solidFill>
-                      <a:prstDash val="solid"/>
-                      <a:round/>
-                      <a:headEnd type="none" w="med" len="med"/>
-                      <a:tailEnd type="none" w="med" len="med"/>
-                    </a:lnT>
-                    <a:lnB w="12700" cap="flat" cmpd="sng" algn="ctr">
-                      <a:solidFill>
-                        <a:srgbClr val="D9D9D9"/>
-                      </a:solidFill>
-                      <a:prstDash val="solid"/>
-                      <a:round/>
-                      <a:headEnd type="none" w="med" len="med"/>
-                      <a:tailEnd type="none" w="med" len="med"/>
-                    </a:lnB>
-                  </a:tcPr>
-                </a:tc>
-                <a:tc>
-                  <a:txBody>
-                    <a:bodyPr/>
-                    <a:lstStyle/>
-                    <a:p>
-                      <a:pPr indent="0" marL="0">
-                        <a:buNone/>
-                      </a:pPr>
-                      <a:r>
-                        <a:rPr lang="en-US" sz="1800" b="1" dirty="0">
-                          <a:solidFill>
-                            <a:schemeClr val="accent2"/>
-                          </a:solidFill>
-                        </a:rPr>
-                        <a:t>Done</a:t>
-                      </a:r>
-                      <a:endParaRPr lang="en-US" sz="1800" dirty="0"/>
-                    </a:p>
-                  </a:txBody>
-                  <a:tcPr marL="91440" marR="91440" marT="45720" marB="45720" anchor="ctr">
-                    <a:lnL w="12700" cap="flat" cmpd="sng" algn="ctr">
-                      <a:solidFill>
-                        <a:srgbClr val="D9D9D9"/>
-                      </a:solidFill>
-                      <a:prstDash val="solid"/>
-                      <a:round/>
-                      <a:headEnd type="none" w="med" len="med"/>
-                      <a:tailEnd type="none" w="med" len="med"/>
-                    </a:lnL>
-                    <a:lnR w="12700" cap="flat" cmpd="sng" algn="ctr">
-                      <a:solidFill>
-                        <a:srgbClr val="D9D9D9"/>
-                      </a:solidFill>
-                      <a:prstDash val="solid"/>
-                      <a:round/>
-                      <a:headEnd type="none" w="med" len="med"/>
-                      <a:tailEnd type="none" w="med" len="med"/>
-                    </a:lnR>
-                    <a:lnT w="12700" cap="flat" cmpd="sng" algn="ctr">
-                      <a:solidFill>
-                        <a:srgbClr val="D9D9D9"/>
-                      </a:solidFill>
-                      <a:prstDash val="solid"/>
-                      <a:round/>
-                      <a:headEnd type="none" w="med" len="med"/>
-                      <a:tailEnd type="none" w="med" len="med"/>
-                    </a:lnT>
-                    <a:lnB w="12700" cap="flat" cmpd="sng" algn="ctr">
-                      <a:solidFill>
-                        <a:srgbClr val="D9D9D9"/>
-                      </a:solidFill>
-                      <a:prstDash val="solid"/>
-                      <a:round/>
-                      <a:headEnd type="none" w="med" len="med"/>
-                      <a:tailEnd type="none" w="med" len="med"/>
-                    </a:lnB>
-                  </a:tcPr>
-                </a:tc>
-              </a:tr>
-              <a:tr h="640080">
-                <a:tc>
-                  <a:txBody>
-                    <a:bodyPr/>
-                    <a:lstStyle/>
-                    <a:p>
-                      <a:pPr indent="0" marL="0">
-                        <a:buNone/>
-                      </a:pPr>
-                      <a:r>
-                        <a:rPr lang="en-US" sz="1800" dirty="0">
-                          <a:solidFill>
-                            <a:schemeClr val="tx1"/>
-                          </a:solidFill>
-                        </a:rPr>
-                        <a:t>3</a:t>
-                      </a:r>
-                      <a:endParaRPr lang="en-US" sz="1800" dirty="0"/>
-                    </a:p>
-                  </a:txBody>
-                  <a:tcPr marL="91440" marR="91440" marT="45720" marB="45720" anchor="ctr">
-                    <a:lnL w="12700" cap="flat" cmpd="sng" algn="ctr">
-                      <a:solidFill>
-                        <a:srgbClr val="D9D9D9"/>
-                      </a:solidFill>
-                      <a:prstDash val="solid"/>
-                      <a:round/>
-                      <a:headEnd type="none" w="med" len="med"/>
-                      <a:tailEnd type="none" w="med" len="med"/>
-                    </a:lnL>
-                    <a:lnR w="12700" cap="flat" cmpd="sng" algn="ctr">
-                      <a:solidFill>
-                        <a:srgbClr val="D9D9D9"/>
-                      </a:solidFill>
-                      <a:prstDash val="solid"/>
-                      <a:round/>
-                      <a:headEnd type="none" w="med" len="med"/>
-                      <a:tailEnd type="none" w="med" len="med"/>
-                    </a:lnR>
-                    <a:lnT w="12700" cap="flat" cmpd="sng" algn="ctr">
-                      <a:solidFill>
-                        <a:srgbClr val="D9D9D9"/>
-                      </a:solidFill>
-                      <a:prstDash val="solid"/>
-                      <a:round/>
-                      <a:headEnd type="none" w="med" len="med"/>
-                      <a:tailEnd type="none" w="med" len="med"/>
-                    </a:lnT>
-                    <a:lnB w="12700" cap="flat" cmpd="sng" algn="ctr">
-                      <a:solidFill>
-                        <a:srgbClr val="D9D9D9"/>
-                      </a:solidFill>
-                      <a:prstDash val="solid"/>
-                      <a:round/>
-                      <a:headEnd type="none" w="med" len="med"/>
-                      <a:tailEnd type="none" w="med" len="med"/>
-                    </a:lnB>
-                  </a:tcPr>
-                </a:tc>
-                <a:tc>
-                  <a:txBody>
-                    <a:bodyPr/>
-                    <a:lstStyle/>
-                    <a:p>
-                      <a:pPr indent="0" marL="0">
-                        <a:buNone/>
-                      </a:pPr>
-                      <a:r>
-                        <a:rPr lang="en-US" sz="1800" dirty="0">
-                          <a:solidFill>
-                            <a:schemeClr val="tx1"/>
-                          </a:solidFill>
-                        </a:rPr>
-                        <a:t>Prompt expansion using an LLM</a:t>
-                      </a:r>
-                      <a:endParaRPr lang="en-US" sz="1800" dirty="0"/>
-                    </a:p>
-                  </a:txBody>
-                  <a:tcPr marL="91440" marR="91440" marT="45720" marB="45720" anchor="ctr">
-                    <a:lnL w="12700" cap="flat" cmpd="sng" algn="ctr">
-                      <a:solidFill>
-                        <a:srgbClr val="D9D9D9"/>
-                      </a:solidFill>
-                      <a:prstDash val="solid"/>
-                      <a:round/>
-                      <a:headEnd type="none" w="med" len="med"/>
-                      <a:tailEnd type="none" w="med" len="med"/>
-                    </a:lnL>
-                    <a:lnR w="12700" cap="flat" cmpd="sng" algn="ctr">
-                      <a:solidFill>
-                        <a:srgbClr val="D9D9D9"/>
-                      </a:solidFill>
-                      <a:prstDash val="solid"/>
-                      <a:round/>
-                      <a:headEnd type="none" w="med" len="med"/>
-                      <a:tailEnd type="none" w="med" len="med"/>
-                    </a:lnR>
-                    <a:lnT w="12700" cap="flat" cmpd="sng" algn="ctr">
-                      <a:solidFill>
-                        <a:srgbClr val="D9D9D9"/>
-                      </a:solidFill>
-                      <a:prstDash val="solid"/>
-                      <a:round/>
-                      <a:headEnd type="none" w="med" len="med"/>
-                      <a:tailEnd type="none" w="med" len="med"/>
-                    </a:lnT>
-                    <a:lnB w="12700" cap="flat" cmpd="sng" algn="ctr">
-                      <a:solidFill>
-                        <a:srgbClr val="D9D9D9"/>
-                      </a:solidFill>
-                      <a:prstDash val="solid"/>
-                      <a:round/>
-                      <a:headEnd type="none" w="med" len="med"/>
-                      <a:tailEnd type="none" w="med" len="med"/>
-                    </a:lnB>
-                  </a:tcPr>
-                </a:tc>
-                <a:tc>
-                  <a:txBody>
-                    <a:bodyPr/>
-                    <a:lstStyle/>
-                    <a:p>
-                      <a:pPr indent="0" marL="0">
-                        <a:buNone/>
-                      </a:pPr>
-                      <a:r>
-                        <a:rPr lang="en-US" sz="1800" dirty="0">
-                          <a:solidFill>
-                            <a:schemeClr val="accent4"/>
-                          </a:solidFill>
-                        </a:rPr>
-                        <a:t>Not started</a:t>
-                      </a:r>
-                      <a:endParaRPr lang="en-US" sz="1800" dirty="0"/>
-                    </a:p>
-                  </a:txBody>
-                  <a:tcPr marL="91440" marR="91440" marT="45720" marB="45720" anchor="ctr">
-                    <a:lnL w="12700" cap="flat" cmpd="sng" algn="ctr">
-                      <a:solidFill>
-                        <a:srgbClr val="D9D9D9"/>
-                      </a:solidFill>
-                      <a:prstDash val="solid"/>
-                      <a:round/>
-                      <a:headEnd type="none" w="med" len="med"/>
-                      <a:tailEnd type="none" w="med" len="med"/>
-                    </a:lnL>
-                    <a:lnR w="12700" cap="flat" cmpd="sng" algn="ctr">
-                      <a:solidFill>
-                        <a:srgbClr val="D9D9D9"/>
-                      </a:solidFill>
-                      <a:prstDash val="solid"/>
-                      <a:round/>
-                      <a:headEnd type="none" w="med" len="med"/>
-                      <a:tailEnd type="none" w="med" len="med"/>
-                    </a:lnR>
-                    <a:lnT w="12700" cap="flat" cmpd="sng" algn="ctr">
-                      <a:solidFill>
-                        <a:srgbClr val="D9D9D9"/>
-                      </a:solidFill>
-                      <a:prstDash val="solid"/>
-                      <a:round/>
-                      <a:headEnd type="none" w="med" len="med"/>
-                      <a:tailEnd type="none" w="med" len="med"/>
-                    </a:lnT>
-                    <a:lnB w="12700" cap="flat" cmpd="sng" algn="ctr">
-                      <a:solidFill>
-                        <a:srgbClr val="D9D9D9"/>
-                      </a:solidFill>
-                      <a:prstDash val="solid"/>
-                      <a:round/>
-                      <a:headEnd type="none" w="med" len="med"/>
-                      <a:tailEnd type="none" w="med" len="med"/>
-                    </a:lnB>
-                  </a:tcPr>
-                </a:tc>
-              </a:tr>
-              <a:tr h="640080">
-                <a:tc>
-                  <a:txBody>
-                    <a:bodyPr/>
-                    <a:lstStyle/>
-                    <a:p>
-                      <a:pPr indent="0" marL="0">
-                        <a:buNone/>
-                      </a:pPr>
-                      <a:r>
-                        <a:rPr lang="en-US" sz="1800" dirty="0">
-                          <a:solidFill>
-                            <a:schemeClr val="tx1"/>
-                          </a:solidFill>
-                        </a:rPr>
-                        <a:t>4</a:t>
-                      </a:r>
-                      <a:endParaRPr lang="en-US" sz="1800" dirty="0"/>
-                    </a:p>
-                  </a:txBody>
-                  <a:tcPr marL="91440" marR="91440" marT="45720" marB="45720" anchor="ctr">
-                    <a:lnL w="12700" cap="flat" cmpd="sng" algn="ctr">
-                      <a:solidFill>
-                        <a:srgbClr val="D9D9D9"/>
-                      </a:solidFill>
-                      <a:prstDash val="solid"/>
-                      <a:round/>
-                      <a:headEnd type="none" w="med" len="med"/>
-                      <a:tailEnd type="none" w="med" len="med"/>
-                    </a:lnL>
-                    <a:lnR w="12700" cap="flat" cmpd="sng" algn="ctr">
-                      <a:solidFill>
-                        <a:srgbClr val="D9D9D9"/>
-                      </a:solidFill>
-                      <a:prstDash val="solid"/>
-                      <a:round/>
-                      <a:headEnd type="none" w="med" len="med"/>
-                      <a:tailEnd type="none" w="med" len="med"/>
-                    </a:lnR>
-                    <a:lnT w="12700" cap="flat" cmpd="sng" algn="ctr">
-                      <a:solidFill>
-                        <a:srgbClr val="D9D9D9"/>
-                      </a:solidFill>
-                      <a:prstDash val="solid"/>
-                      <a:round/>
-                      <a:headEnd type="none" w="med" len="med"/>
-                      <a:tailEnd type="none" w="med" len="med"/>
-                    </a:lnT>
-                    <a:lnB w="12700" cap="flat" cmpd="sng" algn="ctr">
-                      <a:solidFill>
-                        <a:srgbClr val="D9D9D9"/>
-                      </a:solidFill>
-                      <a:prstDash val="solid"/>
-                      <a:round/>
-                      <a:headEnd type="none" w="med" len="med"/>
-                      <a:tailEnd type="none" w="med" len="med"/>
-                    </a:lnB>
-                  </a:tcPr>
-                </a:tc>
-                <a:tc>
-                  <a:txBody>
-                    <a:bodyPr/>
-                    <a:lstStyle/>
-                    <a:p>
-                      <a:pPr indent="0" marL="0">
-                        <a:buNone/>
-                      </a:pPr>
-                      <a:r>
-                        <a:rPr lang="en-US" sz="1800" dirty="0">
-                          <a:solidFill>
-                            <a:schemeClr val="tx1"/>
-                          </a:solidFill>
-                        </a:rPr>
-                        <a:t>ControlNet (pose control), evaluation, web UI</a:t>
-                      </a:r>
-                      <a:endParaRPr lang="en-US" sz="1800" dirty="0"/>
-                    </a:p>
-                  </a:txBody>
-                  <a:tcPr marL="91440" marR="91440" marT="45720" marB="45720" anchor="ctr">
-                    <a:lnL w="12700" cap="flat" cmpd="sng" algn="ctr">
-                      <a:solidFill>
-                        <a:srgbClr val="D9D9D9"/>
-                      </a:solidFill>
-                      <a:prstDash val="solid"/>
-                      <a:round/>
-                      <a:headEnd type="none" w="med" len="med"/>
-                      <a:tailEnd type="none" w="med" len="med"/>
-                    </a:lnL>
-                    <a:lnR w="12700" cap="flat" cmpd="sng" algn="ctr">
-                      <a:solidFill>
-                        <a:srgbClr val="D9D9D9"/>
-                      </a:solidFill>
-                      <a:prstDash val="solid"/>
-                      <a:round/>
-                      <a:headEnd type="none" w="med" len="med"/>
-                      <a:tailEnd type="none" w="med" len="med"/>
-                    </a:lnR>
-                    <a:lnT w="12700" cap="flat" cmpd="sng" algn="ctr">
-                      <a:solidFill>
-                        <a:srgbClr val="D9D9D9"/>
-                      </a:solidFill>
-                      <a:prstDash val="solid"/>
-                      <a:round/>
-                      <a:headEnd type="none" w="med" len="med"/>
-                      <a:tailEnd type="none" w="med" len="med"/>
-                    </a:lnT>
-                    <a:lnB w="12700" cap="flat" cmpd="sng" algn="ctr">
-                      <a:solidFill>
-                        <a:srgbClr val="D9D9D9"/>
-                      </a:solidFill>
-                      <a:prstDash val="solid"/>
-                      <a:round/>
-                      <a:headEnd type="none" w="med" len="med"/>
-                      <a:tailEnd type="none" w="med" len="med"/>
-                    </a:lnB>
-                  </a:tcPr>
-                </a:tc>
-                <a:tc>
-                  <a:txBody>
-                    <a:bodyPr/>
-                    <a:lstStyle/>
-                    <a:p>
-                      <a:pPr indent="0" marL="0">
-                        <a:buNone/>
-                      </a:pPr>
-                      <a:r>
-                        <a:rPr lang="en-US" sz="1800" dirty="0">
-                          <a:solidFill>
-                            <a:schemeClr val="accent4"/>
-                          </a:solidFill>
-                        </a:rPr>
-                        <a:t>Not started</a:t>
-                      </a:r>
-                      <a:endParaRPr lang="en-US" sz="1800" dirty="0"/>
-                    </a:p>
-                  </a:txBody>
-                  <a:tcPr marL="91440" marR="91440" marT="45720" marB="45720" anchor="ctr">
-                    <a:lnL w="12700" cap="flat" cmpd="sng" algn="ctr">
-                      <a:solidFill>
-                        <a:srgbClr val="D9D9D9"/>
-                      </a:solidFill>
-                      <a:prstDash val="solid"/>
-                      <a:round/>
-                      <a:headEnd type="none" w="med" len="med"/>
-                      <a:tailEnd type="none" w="med" len="med"/>
-                    </a:lnL>
-                    <a:lnR w="12700" cap="flat" cmpd="sng" algn="ctr">
-                      <a:solidFill>
-                        <a:srgbClr val="D9D9D9"/>
-                      </a:solidFill>
-                      <a:prstDash val="solid"/>
-                      <a:round/>
-                      <a:headEnd type="none" w="med" len="med"/>
-                      <a:tailEnd type="none" w="med" len="med"/>
-                    </a:lnR>
-                    <a:lnT w="12700" cap="flat" cmpd="sng" algn="ctr">
-                      <a:solidFill>
-                        <a:srgbClr val="D9D9D9"/>
-                      </a:solidFill>
-                      <a:prstDash val="solid"/>
-                      <a:round/>
-                      <a:headEnd type="none" w="med" len="med"/>
-                      <a:tailEnd type="none" w="med" len="med"/>
-                    </a:lnT>
-                    <a:lnB w="12700" cap="flat" cmpd="sng" algn="ctr">
-                      <a:solidFill>
-                        <a:srgbClr val="D9D9D9"/>
-                      </a:solidFill>
-                      <a:prstDash val="solid"/>
-                      <a:round/>
-                      <a:headEnd type="none" w="med" len="med"/>
-                      <a:tailEnd type="none" w="med" len="med"/>
-                    </a:lnB>
-                  </a:tcPr>
-                </a:tc>
-              </a:tr>
-            </a:tbl>
-          </a:graphicData>
-        </a:graphic>
-      </p:graphicFrame>
-      <p:sp>
-        <p:nvSpPr>
-          <p:cNvPr id="4" name="progress"/>
+      <p:sp>
+        <p:nvSpPr>
+          <p:cNvPr id="3" name="ms-0"/>
+          <p:cNvSpPr/>
+          <p:nvPr/>
+        </p:nvSpPr>
+        <p:spPr>
+          <a:xfrm>
+            <a:off x="548640" y="1325880"/>
+            <a:ext cx="7589520" cy="914400"/>
+          </a:xfrm>
+          <a:prstGeom prst="roundRect">
+            <a:avLst>
+              <a:gd name="adj" fmla="val 10000"/>
+            </a:avLst>
+          </a:prstGeom>
+          <a:solidFill>
+            <a:schemeClr val="accent6"/>
+          </a:solidFill>
+          <a:ln/>
+        </p:spPr>
+      </p:sp>
+      <p:sp>
+        <p:nvSpPr>
+          <p:cNvPr id="4" name="ms-n-0-circle"/>
+          <p:cNvSpPr/>
+          <p:nvPr/>
+        </p:nvSpPr>
+        <p:spPr>
+          <a:xfrm>
+            <a:off x="731520" y="1481328"/>
+            <a:ext cx="603504" cy="603504"/>
+          </a:xfrm>
+          <a:prstGeom prst="ellipse">
+            <a:avLst/>
+          </a:prstGeom>
+          <a:solidFill>
+            <a:schemeClr val="accent2"/>
+          </a:solidFill>
+          <a:ln/>
+        </p:spPr>
+      </p:sp>
+      <p:sp>
+        <p:nvSpPr>
+          <p:cNvPr id="5" name="ms-n-0-num"/>
           <p:cNvSpPr txBox="1"/>
           <p:nvPr/>
         </p:nvSpPr>
         <p:spPr>
           <a:xfrm>
-            <a:off x="548640" y="4937760"/>
-            <a:ext cx="11064240" cy="457200"/>
+            <a:off x="731520" y="1481328"/>
+            <a:ext cx="603504" cy="603504"/>
           </a:xfrm>
           <a:prstGeom prst="rect">
             <a:avLst/>
@@ -4680,18 +4707,657 @@
           <a:bodyPr wrap="square" lIns="0" tIns="0" rIns="0" bIns="0" rtlCol="0" anchor="ctr"/>
           <a:lstStyle/>
           <a:p>
+            <a:pPr algn="ctr" indent="0" marL="0">
+              <a:buNone/>
+            </a:pPr>
+            <a:r>
+              <a:rPr lang="en-US" sz="1716" b="1" dirty="0">
+                <a:solidFill>
+                  <a:schemeClr val="bg1"/>
+                </a:solidFill>
+              </a:rPr>
+              <a:t>1</a:t>
+            </a:r>
+            <a:endParaRPr lang="en-US" sz="1716" dirty="0"/>
+          </a:p>
+        </p:txBody>
+      </p:sp>
+      <p:sp>
+        <p:nvSpPr>
+          <p:cNvPr id="6" name="ms-t-0"/>
+          <p:cNvSpPr txBox="1"/>
+          <p:nvPr/>
+        </p:nvSpPr>
+        <p:spPr>
+          <a:xfrm>
+            <a:off x="1554480" y="1325880"/>
+            <a:ext cx="4754880" cy="914400"/>
+          </a:xfrm>
+          <a:prstGeom prst="rect">
+            <a:avLst/>
+          </a:prstGeom>
+          <a:noFill/>
+          <a:ln/>
+        </p:spPr>
+        <p:txBody>
+          <a:bodyPr wrap="square" lIns="0" tIns="0" rIns="0" bIns="0" rtlCol="0" anchor="ctr"/>
+          <a:lstStyle/>
+          <a:p>
             <a:pPr indent="0" marL="0">
               <a:buNone/>
             </a:pPr>
             <a:r>
-              <a:rPr lang="en-US" sz="2000" b="1" dirty="0">
-                <a:solidFill>
-                  <a:schemeClr val="tx2"/>
-                </a:solidFill>
-              </a:rPr>
-              <a:t>Overall progress: about 50%</a:t>
-            </a:r>
-            <a:endParaRPr lang="en-US" sz="2000" dirty="0"/>
+              <a:rPr lang="en-US" sz="1800" dirty="0">
+                <a:solidFill>
+                  <a:schemeClr val="tx1"/>
+                </a:solidFill>
+              </a:rPr>
+              <a:t>Dataset collection, cleaning and captioning</a:t>
+            </a:r>
+            <a:endParaRPr lang="en-US" sz="1800" dirty="0"/>
+          </a:p>
+        </p:txBody>
+      </p:sp>
+      <p:sp>
+        <p:nvSpPr>
+          <p:cNvPr id="7" name="ms-s-0"/>
+          <p:cNvSpPr txBox="1"/>
+          <p:nvPr/>
+        </p:nvSpPr>
+        <p:spPr>
+          <a:xfrm>
+            <a:off x="6309360" y="1325880"/>
+            <a:ext cx="1645920" cy="914400"/>
+          </a:xfrm>
+          <a:prstGeom prst="rect">
+            <a:avLst/>
+          </a:prstGeom>
+          <a:noFill/>
+          <a:ln/>
+        </p:spPr>
+        <p:txBody>
+          <a:bodyPr wrap="square" lIns="0" tIns="0" rIns="0" bIns="0" rtlCol="0" anchor="ctr"/>
+          <a:lstStyle/>
+          <a:p>
+            <a:pPr algn="r" indent="0" marL="0">
+              <a:buNone/>
+            </a:pPr>
+            <a:r>
+              <a:rPr lang="en-US" sz="1700" b="1" dirty="0">
+                <a:solidFill>
+                  <a:schemeClr val="accent2"/>
+                </a:solidFill>
+              </a:rPr>
+              <a:t>Done</a:t>
+            </a:r>
+            <a:endParaRPr lang="en-US" sz="1700" dirty="0"/>
+          </a:p>
+        </p:txBody>
+      </p:sp>
+      <p:sp>
+        <p:nvSpPr>
+          <p:cNvPr id="8" name="ms-1"/>
+          <p:cNvSpPr/>
+          <p:nvPr/>
+        </p:nvSpPr>
+        <p:spPr>
+          <a:xfrm>
+            <a:off x="548640" y="2441448"/>
+            <a:ext cx="7589520" cy="914400"/>
+          </a:xfrm>
+          <a:prstGeom prst="roundRect">
+            <a:avLst>
+              <a:gd name="adj" fmla="val 10000"/>
+            </a:avLst>
+          </a:prstGeom>
+          <a:solidFill>
+            <a:schemeClr val="accent6"/>
+          </a:solidFill>
+          <a:ln/>
+        </p:spPr>
+      </p:sp>
+      <p:sp>
+        <p:nvSpPr>
+          <p:cNvPr id="9" name="ms-n-1-circle"/>
+          <p:cNvSpPr/>
+          <p:nvPr/>
+        </p:nvSpPr>
+        <p:spPr>
+          <a:xfrm>
+            <a:off x="731520" y="2596896"/>
+            <a:ext cx="603504" cy="603504"/>
+          </a:xfrm>
+          <a:prstGeom prst="ellipse">
+            <a:avLst/>
+          </a:prstGeom>
+          <a:solidFill>
+            <a:schemeClr val="accent2"/>
+          </a:solidFill>
+          <a:ln/>
+        </p:spPr>
+      </p:sp>
+      <p:sp>
+        <p:nvSpPr>
+          <p:cNvPr id="10" name="ms-n-1-num"/>
+          <p:cNvSpPr txBox="1"/>
+          <p:nvPr/>
+        </p:nvSpPr>
+        <p:spPr>
+          <a:xfrm>
+            <a:off x="731520" y="2596896"/>
+            <a:ext cx="603504" cy="603504"/>
+          </a:xfrm>
+          <a:prstGeom prst="rect">
+            <a:avLst/>
+          </a:prstGeom>
+          <a:noFill/>
+          <a:ln/>
+        </p:spPr>
+        <p:txBody>
+          <a:bodyPr wrap="square" lIns="0" tIns="0" rIns="0" bIns="0" rtlCol="0" anchor="ctr"/>
+          <a:lstStyle/>
+          <a:p>
+            <a:pPr algn="ctr" indent="0" marL="0">
+              <a:buNone/>
+            </a:pPr>
+            <a:r>
+              <a:rPr lang="en-US" sz="1716" b="1" dirty="0">
+                <a:solidFill>
+                  <a:schemeClr val="bg1"/>
+                </a:solidFill>
+              </a:rPr>
+              <a:t>2</a:t>
+            </a:r>
+            <a:endParaRPr lang="en-US" sz="1716" dirty="0"/>
+          </a:p>
+        </p:txBody>
+      </p:sp>
+      <p:sp>
+        <p:nvSpPr>
+          <p:cNvPr id="11" name="ms-t-1"/>
+          <p:cNvSpPr txBox="1"/>
+          <p:nvPr/>
+        </p:nvSpPr>
+        <p:spPr>
+          <a:xfrm>
+            <a:off x="1554480" y="2441448"/>
+            <a:ext cx="4754880" cy="914400"/>
+          </a:xfrm>
+          <a:prstGeom prst="rect">
+            <a:avLst/>
+          </a:prstGeom>
+          <a:noFill/>
+          <a:ln/>
+        </p:spPr>
+        <p:txBody>
+          <a:bodyPr wrap="square" lIns="0" tIns="0" rIns="0" bIns="0" rtlCol="0" anchor="ctr"/>
+          <a:lstStyle/>
+          <a:p>
+            <a:pPr indent="0" marL="0">
+              <a:buNone/>
+            </a:pPr>
+            <a:r>
+              <a:rPr lang="en-US" sz="1800" dirty="0">
+                <a:solidFill>
+                  <a:schemeClr val="tx1"/>
+                </a:solidFill>
+              </a:rPr>
+              <a:t>LoRA fine-tuning of Stable Diffusion</a:t>
+            </a:r>
+            <a:endParaRPr lang="en-US" sz="1800" dirty="0"/>
+          </a:p>
+        </p:txBody>
+      </p:sp>
+      <p:sp>
+        <p:nvSpPr>
+          <p:cNvPr id="12" name="ms-s-1"/>
+          <p:cNvSpPr txBox="1"/>
+          <p:nvPr/>
+        </p:nvSpPr>
+        <p:spPr>
+          <a:xfrm>
+            <a:off x="6309360" y="2441448"/>
+            <a:ext cx="1645920" cy="914400"/>
+          </a:xfrm>
+          <a:prstGeom prst="rect">
+            <a:avLst/>
+          </a:prstGeom>
+          <a:noFill/>
+          <a:ln/>
+        </p:spPr>
+        <p:txBody>
+          <a:bodyPr wrap="square" lIns="0" tIns="0" rIns="0" bIns="0" rtlCol="0" anchor="ctr"/>
+          <a:lstStyle/>
+          <a:p>
+            <a:pPr algn="r" indent="0" marL="0">
+              <a:buNone/>
+            </a:pPr>
+            <a:r>
+              <a:rPr lang="en-US" sz="1700" b="1" dirty="0">
+                <a:solidFill>
+                  <a:schemeClr val="accent2"/>
+                </a:solidFill>
+              </a:rPr>
+              <a:t>Done</a:t>
+            </a:r>
+            <a:endParaRPr lang="en-US" sz="1700" dirty="0"/>
+          </a:p>
+        </p:txBody>
+      </p:sp>
+      <p:sp>
+        <p:nvSpPr>
+          <p:cNvPr id="13" name="ms-2"/>
+          <p:cNvSpPr/>
+          <p:nvPr/>
+        </p:nvSpPr>
+        <p:spPr>
+          <a:xfrm>
+            <a:off x="548640" y="3557016"/>
+            <a:ext cx="7589520" cy="914400"/>
+          </a:xfrm>
+          <a:prstGeom prst="roundRect">
+            <a:avLst>
+              <a:gd name="adj" fmla="val 10000"/>
+            </a:avLst>
+          </a:prstGeom>
+          <a:solidFill>
+            <a:schemeClr val="bg2"/>
+          </a:solidFill>
+          <a:ln/>
+        </p:spPr>
+      </p:sp>
+      <p:sp>
+        <p:nvSpPr>
+          <p:cNvPr id="14" name="ms-n-2-circle"/>
+          <p:cNvSpPr/>
+          <p:nvPr/>
+        </p:nvSpPr>
+        <p:spPr>
+          <a:xfrm>
+            <a:off x="731520" y="3712464"/>
+            <a:ext cx="603504" cy="603504"/>
+          </a:xfrm>
+          <a:prstGeom prst="ellipse">
+            <a:avLst/>
+          </a:prstGeom>
+          <a:solidFill>
+            <a:schemeClr val="accent4"/>
+          </a:solidFill>
+          <a:ln/>
+        </p:spPr>
+      </p:sp>
+      <p:sp>
+        <p:nvSpPr>
+          <p:cNvPr id="15" name="ms-n-2-num"/>
+          <p:cNvSpPr txBox="1"/>
+          <p:nvPr/>
+        </p:nvSpPr>
+        <p:spPr>
+          <a:xfrm>
+            <a:off x="731520" y="3712464"/>
+            <a:ext cx="603504" cy="603504"/>
+          </a:xfrm>
+          <a:prstGeom prst="rect">
+            <a:avLst/>
+          </a:prstGeom>
+          <a:noFill/>
+          <a:ln/>
+        </p:spPr>
+        <p:txBody>
+          <a:bodyPr wrap="square" lIns="0" tIns="0" rIns="0" bIns="0" rtlCol="0" anchor="ctr"/>
+          <a:lstStyle/>
+          <a:p>
+            <a:pPr algn="ctr" indent="0" marL="0">
+              <a:buNone/>
+            </a:pPr>
+            <a:r>
+              <a:rPr lang="en-US" sz="1716" b="1" dirty="0">
+                <a:solidFill>
+                  <a:schemeClr val="bg1"/>
+                </a:solidFill>
+              </a:rPr>
+              <a:t>3</a:t>
+            </a:r>
+            <a:endParaRPr lang="en-US" sz="1716" dirty="0"/>
+          </a:p>
+        </p:txBody>
+      </p:sp>
+      <p:sp>
+        <p:nvSpPr>
+          <p:cNvPr id="16" name="ms-t-2"/>
+          <p:cNvSpPr txBox="1"/>
+          <p:nvPr/>
+        </p:nvSpPr>
+        <p:spPr>
+          <a:xfrm>
+            <a:off x="1554480" y="3557016"/>
+            <a:ext cx="4754880" cy="914400"/>
+          </a:xfrm>
+          <a:prstGeom prst="rect">
+            <a:avLst/>
+          </a:prstGeom>
+          <a:noFill/>
+          <a:ln/>
+        </p:spPr>
+        <p:txBody>
+          <a:bodyPr wrap="square" lIns="0" tIns="0" rIns="0" bIns="0" rtlCol="0" anchor="ctr"/>
+          <a:lstStyle/>
+          <a:p>
+            <a:pPr indent="0" marL="0">
+              <a:buNone/>
+            </a:pPr>
+            <a:r>
+              <a:rPr lang="en-US" sz="1800" dirty="0">
+                <a:solidFill>
+                  <a:schemeClr val="tx1"/>
+                </a:solidFill>
+              </a:rPr>
+              <a:t>Prompt expansion using an LLM</a:t>
+            </a:r>
+            <a:endParaRPr lang="en-US" sz="1800" dirty="0"/>
+          </a:p>
+        </p:txBody>
+      </p:sp>
+      <p:sp>
+        <p:nvSpPr>
+          <p:cNvPr id="17" name="ms-s-2"/>
+          <p:cNvSpPr txBox="1"/>
+          <p:nvPr/>
+        </p:nvSpPr>
+        <p:spPr>
+          <a:xfrm>
+            <a:off x="6309360" y="3557016"/>
+            <a:ext cx="1645920" cy="914400"/>
+          </a:xfrm>
+          <a:prstGeom prst="rect">
+            <a:avLst/>
+          </a:prstGeom>
+          <a:noFill/>
+          <a:ln/>
+        </p:spPr>
+        <p:txBody>
+          <a:bodyPr wrap="square" lIns="0" tIns="0" rIns="0" bIns="0" rtlCol="0" anchor="ctr"/>
+          <a:lstStyle/>
+          <a:p>
+            <a:pPr algn="r" indent="0" marL="0">
+              <a:buNone/>
+            </a:pPr>
+            <a:r>
+              <a:rPr lang="en-US" sz="1700" dirty="0">
+                <a:solidFill>
+                  <a:schemeClr val="accent4"/>
+                </a:solidFill>
+              </a:rPr>
+              <a:t>Not started</a:t>
+            </a:r>
+            <a:endParaRPr lang="en-US" sz="1700" dirty="0"/>
+          </a:p>
+        </p:txBody>
+      </p:sp>
+      <p:sp>
+        <p:nvSpPr>
+          <p:cNvPr id="18" name="ms-3"/>
+          <p:cNvSpPr/>
+          <p:nvPr/>
+        </p:nvSpPr>
+        <p:spPr>
+          <a:xfrm>
+            <a:off x="548640" y="4672584"/>
+            <a:ext cx="7589520" cy="914400"/>
+          </a:xfrm>
+          <a:prstGeom prst="roundRect">
+            <a:avLst>
+              <a:gd name="adj" fmla="val 10000"/>
+            </a:avLst>
+          </a:prstGeom>
+          <a:solidFill>
+            <a:schemeClr val="bg2"/>
+          </a:solidFill>
+          <a:ln/>
+        </p:spPr>
+      </p:sp>
+      <p:sp>
+        <p:nvSpPr>
+          <p:cNvPr id="19" name="ms-n-3-circle"/>
+          <p:cNvSpPr/>
+          <p:nvPr/>
+        </p:nvSpPr>
+        <p:spPr>
+          <a:xfrm>
+            <a:off x="731520" y="4828032"/>
+            <a:ext cx="603504" cy="603504"/>
+          </a:xfrm>
+          <a:prstGeom prst="ellipse">
+            <a:avLst/>
+          </a:prstGeom>
+          <a:solidFill>
+            <a:schemeClr val="accent4"/>
+          </a:solidFill>
+          <a:ln/>
+        </p:spPr>
+      </p:sp>
+      <p:sp>
+        <p:nvSpPr>
+          <p:cNvPr id="20" name="ms-n-3-num"/>
+          <p:cNvSpPr txBox="1"/>
+          <p:nvPr/>
+        </p:nvSpPr>
+        <p:spPr>
+          <a:xfrm>
+            <a:off x="731520" y="4828032"/>
+            <a:ext cx="603504" cy="603504"/>
+          </a:xfrm>
+          <a:prstGeom prst="rect">
+            <a:avLst/>
+          </a:prstGeom>
+          <a:noFill/>
+          <a:ln/>
+        </p:spPr>
+        <p:txBody>
+          <a:bodyPr wrap="square" lIns="0" tIns="0" rIns="0" bIns="0" rtlCol="0" anchor="ctr"/>
+          <a:lstStyle/>
+          <a:p>
+            <a:pPr algn="ctr" indent="0" marL="0">
+              <a:buNone/>
+            </a:pPr>
+            <a:r>
+              <a:rPr lang="en-US" sz="1716" b="1" dirty="0">
+                <a:solidFill>
+                  <a:schemeClr val="bg1"/>
+                </a:solidFill>
+              </a:rPr>
+              <a:t>4</a:t>
+            </a:r>
+            <a:endParaRPr lang="en-US" sz="1716" dirty="0"/>
+          </a:p>
+        </p:txBody>
+      </p:sp>
+      <p:sp>
+        <p:nvSpPr>
+          <p:cNvPr id="21" name="ms-t-3"/>
+          <p:cNvSpPr txBox="1"/>
+          <p:nvPr/>
+        </p:nvSpPr>
+        <p:spPr>
+          <a:xfrm>
+            <a:off x="1554480" y="4672584"/>
+            <a:ext cx="4754880" cy="914400"/>
+          </a:xfrm>
+          <a:prstGeom prst="rect">
+            <a:avLst/>
+          </a:prstGeom>
+          <a:noFill/>
+          <a:ln/>
+        </p:spPr>
+        <p:txBody>
+          <a:bodyPr wrap="square" lIns="0" tIns="0" rIns="0" bIns="0" rtlCol="0" anchor="ctr"/>
+          <a:lstStyle/>
+          <a:p>
+            <a:pPr indent="0" marL="0">
+              <a:buNone/>
+            </a:pPr>
+            <a:r>
+              <a:rPr lang="en-US" sz="1800" dirty="0">
+                <a:solidFill>
+                  <a:schemeClr val="tx1"/>
+                </a:solidFill>
+              </a:rPr>
+              <a:t>ControlNet (pose control), evaluation, web UI</a:t>
+            </a:r>
+            <a:endParaRPr lang="en-US" sz="1800" dirty="0"/>
+          </a:p>
+        </p:txBody>
+      </p:sp>
+      <p:sp>
+        <p:nvSpPr>
+          <p:cNvPr id="22" name="ms-s-3"/>
+          <p:cNvSpPr txBox="1"/>
+          <p:nvPr/>
+        </p:nvSpPr>
+        <p:spPr>
+          <a:xfrm>
+            <a:off x="6309360" y="4672584"/>
+            <a:ext cx="1645920" cy="914400"/>
+          </a:xfrm>
+          <a:prstGeom prst="rect">
+            <a:avLst/>
+          </a:prstGeom>
+          <a:noFill/>
+          <a:ln/>
+        </p:spPr>
+        <p:txBody>
+          <a:bodyPr wrap="square" lIns="0" tIns="0" rIns="0" bIns="0" rtlCol="0" anchor="ctr"/>
+          <a:lstStyle/>
+          <a:p>
+            <a:pPr algn="r" indent="0" marL="0">
+              <a:buNone/>
+            </a:pPr>
+            <a:r>
+              <a:rPr lang="en-US" sz="1700" dirty="0">
+                <a:solidFill>
+                  <a:schemeClr val="accent4"/>
+                </a:solidFill>
+              </a:rPr>
+              <a:t>Not started</a:t>
+            </a:r>
+            <a:endParaRPr lang="en-US" sz="1700" dirty="0"/>
+          </a:p>
+        </p:txBody>
+      </p:sp>
+      <p:sp>
+        <p:nvSpPr>
+          <p:cNvPr id="23" name="progress-circle"/>
+          <p:cNvSpPr/>
+          <p:nvPr/>
+        </p:nvSpPr>
+        <p:spPr>
+          <a:xfrm>
+            <a:off x="8915400" y="1737360"/>
+            <a:ext cx="2377440" cy="2377440"/>
+          </a:xfrm>
+          <a:prstGeom prst="ellipse">
+            <a:avLst/>
+          </a:prstGeom>
+          <a:solidFill>
+            <a:schemeClr val="tx2"/>
+          </a:solidFill>
+          <a:ln w="50800">
+            <a:solidFill>
+              <a:schemeClr val="accent1"/>
+            </a:solidFill>
+            <a:prstDash val="solid"/>
+          </a:ln>
+        </p:spPr>
+      </p:sp>
+      <p:sp>
+        <p:nvSpPr>
+          <p:cNvPr id="24" name="progress-text"/>
+          <p:cNvSpPr txBox="1"/>
+          <p:nvPr/>
+        </p:nvSpPr>
+        <p:spPr>
+          <a:xfrm>
+            <a:off x="8915400" y="1737360"/>
+            <a:ext cx="2377440" cy="2377440"/>
+          </a:xfrm>
+          <a:prstGeom prst="rect">
+            <a:avLst/>
+          </a:prstGeom>
+          <a:noFill/>
+          <a:ln/>
+        </p:spPr>
+        <p:txBody>
+          <a:bodyPr wrap="square" lIns="0" tIns="0" rIns="0" bIns="0" rtlCol="0" anchor="ctr"/>
+          <a:lstStyle/>
+          <a:p>
+            <a:pPr algn="ctr" indent="0" marL="0">
+              <a:buNone/>
+            </a:pPr>
+            <a:r>
+              <a:rPr lang="en-US" sz="4400" b="1" dirty="0">
+                <a:solidFill>
+                  <a:schemeClr val="bg1"/>
+                </a:solidFill>
+                <a:latin typeface="Cambria" pitchFamily="34" charset="0"/>
+                <a:ea typeface="Cambria" pitchFamily="34" charset="-122"/>
+                <a:cs typeface="Cambria" pitchFamily="34" charset="-120"/>
+              </a:rPr>
+              <a:t>50%</a:t>
+            </a:r>
+            <a:endParaRPr lang="en-US" sz="4400" dirty="0"/>
+          </a:p>
+          <a:p>
+            <a:pPr algn="ctr" indent="0" marL="0">
+              <a:buNone/>
+            </a:pPr>
+            <a:r>
+              <a:rPr lang="en-US" sz="1600" dirty="0">
+                <a:solidFill>
+                  <a:schemeClr val="bg1"/>
+                </a:solidFill>
+                <a:latin typeface="Cambria" pitchFamily="34" charset="0"/>
+                <a:ea typeface="Cambria" pitchFamily="34" charset="-122"/>
+                <a:cs typeface="Cambria" pitchFamily="34" charset="-120"/>
+              </a:rPr>
+              <a:t>done</a:t>
+            </a:r>
+            <a:endParaRPr lang="en-US" sz="4400" dirty="0"/>
+          </a:p>
+        </p:txBody>
+      </p:sp>
+      <p:sp>
+        <p:nvSpPr>
+          <p:cNvPr id="25" name="progress-note"/>
+          <p:cNvSpPr txBox="1"/>
+          <p:nvPr/>
+        </p:nvSpPr>
+        <p:spPr>
+          <a:xfrm>
+            <a:off x="8503920" y="4343400"/>
+            <a:ext cx="3200400" cy="365760"/>
+          </a:xfrm>
+          <a:prstGeom prst="rect">
+            <a:avLst/>
+          </a:prstGeom>
+          <a:noFill/>
+          <a:ln/>
+        </p:spPr>
+        <p:txBody>
+          <a:bodyPr wrap="square" lIns="0" tIns="0" rIns="0" bIns="0" rtlCol="0" anchor="ctr"/>
+          <a:lstStyle/>
+          <a:p>
+            <a:pPr algn="ctr" indent="0" marL="0">
+              <a:buNone/>
+            </a:pPr>
+            <a:r>
+              <a:rPr lang="en-US" sz="1500" dirty="0">
+                <a:solidFill>
+                  <a:schemeClr val="accent4"/>
+                </a:solidFill>
+              </a:rPr>
+              <a:t>2 of 4 milestones completed</a:t>
+            </a:r>
+            <a:endParaRPr lang="en-US" sz="1500" dirty="0"/>
           </a:p>
         </p:txBody>
       </p:sp>
@@ -4723,7 +5389,7 @@
           <a:bodyPr/>
           <a:lstStyle>
             <a:lvl1pPr>
-              <a:defRPr sz="1100">
+              <a:defRPr sz="1000">
                 <a:solidFill>
                   <a:schemeClr val="accent4"/>
                 </a:solidFill>
@@ -4805,636 +5471,976 @@
       </p:sp>
       <p:sp>
         <p:nvSpPr>
-          <p:cNvPr id="3" name="box-0"/>
+          <p:cNvPr id="3" name="step-0"/>
           <p:cNvSpPr/>
           <p:nvPr/>
         </p:nvSpPr>
         <p:spPr>
           <a:xfrm>
-            <a:off x="548640" y="2011680"/>
-            <a:ext cx="1554480" cy="1188720"/>
-          </a:xfrm>
-          <a:prstGeom prst="rect">
-            <a:avLst/>
+            <a:off x="548640" y="1737360"/>
+            <a:ext cx="1600200" cy="1600200"/>
+          </a:xfrm>
+          <a:prstGeom prst="roundRect">
+            <a:avLst>
+              <a:gd name="adj" fmla="val 5714"/>
+            </a:avLst>
+          </a:prstGeom>
+          <a:solidFill>
+            <a:schemeClr val="accent2"/>
+          </a:solidFill>
+          <a:ln/>
+        </p:spPr>
+      </p:sp>
+      <p:sp>
+        <p:nvSpPr>
+          <p:cNvPr id="4" name="step-n-0-circle"/>
+          <p:cNvSpPr/>
+          <p:nvPr/>
+        </p:nvSpPr>
+        <p:spPr>
+          <a:xfrm>
+            <a:off x="1097280" y="1463040"/>
+            <a:ext cx="502920" cy="502920"/>
+          </a:xfrm>
+          <a:prstGeom prst="ellipse">
+            <a:avLst/>
+          </a:prstGeom>
+          <a:solidFill>
+            <a:schemeClr val="accent1"/>
+          </a:solidFill>
+          <a:ln/>
+        </p:spPr>
+      </p:sp>
+      <p:sp>
+        <p:nvSpPr>
+          <p:cNvPr id="5" name="step-n-0-num"/>
+          <p:cNvSpPr txBox="1"/>
+          <p:nvPr/>
+        </p:nvSpPr>
+        <p:spPr>
+          <a:xfrm>
+            <a:off x="1097280" y="1463040"/>
+            <a:ext cx="502920" cy="502920"/>
+          </a:xfrm>
+          <a:prstGeom prst="rect">
+            <a:avLst/>
+          </a:prstGeom>
+          <a:noFill/>
+          <a:ln/>
+        </p:spPr>
+        <p:txBody>
+          <a:bodyPr wrap="square" lIns="0" tIns="0" rIns="0" bIns="0" rtlCol="0" anchor="ctr"/>
+          <a:lstStyle/>
+          <a:p>
+            <a:pPr algn="ctr" indent="0" marL="0">
+              <a:buNone/>
+            </a:pPr>
+            <a:r>
+              <a:rPr lang="en-US" sz="1430" b="1" dirty="0">
+                <a:solidFill>
+                  <a:schemeClr val="bg1"/>
+                </a:solidFill>
+              </a:rPr>
+              <a:t>1</a:t>
+            </a:r>
+            <a:endParaRPr lang="en-US" sz="1430" dirty="0"/>
+          </a:p>
+        </p:txBody>
+      </p:sp>
+      <p:sp>
+        <p:nvSpPr>
+          <p:cNvPr id="6" name="step-t-0"/>
+          <p:cNvSpPr txBox="1"/>
+          <p:nvPr/>
+        </p:nvSpPr>
+        <p:spPr>
+          <a:xfrm>
+            <a:off x="548640" y="2057400"/>
+            <a:ext cx="1600200" cy="1188720"/>
+          </a:xfrm>
+          <a:prstGeom prst="rect">
+            <a:avLst/>
+          </a:prstGeom>
+          <a:noFill/>
+          <a:ln/>
+        </p:spPr>
+        <p:txBody>
+          <a:bodyPr wrap="square" lIns="0" tIns="0" rIns="0" bIns="0" rtlCol="0" anchor="ctr"/>
+          <a:lstStyle/>
+          <a:p>
+            <a:pPr algn="ctr" indent="0" marL="0">
+              <a:buNone/>
+            </a:pPr>
+            <a:r>
+              <a:rPr lang="en-US" sz="1700" b="1" dirty="0">
+                <a:solidFill>
+                  <a:schemeClr val="bg1"/>
+                </a:solidFill>
+              </a:rPr>
+              <a:t>Download</a:t>
+            </a:r>
+            <a:endParaRPr lang="en-US" sz="1700" dirty="0"/>
+          </a:p>
+          <a:p>
+            <a:pPr algn="ctr" indent="0" marL="0">
+              <a:buNone/>
+            </a:pPr>
+            <a:r>
+              <a:rPr lang="en-US" sz="1700" b="1" dirty="0">
+                <a:solidFill>
+                  <a:schemeClr val="bg1"/>
+                </a:solidFill>
+              </a:rPr>
+              <a:t>paintings</a:t>
+            </a:r>
+            <a:endParaRPr lang="en-US" sz="1700" dirty="0"/>
+          </a:p>
+        </p:txBody>
+      </p:sp>
+      <p:sp>
+        <p:nvSpPr>
+          <p:cNvPr id="7" name="arrow-0"/>
+          <p:cNvSpPr/>
+          <p:nvPr/>
+        </p:nvSpPr>
+        <p:spPr>
+          <a:xfrm>
+            <a:off x="2194560" y="2395728"/>
+            <a:ext cx="256032" cy="292608"/>
+          </a:xfrm>
+          <a:prstGeom prst="rightArrow">
+            <a:avLst/>
+          </a:prstGeom>
+          <a:solidFill>
+            <a:schemeClr val="accent1"/>
+          </a:solidFill>
+          <a:ln/>
+        </p:spPr>
+      </p:sp>
+      <p:sp>
+        <p:nvSpPr>
+          <p:cNvPr id="8" name="step-1"/>
+          <p:cNvSpPr/>
+          <p:nvPr/>
+        </p:nvSpPr>
+        <p:spPr>
+          <a:xfrm>
+            <a:off x="2468880" y="1737360"/>
+            <a:ext cx="1600200" cy="1600200"/>
+          </a:xfrm>
+          <a:prstGeom prst="roundRect">
+            <a:avLst>
+              <a:gd name="adj" fmla="val 5714"/>
+            </a:avLst>
+          </a:prstGeom>
+          <a:solidFill>
+            <a:schemeClr val="accent2"/>
+          </a:solidFill>
+          <a:ln/>
+        </p:spPr>
+      </p:sp>
+      <p:sp>
+        <p:nvSpPr>
+          <p:cNvPr id="9" name="step-n-1-circle"/>
+          <p:cNvSpPr/>
+          <p:nvPr/>
+        </p:nvSpPr>
+        <p:spPr>
+          <a:xfrm>
+            <a:off x="3017520" y="1463040"/>
+            <a:ext cx="502920" cy="502920"/>
+          </a:xfrm>
+          <a:prstGeom prst="ellipse">
+            <a:avLst/>
+          </a:prstGeom>
+          <a:solidFill>
+            <a:schemeClr val="accent1"/>
+          </a:solidFill>
+          <a:ln/>
+        </p:spPr>
+      </p:sp>
+      <p:sp>
+        <p:nvSpPr>
+          <p:cNvPr id="10" name="step-n-1-num"/>
+          <p:cNvSpPr txBox="1"/>
+          <p:nvPr/>
+        </p:nvSpPr>
+        <p:spPr>
+          <a:xfrm>
+            <a:off x="3017520" y="1463040"/>
+            <a:ext cx="502920" cy="502920"/>
+          </a:xfrm>
+          <a:prstGeom prst="rect">
+            <a:avLst/>
+          </a:prstGeom>
+          <a:noFill/>
+          <a:ln/>
+        </p:spPr>
+        <p:txBody>
+          <a:bodyPr wrap="square" lIns="0" tIns="0" rIns="0" bIns="0" rtlCol="0" anchor="ctr"/>
+          <a:lstStyle/>
+          <a:p>
+            <a:pPr algn="ctr" indent="0" marL="0">
+              <a:buNone/>
+            </a:pPr>
+            <a:r>
+              <a:rPr lang="en-US" sz="1430" b="1" dirty="0">
+                <a:solidFill>
+                  <a:schemeClr val="bg1"/>
+                </a:solidFill>
+              </a:rPr>
+              <a:t>2</a:t>
+            </a:r>
+            <a:endParaRPr lang="en-US" sz="1430" dirty="0"/>
+          </a:p>
+        </p:txBody>
+      </p:sp>
+      <p:sp>
+        <p:nvSpPr>
+          <p:cNvPr id="11" name="step-t-1"/>
+          <p:cNvSpPr txBox="1"/>
+          <p:nvPr/>
+        </p:nvSpPr>
+        <p:spPr>
+          <a:xfrm>
+            <a:off x="2468880" y="2057400"/>
+            <a:ext cx="1600200" cy="1188720"/>
+          </a:xfrm>
+          <a:prstGeom prst="rect">
+            <a:avLst/>
+          </a:prstGeom>
+          <a:noFill/>
+          <a:ln/>
+        </p:spPr>
+        <p:txBody>
+          <a:bodyPr wrap="square" lIns="0" tIns="0" rIns="0" bIns="0" rtlCol="0" anchor="ctr"/>
+          <a:lstStyle/>
+          <a:p>
+            <a:pPr algn="ctr" indent="0" marL="0">
+              <a:buNone/>
+            </a:pPr>
+            <a:r>
+              <a:rPr lang="en-US" sz="1700" b="1" dirty="0">
+                <a:solidFill>
+                  <a:schemeClr val="bg1"/>
+                </a:solidFill>
+              </a:rPr>
+              <a:t>Clean the</a:t>
+            </a:r>
+            <a:endParaRPr lang="en-US" sz="1700" dirty="0"/>
+          </a:p>
+          <a:p>
+            <a:pPr algn="ctr" indent="0" marL="0">
+              <a:buNone/>
+            </a:pPr>
+            <a:r>
+              <a:rPr lang="en-US" sz="1700" b="1" dirty="0">
+                <a:solidFill>
+                  <a:schemeClr val="bg1"/>
+                </a:solidFill>
+              </a:rPr>
+              <a:t>dataset</a:t>
+            </a:r>
+            <a:endParaRPr lang="en-US" sz="1700" dirty="0"/>
+          </a:p>
+        </p:txBody>
+      </p:sp>
+      <p:sp>
+        <p:nvSpPr>
+          <p:cNvPr id="12" name="arrow-1"/>
+          <p:cNvSpPr/>
+          <p:nvPr/>
+        </p:nvSpPr>
+        <p:spPr>
+          <a:xfrm>
+            <a:off x="4114800" y="2395728"/>
+            <a:ext cx="256032" cy="292608"/>
+          </a:xfrm>
+          <a:prstGeom prst="rightArrow">
+            <a:avLst/>
+          </a:prstGeom>
+          <a:solidFill>
+            <a:schemeClr val="accent1"/>
+          </a:solidFill>
+          <a:ln/>
+        </p:spPr>
+      </p:sp>
+      <p:sp>
+        <p:nvSpPr>
+          <p:cNvPr id="13" name="step-2"/>
+          <p:cNvSpPr/>
+          <p:nvPr/>
+        </p:nvSpPr>
+        <p:spPr>
+          <a:xfrm>
+            <a:off x="4389120" y="1737360"/>
+            <a:ext cx="1600200" cy="1600200"/>
+          </a:xfrm>
+          <a:prstGeom prst="roundRect">
+            <a:avLst>
+              <a:gd name="adj" fmla="val 5714"/>
+            </a:avLst>
+          </a:prstGeom>
+          <a:solidFill>
+            <a:schemeClr val="accent2"/>
+          </a:solidFill>
+          <a:ln/>
+        </p:spPr>
+      </p:sp>
+      <p:sp>
+        <p:nvSpPr>
+          <p:cNvPr id="14" name="step-n-2-circle"/>
+          <p:cNvSpPr/>
+          <p:nvPr/>
+        </p:nvSpPr>
+        <p:spPr>
+          <a:xfrm>
+            <a:off x="4937760" y="1463040"/>
+            <a:ext cx="502920" cy="502920"/>
+          </a:xfrm>
+          <a:prstGeom prst="ellipse">
+            <a:avLst/>
+          </a:prstGeom>
+          <a:solidFill>
+            <a:schemeClr val="accent1"/>
+          </a:solidFill>
+          <a:ln/>
+        </p:spPr>
+      </p:sp>
+      <p:sp>
+        <p:nvSpPr>
+          <p:cNvPr id="15" name="step-n-2-num"/>
+          <p:cNvSpPr txBox="1"/>
+          <p:nvPr/>
+        </p:nvSpPr>
+        <p:spPr>
+          <a:xfrm>
+            <a:off x="4937760" y="1463040"/>
+            <a:ext cx="502920" cy="502920"/>
+          </a:xfrm>
+          <a:prstGeom prst="rect">
+            <a:avLst/>
+          </a:prstGeom>
+          <a:noFill/>
+          <a:ln/>
+        </p:spPr>
+        <p:txBody>
+          <a:bodyPr wrap="square" lIns="0" tIns="0" rIns="0" bIns="0" rtlCol="0" anchor="ctr"/>
+          <a:lstStyle/>
+          <a:p>
+            <a:pPr algn="ctr" indent="0" marL="0">
+              <a:buNone/>
+            </a:pPr>
+            <a:r>
+              <a:rPr lang="en-US" sz="1430" b="1" dirty="0">
+                <a:solidFill>
+                  <a:schemeClr val="bg1"/>
+                </a:solidFill>
+              </a:rPr>
+              <a:t>3</a:t>
+            </a:r>
+            <a:endParaRPr lang="en-US" sz="1430" dirty="0"/>
+          </a:p>
+        </p:txBody>
+      </p:sp>
+      <p:sp>
+        <p:nvSpPr>
+          <p:cNvPr id="16" name="step-t-2"/>
+          <p:cNvSpPr txBox="1"/>
+          <p:nvPr/>
+        </p:nvSpPr>
+        <p:spPr>
+          <a:xfrm>
+            <a:off x="4389120" y="2057400"/>
+            <a:ext cx="1600200" cy="1188720"/>
+          </a:xfrm>
+          <a:prstGeom prst="rect">
+            <a:avLst/>
+          </a:prstGeom>
+          <a:noFill/>
+          <a:ln/>
+        </p:spPr>
+        <p:txBody>
+          <a:bodyPr wrap="square" lIns="0" tIns="0" rIns="0" bIns="0" rtlCol="0" anchor="ctr"/>
+          <a:lstStyle/>
+          <a:p>
+            <a:pPr algn="ctr" indent="0" marL="0">
+              <a:buNone/>
+            </a:pPr>
+            <a:r>
+              <a:rPr lang="en-US" sz="1700" b="1" dirty="0">
+                <a:solidFill>
+                  <a:schemeClr val="bg1"/>
+                </a:solidFill>
+              </a:rPr>
+              <a:t>Generate</a:t>
+            </a:r>
+            <a:endParaRPr lang="en-US" sz="1700" dirty="0"/>
+          </a:p>
+          <a:p>
+            <a:pPr algn="ctr" indent="0" marL="0">
+              <a:buNone/>
+            </a:pPr>
+            <a:r>
+              <a:rPr lang="en-US" sz="1700" b="1" dirty="0">
+                <a:solidFill>
+                  <a:schemeClr val="bg1"/>
+                </a:solidFill>
+              </a:rPr>
+              <a:t>captions</a:t>
+            </a:r>
+            <a:endParaRPr lang="en-US" sz="1700" dirty="0"/>
+          </a:p>
+        </p:txBody>
+      </p:sp>
+      <p:sp>
+        <p:nvSpPr>
+          <p:cNvPr id="17" name="arrow-2"/>
+          <p:cNvSpPr/>
+          <p:nvPr/>
+        </p:nvSpPr>
+        <p:spPr>
+          <a:xfrm>
+            <a:off x="6035040" y="2395728"/>
+            <a:ext cx="256032" cy="292608"/>
+          </a:xfrm>
+          <a:prstGeom prst="rightArrow">
+            <a:avLst/>
+          </a:prstGeom>
+          <a:solidFill>
+            <a:schemeClr val="accent1"/>
+          </a:solidFill>
+          <a:ln/>
+        </p:spPr>
+      </p:sp>
+      <p:sp>
+        <p:nvSpPr>
+          <p:cNvPr id="18" name="step-3"/>
+          <p:cNvSpPr/>
+          <p:nvPr/>
+        </p:nvSpPr>
+        <p:spPr>
+          <a:xfrm>
+            <a:off x="6309360" y="1737360"/>
+            <a:ext cx="1600200" cy="1600200"/>
+          </a:xfrm>
+          <a:prstGeom prst="roundRect">
+            <a:avLst>
+              <a:gd name="adj" fmla="val 5714"/>
+            </a:avLst>
+          </a:prstGeom>
+          <a:solidFill>
+            <a:schemeClr val="accent2"/>
+          </a:solidFill>
+          <a:ln/>
+        </p:spPr>
+      </p:sp>
+      <p:sp>
+        <p:nvSpPr>
+          <p:cNvPr id="19" name="step-n-3-circle"/>
+          <p:cNvSpPr/>
+          <p:nvPr/>
+        </p:nvSpPr>
+        <p:spPr>
+          <a:xfrm>
+            <a:off x="6858000" y="1463040"/>
+            <a:ext cx="502920" cy="502920"/>
+          </a:xfrm>
+          <a:prstGeom prst="ellipse">
+            <a:avLst/>
+          </a:prstGeom>
+          <a:solidFill>
+            <a:schemeClr val="accent1"/>
+          </a:solidFill>
+          <a:ln/>
+        </p:spPr>
+      </p:sp>
+      <p:sp>
+        <p:nvSpPr>
+          <p:cNvPr id="20" name="step-n-3-num"/>
+          <p:cNvSpPr txBox="1"/>
+          <p:nvPr/>
+        </p:nvSpPr>
+        <p:spPr>
+          <a:xfrm>
+            <a:off x="6858000" y="1463040"/>
+            <a:ext cx="502920" cy="502920"/>
+          </a:xfrm>
+          <a:prstGeom prst="rect">
+            <a:avLst/>
+          </a:prstGeom>
+          <a:noFill/>
+          <a:ln/>
+        </p:spPr>
+        <p:txBody>
+          <a:bodyPr wrap="square" lIns="0" tIns="0" rIns="0" bIns="0" rtlCol="0" anchor="ctr"/>
+          <a:lstStyle/>
+          <a:p>
+            <a:pPr algn="ctr" indent="0" marL="0">
+              <a:buNone/>
+            </a:pPr>
+            <a:r>
+              <a:rPr lang="en-US" sz="1430" b="1" dirty="0">
+                <a:solidFill>
+                  <a:schemeClr val="bg1"/>
+                </a:solidFill>
+              </a:rPr>
+              <a:t>4</a:t>
+            </a:r>
+            <a:endParaRPr lang="en-US" sz="1430" dirty="0"/>
+          </a:p>
+        </p:txBody>
+      </p:sp>
+      <p:sp>
+        <p:nvSpPr>
+          <p:cNvPr id="21" name="step-t-3"/>
+          <p:cNvSpPr txBox="1"/>
+          <p:nvPr/>
+        </p:nvSpPr>
+        <p:spPr>
+          <a:xfrm>
+            <a:off x="6309360" y="2057400"/>
+            <a:ext cx="1600200" cy="1188720"/>
+          </a:xfrm>
+          <a:prstGeom prst="rect">
+            <a:avLst/>
+          </a:prstGeom>
+          <a:noFill/>
+          <a:ln/>
+        </p:spPr>
+        <p:txBody>
+          <a:bodyPr wrap="square" lIns="0" tIns="0" rIns="0" bIns="0" rtlCol="0" anchor="ctr"/>
+          <a:lstStyle/>
+          <a:p>
+            <a:pPr algn="ctr" indent="0" marL="0">
+              <a:buNone/>
+            </a:pPr>
+            <a:r>
+              <a:rPr lang="en-US" sz="1700" b="1" dirty="0">
+                <a:solidFill>
+                  <a:schemeClr val="bg1"/>
+                </a:solidFill>
+              </a:rPr>
+              <a:t>Prepare</a:t>
+            </a:r>
+            <a:endParaRPr lang="en-US" sz="1700" dirty="0"/>
+          </a:p>
+          <a:p>
+            <a:pPr algn="ctr" indent="0" marL="0">
+              <a:buNone/>
+            </a:pPr>
+            <a:r>
+              <a:rPr lang="en-US" sz="1700" b="1" dirty="0">
+                <a:solidFill>
+                  <a:schemeClr val="bg1"/>
+                </a:solidFill>
+              </a:rPr>
+              <a:t>images</a:t>
+            </a:r>
+            <a:endParaRPr lang="en-US" sz="1700" dirty="0"/>
+          </a:p>
+        </p:txBody>
+      </p:sp>
+      <p:sp>
+        <p:nvSpPr>
+          <p:cNvPr id="22" name="arrow-3"/>
+          <p:cNvSpPr/>
+          <p:nvPr/>
+        </p:nvSpPr>
+        <p:spPr>
+          <a:xfrm>
+            <a:off x="7955280" y="2395728"/>
+            <a:ext cx="256032" cy="292608"/>
+          </a:xfrm>
+          <a:prstGeom prst="rightArrow">
+            <a:avLst/>
+          </a:prstGeom>
+          <a:solidFill>
+            <a:schemeClr val="accent1"/>
+          </a:solidFill>
+          <a:ln/>
+        </p:spPr>
+      </p:sp>
+      <p:sp>
+        <p:nvSpPr>
+          <p:cNvPr id="23" name="step-4"/>
+          <p:cNvSpPr/>
+          <p:nvPr/>
+        </p:nvSpPr>
+        <p:spPr>
+          <a:xfrm>
+            <a:off x="8229600" y="1737360"/>
+            <a:ext cx="1600200" cy="1600200"/>
+          </a:xfrm>
+          <a:prstGeom prst="roundRect">
+            <a:avLst>
+              <a:gd name="adj" fmla="val 5714"/>
+            </a:avLst>
+          </a:prstGeom>
+          <a:solidFill>
+            <a:schemeClr val="tx2"/>
+          </a:solidFill>
+          <a:ln/>
+        </p:spPr>
+      </p:sp>
+      <p:sp>
+        <p:nvSpPr>
+          <p:cNvPr id="24" name="step-n-4-circle"/>
+          <p:cNvSpPr/>
+          <p:nvPr/>
+        </p:nvSpPr>
+        <p:spPr>
+          <a:xfrm>
+            <a:off x="8778240" y="1463040"/>
+            <a:ext cx="502920" cy="502920"/>
+          </a:xfrm>
+          <a:prstGeom prst="ellipse">
+            <a:avLst/>
+          </a:prstGeom>
+          <a:solidFill>
+            <a:schemeClr val="accent1"/>
+          </a:solidFill>
+          <a:ln/>
+        </p:spPr>
+      </p:sp>
+      <p:sp>
+        <p:nvSpPr>
+          <p:cNvPr id="25" name="step-n-4-num"/>
+          <p:cNvSpPr txBox="1"/>
+          <p:nvPr/>
+        </p:nvSpPr>
+        <p:spPr>
+          <a:xfrm>
+            <a:off x="8778240" y="1463040"/>
+            <a:ext cx="502920" cy="502920"/>
+          </a:xfrm>
+          <a:prstGeom prst="rect">
+            <a:avLst/>
+          </a:prstGeom>
+          <a:noFill/>
+          <a:ln/>
+        </p:spPr>
+        <p:txBody>
+          <a:bodyPr wrap="square" lIns="0" tIns="0" rIns="0" bIns="0" rtlCol="0" anchor="ctr"/>
+          <a:lstStyle/>
+          <a:p>
+            <a:pPr algn="ctr" indent="0" marL="0">
+              <a:buNone/>
+            </a:pPr>
+            <a:r>
+              <a:rPr lang="en-US" sz="1430" b="1" dirty="0">
+                <a:solidFill>
+                  <a:schemeClr val="bg1"/>
+                </a:solidFill>
+              </a:rPr>
+              <a:t>5</a:t>
+            </a:r>
+            <a:endParaRPr lang="en-US" sz="1430" dirty="0"/>
+          </a:p>
+        </p:txBody>
+      </p:sp>
+      <p:sp>
+        <p:nvSpPr>
+          <p:cNvPr id="26" name="step-t-4"/>
+          <p:cNvSpPr txBox="1"/>
+          <p:nvPr/>
+        </p:nvSpPr>
+        <p:spPr>
+          <a:xfrm>
+            <a:off x="8229600" y="2057400"/>
+            <a:ext cx="1600200" cy="1188720"/>
+          </a:xfrm>
+          <a:prstGeom prst="rect">
+            <a:avLst/>
+          </a:prstGeom>
+          <a:noFill/>
+          <a:ln/>
+        </p:spPr>
+        <p:txBody>
+          <a:bodyPr wrap="square" lIns="0" tIns="0" rIns="0" bIns="0" rtlCol="0" anchor="ctr"/>
+          <a:lstStyle/>
+          <a:p>
+            <a:pPr algn="ctr" indent="0" marL="0">
+              <a:buNone/>
+            </a:pPr>
+            <a:r>
+              <a:rPr lang="en-US" sz="1700" b="1" dirty="0">
+                <a:solidFill>
+                  <a:schemeClr val="bg1"/>
+                </a:solidFill>
+              </a:rPr>
+              <a:t>Train</a:t>
+            </a:r>
+            <a:endParaRPr lang="en-US" sz="1700" dirty="0"/>
+          </a:p>
+          <a:p>
+            <a:pPr algn="ctr" indent="0" marL="0">
+              <a:buNone/>
+            </a:pPr>
+            <a:r>
+              <a:rPr lang="en-US" sz="1700" b="1" dirty="0">
+                <a:solidFill>
+                  <a:schemeClr val="bg1"/>
+                </a:solidFill>
+              </a:rPr>
+              <a:t>LoRA</a:t>
+            </a:r>
+            <a:endParaRPr lang="en-US" sz="1700" dirty="0"/>
+          </a:p>
+        </p:txBody>
+      </p:sp>
+      <p:sp>
+        <p:nvSpPr>
+          <p:cNvPr id="27" name="arrow-4"/>
+          <p:cNvSpPr/>
+          <p:nvPr/>
+        </p:nvSpPr>
+        <p:spPr>
+          <a:xfrm>
+            <a:off x="9875520" y="2395728"/>
+            <a:ext cx="256032" cy="292608"/>
+          </a:xfrm>
+          <a:prstGeom prst="rightArrow">
+            <a:avLst/>
+          </a:prstGeom>
+          <a:solidFill>
+            <a:schemeClr val="accent1"/>
+          </a:solidFill>
+          <a:ln/>
+        </p:spPr>
+      </p:sp>
+      <p:sp>
+        <p:nvSpPr>
+          <p:cNvPr id="28" name="step-5"/>
+          <p:cNvSpPr/>
+          <p:nvPr/>
+        </p:nvSpPr>
+        <p:spPr>
+          <a:xfrm>
+            <a:off x="10149840" y="1737360"/>
+            <a:ext cx="1600200" cy="1600200"/>
+          </a:xfrm>
+          <a:prstGeom prst="roundRect">
+            <a:avLst>
+              <a:gd name="adj" fmla="val 5714"/>
+            </a:avLst>
+          </a:prstGeom>
+          <a:solidFill>
+            <a:schemeClr val="tx2"/>
+          </a:solidFill>
+          <a:ln/>
+        </p:spPr>
+      </p:sp>
+      <p:sp>
+        <p:nvSpPr>
+          <p:cNvPr id="29" name="step-n-5-circle"/>
+          <p:cNvSpPr/>
+          <p:nvPr/>
+        </p:nvSpPr>
+        <p:spPr>
+          <a:xfrm>
+            <a:off x="10698480" y="1463040"/>
+            <a:ext cx="502920" cy="502920"/>
+          </a:xfrm>
+          <a:prstGeom prst="ellipse">
+            <a:avLst/>
+          </a:prstGeom>
+          <a:solidFill>
+            <a:schemeClr val="accent1"/>
+          </a:solidFill>
+          <a:ln/>
+        </p:spPr>
+      </p:sp>
+      <p:sp>
+        <p:nvSpPr>
+          <p:cNvPr id="30" name="step-n-5-num"/>
+          <p:cNvSpPr txBox="1"/>
+          <p:nvPr/>
+        </p:nvSpPr>
+        <p:spPr>
+          <a:xfrm>
+            <a:off x="10698480" y="1463040"/>
+            <a:ext cx="502920" cy="502920"/>
+          </a:xfrm>
+          <a:prstGeom prst="rect">
+            <a:avLst/>
+          </a:prstGeom>
+          <a:noFill/>
+          <a:ln/>
+        </p:spPr>
+        <p:txBody>
+          <a:bodyPr wrap="square" lIns="0" tIns="0" rIns="0" bIns="0" rtlCol="0" anchor="ctr"/>
+          <a:lstStyle/>
+          <a:p>
+            <a:pPr algn="ctr" indent="0" marL="0">
+              <a:buNone/>
+            </a:pPr>
+            <a:r>
+              <a:rPr lang="en-US" sz="1430" b="1" dirty="0">
+                <a:solidFill>
+                  <a:schemeClr val="bg1"/>
+                </a:solidFill>
+              </a:rPr>
+              <a:t>6</a:t>
+            </a:r>
+            <a:endParaRPr lang="en-US" sz="1430" dirty="0"/>
+          </a:p>
+        </p:txBody>
+      </p:sp>
+      <p:sp>
+        <p:nvSpPr>
+          <p:cNvPr id="31" name="step-t-5"/>
+          <p:cNvSpPr txBox="1"/>
+          <p:nvPr/>
+        </p:nvSpPr>
+        <p:spPr>
+          <a:xfrm>
+            <a:off x="10149840" y="2057400"/>
+            <a:ext cx="1600200" cy="1188720"/>
+          </a:xfrm>
+          <a:prstGeom prst="rect">
+            <a:avLst/>
+          </a:prstGeom>
+          <a:noFill/>
+          <a:ln/>
+        </p:spPr>
+        <p:txBody>
+          <a:bodyPr wrap="square" lIns="0" tIns="0" rIns="0" bIns="0" rtlCol="0" anchor="ctr"/>
+          <a:lstStyle/>
+          <a:p>
+            <a:pPr algn="ctr" indent="0" marL="0">
+              <a:buNone/>
+            </a:pPr>
+            <a:r>
+              <a:rPr lang="en-US" sz="1700" b="1" dirty="0">
+                <a:solidFill>
+                  <a:schemeClr val="bg1"/>
+                </a:solidFill>
+              </a:rPr>
+              <a:t>Generate</a:t>
+            </a:r>
+            <a:endParaRPr lang="en-US" sz="1700" dirty="0"/>
+          </a:p>
+          <a:p>
+            <a:pPr algn="ctr" indent="0" marL="0">
+              <a:buNone/>
+            </a:pPr>
+            <a:r>
+              <a:rPr lang="en-US" sz="1700" b="1" dirty="0">
+                <a:solidFill>
+                  <a:schemeClr val="bg1"/>
+                </a:solidFill>
+              </a:rPr>
+              <a:t>images</a:t>
+            </a:r>
+            <a:endParaRPr lang="en-US" sz="1700" dirty="0"/>
+          </a:p>
+        </p:txBody>
+      </p:sp>
+      <p:sp>
+        <p:nvSpPr>
+          <p:cNvPr id="32" name="m1-label"/>
+          <p:cNvSpPr txBox="1"/>
+          <p:nvPr/>
+        </p:nvSpPr>
+        <p:spPr>
+          <a:xfrm>
+            <a:off x="548640" y="3474720"/>
+            <a:ext cx="7360920" cy="320040"/>
+          </a:xfrm>
+          <a:prstGeom prst="rect">
+            <a:avLst/>
+          </a:prstGeom>
+          <a:noFill/>
+          <a:ln/>
+        </p:spPr>
+        <p:txBody>
+          <a:bodyPr wrap="square" lIns="0" tIns="0" rIns="0" bIns="0" rtlCol="0" anchor="ctr"/>
+          <a:lstStyle/>
+          <a:p>
+            <a:pPr algn="ctr" indent="0" marL="0">
+              <a:buNone/>
+            </a:pPr>
+            <a:r>
+              <a:rPr lang="en-US" sz="1500" b="1" dirty="0">
+                <a:solidFill>
+                  <a:schemeClr val="accent2"/>
+                </a:solidFill>
+              </a:rPr>
+              <a:t>Milestone 1</a:t>
+            </a:r>
+            <a:endParaRPr lang="en-US" sz="1500" dirty="0"/>
+          </a:p>
+        </p:txBody>
+      </p:sp>
+      <p:sp>
+        <p:nvSpPr>
+          <p:cNvPr id="33" name="m2-label"/>
+          <p:cNvSpPr txBox="1"/>
+          <p:nvPr/>
+        </p:nvSpPr>
+        <p:spPr>
+          <a:xfrm>
+            <a:off x="8229600" y="3474720"/>
+            <a:ext cx="3520440" cy="320040"/>
+          </a:xfrm>
+          <a:prstGeom prst="rect">
+            <a:avLst/>
+          </a:prstGeom>
+          <a:noFill/>
+          <a:ln/>
+        </p:spPr>
+        <p:txBody>
+          <a:bodyPr wrap="square" lIns="0" tIns="0" rIns="0" bIns="0" rtlCol="0" anchor="ctr"/>
+          <a:lstStyle/>
+          <a:p>
+            <a:pPr algn="ctr" indent="0" marL="0">
+              <a:buNone/>
+            </a:pPr>
+            <a:r>
+              <a:rPr lang="en-US" sz="1500" b="1" dirty="0">
+                <a:solidFill>
+                  <a:schemeClr val="tx2"/>
+                </a:solidFill>
+              </a:rPr>
+              <a:t>Milestone 2</a:t>
+            </a:r>
+            <a:endParaRPr lang="en-US" sz="1500" dirty="0"/>
+          </a:p>
+        </p:txBody>
+      </p:sp>
+      <p:sp>
+        <p:nvSpPr>
+          <p:cNvPr id="34" name="pipeline-notes"/>
+          <p:cNvSpPr/>
+          <p:nvPr/>
+        </p:nvSpPr>
+        <p:spPr>
+          <a:xfrm>
+            <a:off x="548640" y="4206240"/>
+            <a:ext cx="11064240" cy="1234440"/>
+          </a:xfrm>
+          <a:prstGeom prst="roundRect">
+            <a:avLst>
+              <a:gd name="adj" fmla="val 7407"/>
+            </a:avLst>
           </a:prstGeom>
           <a:solidFill>
             <a:schemeClr val="bg2"/>
           </a:solidFill>
-          <a:ln w="12700">
-            <a:solidFill>
-              <a:schemeClr val="accent4"/>
-            </a:solidFill>
-            <a:prstDash val="solid"/>
-          </a:ln>
-        </p:spPr>
-      </p:sp>
-      <p:sp>
-        <p:nvSpPr>
-          <p:cNvPr id="4" name="box-text-0"/>
+          <a:ln/>
+        </p:spPr>
+      </p:sp>
+      <p:sp>
+        <p:nvSpPr>
+          <p:cNvPr id="35" name="points"/>
           <p:cNvSpPr txBox="1"/>
           <p:nvPr/>
         </p:nvSpPr>
         <p:spPr>
           <a:xfrm>
-            <a:off x="548640" y="2011680"/>
-            <a:ext cx="1554480" cy="1188720"/>
-          </a:xfrm>
-          <a:prstGeom prst="rect">
-            <a:avLst/>
-          </a:prstGeom>
-          <a:noFill/>
-          <a:ln/>
-        </p:spPr>
-        <p:txBody>
-          <a:bodyPr wrap="square" lIns="0" tIns="0" rIns="0" bIns="0" rtlCol="0" anchor="ctr"/>
-          <a:lstStyle/>
-          <a:p>
-            <a:pPr algn="ctr" indent="0" marL="0">
-              <a:buNone/>
-            </a:pPr>
-            <a:r>
-              <a:rPr lang="en-US" sz="1600" dirty="0">
-                <a:solidFill>
-                  <a:schemeClr val="tx1"/>
-                </a:solidFill>
-              </a:rPr>
-              <a:t>Download</a:t>
-            </a:r>
-            <a:endParaRPr lang="en-US" sz="1600" dirty="0"/>
-          </a:p>
-          <a:p>
-            <a:pPr algn="ctr" indent="0" marL="0">
-              <a:buNone/>
-            </a:pPr>
-            <a:r>
-              <a:rPr lang="en-US" sz="1600" dirty="0">
-                <a:solidFill>
-                  <a:schemeClr val="tx1"/>
-                </a:solidFill>
-              </a:rPr>
-              <a:t>paintings</a:t>
-            </a:r>
-            <a:endParaRPr lang="en-US" sz="1600" dirty="0"/>
-          </a:p>
-        </p:txBody>
-      </p:sp>
-      <p:sp>
-        <p:nvSpPr>
-          <p:cNvPr id="5" name="arrow-0"/>
-          <p:cNvSpPr/>
-          <p:nvPr/>
-        </p:nvSpPr>
-        <p:spPr>
-          <a:xfrm>
-            <a:off x="2176272" y="2468880"/>
-            <a:ext cx="256032" cy="274320"/>
-          </a:xfrm>
-          <a:prstGeom prst="rightArrow">
-            <a:avLst/>
-          </a:prstGeom>
-          <a:solidFill>
-            <a:schemeClr val="accent4"/>
-          </a:solidFill>
-          <a:ln/>
-        </p:spPr>
-      </p:sp>
-      <p:sp>
-        <p:nvSpPr>
-          <p:cNvPr id="6" name="box-1"/>
-          <p:cNvSpPr/>
-          <p:nvPr/>
-        </p:nvSpPr>
-        <p:spPr>
-          <a:xfrm>
-            <a:off x="2468880" y="2011680"/>
-            <a:ext cx="1554480" cy="1188720"/>
-          </a:xfrm>
-          <a:prstGeom prst="rect">
-            <a:avLst/>
-          </a:prstGeom>
-          <a:solidFill>
-            <a:schemeClr val="bg2"/>
-          </a:solidFill>
-          <a:ln w="12700">
-            <a:solidFill>
-              <a:schemeClr val="accent4"/>
-            </a:solidFill>
-            <a:prstDash val="solid"/>
-          </a:ln>
-        </p:spPr>
-      </p:sp>
-      <p:sp>
-        <p:nvSpPr>
-          <p:cNvPr id="7" name="box-text-1"/>
-          <p:cNvSpPr txBox="1"/>
-          <p:nvPr/>
-        </p:nvSpPr>
-        <p:spPr>
-          <a:xfrm>
-            <a:off x="2468880" y="2011680"/>
-            <a:ext cx="1554480" cy="1188720"/>
-          </a:xfrm>
-          <a:prstGeom prst="rect">
-            <a:avLst/>
-          </a:prstGeom>
-          <a:noFill/>
-          <a:ln/>
-        </p:spPr>
-        <p:txBody>
-          <a:bodyPr wrap="square" lIns="0" tIns="0" rIns="0" bIns="0" rtlCol="0" anchor="ctr"/>
-          <a:lstStyle/>
-          <a:p>
-            <a:pPr algn="ctr" indent="0" marL="0">
-              <a:buNone/>
-            </a:pPr>
-            <a:r>
-              <a:rPr lang="en-US" sz="1600" dirty="0">
-                <a:solidFill>
-                  <a:schemeClr val="tx1"/>
-                </a:solidFill>
-              </a:rPr>
-              <a:t>Clean the</a:t>
-            </a:r>
-            <a:endParaRPr lang="en-US" sz="1600" dirty="0"/>
-          </a:p>
-          <a:p>
-            <a:pPr algn="ctr" indent="0" marL="0">
-              <a:buNone/>
-            </a:pPr>
-            <a:r>
-              <a:rPr lang="en-US" sz="1600" dirty="0">
-                <a:solidFill>
-                  <a:schemeClr val="tx1"/>
-                </a:solidFill>
-              </a:rPr>
-              <a:t>dataset</a:t>
-            </a:r>
-            <a:endParaRPr lang="en-US" sz="1600" dirty="0"/>
-          </a:p>
-        </p:txBody>
-      </p:sp>
-      <p:sp>
-        <p:nvSpPr>
-          <p:cNvPr id="8" name="arrow-1"/>
-          <p:cNvSpPr/>
-          <p:nvPr/>
-        </p:nvSpPr>
-        <p:spPr>
-          <a:xfrm>
-            <a:off x="4096512" y="2468880"/>
-            <a:ext cx="256032" cy="274320"/>
-          </a:xfrm>
-          <a:prstGeom prst="rightArrow">
-            <a:avLst/>
-          </a:prstGeom>
-          <a:solidFill>
-            <a:schemeClr val="accent4"/>
-          </a:solidFill>
-          <a:ln/>
-        </p:spPr>
-      </p:sp>
-      <p:sp>
-        <p:nvSpPr>
-          <p:cNvPr id="9" name="box-2"/>
-          <p:cNvSpPr/>
-          <p:nvPr/>
-        </p:nvSpPr>
-        <p:spPr>
-          <a:xfrm>
-            <a:off x="4389120" y="2011680"/>
-            <a:ext cx="1554480" cy="1188720"/>
-          </a:xfrm>
-          <a:prstGeom prst="rect">
-            <a:avLst/>
-          </a:prstGeom>
-          <a:solidFill>
-            <a:schemeClr val="bg2"/>
-          </a:solidFill>
-          <a:ln w="12700">
-            <a:solidFill>
-              <a:schemeClr val="accent4"/>
-            </a:solidFill>
-            <a:prstDash val="solid"/>
-          </a:ln>
-        </p:spPr>
-      </p:sp>
-      <p:sp>
-        <p:nvSpPr>
-          <p:cNvPr id="10" name="box-text-2"/>
-          <p:cNvSpPr txBox="1"/>
-          <p:nvPr/>
-        </p:nvSpPr>
-        <p:spPr>
-          <a:xfrm>
-            <a:off x="4389120" y="2011680"/>
-            <a:ext cx="1554480" cy="1188720"/>
-          </a:xfrm>
-          <a:prstGeom prst="rect">
-            <a:avLst/>
-          </a:prstGeom>
-          <a:noFill/>
-          <a:ln/>
-        </p:spPr>
-        <p:txBody>
-          <a:bodyPr wrap="square" lIns="0" tIns="0" rIns="0" bIns="0" rtlCol="0" anchor="ctr"/>
-          <a:lstStyle/>
-          <a:p>
-            <a:pPr algn="ctr" indent="0" marL="0">
-              <a:buNone/>
-            </a:pPr>
-            <a:r>
-              <a:rPr lang="en-US" sz="1600" dirty="0">
-                <a:solidFill>
-                  <a:schemeClr val="tx1"/>
-                </a:solidFill>
-              </a:rPr>
-              <a:t>Generate</a:t>
-            </a:r>
-            <a:endParaRPr lang="en-US" sz="1600" dirty="0"/>
-          </a:p>
-          <a:p>
-            <a:pPr algn="ctr" indent="0" marL="0">
-              <a:buNone/>
-            </a:pPr>
-            <a:r>
-              <a:rPr lang="en-US" sz="1600" dirty="0">
-                <a:solidFill>
-                  <a:schemeClr val="tx1"/>
-                </a:solidFill>
-              </a:rPr>
-              <a:t>captions</a:t>
-            </a:r>
-            <a:endParaRPr lang="en-US" sz="1600" dirty="0"/>
-          </a:p>
-        </p:txBody>
-      </p:sp>
-      <p:sp>
-        <p:nvSpPr>
-          <p:cNvPr id="11" name="arrow-2"/>
-          <p:cNvSpPr/>
-          <p:nvPr/>
-        </p:nvSpPr>
-        <p:spPr>
-          <a:xfrm>
-            <a:off x="6016752" y="2468880"/>
-            <a:ext cx="256032" cy="274320"/>
-          </a:xfrm>
-          <a:prstGeom prst="rightArrow">
-            <a:avLst/>
-          </a:prstGeom>
-          <a:solidFill>
-            <a:schemeClr val="accent4"/>
-          </a:solidFill>
-          <a:ln/>
-        </p:spPr>
-      </p:sp>
-      <p:sp>
-        <p:nvSpPr>
-          <p:cNvPr id="12" name="box-3"/>
-          <p:cNvSpPr/>
-          <p:nvPr/>
-        </p:nvSpPr>
-        <p:spPr>
-          <a:xfrm>
-            <a:off x="6309360" y="2011680"/>
-            <a:ext cx="1554480" cy="1188720"/>
-          </a:xfrm>
-          <a:prstGeom prst="rect">
-            <a:avLst/>
-          </a:prstGeom>
-          <a:solidFill>
-            <a:schemeClr val="bg2"/>
-          </a:solidFill>
-          <a:ln w="12700">
-            <a:solidFill>
-              <a:schemeClr val="accent4"/>
-            </a:solidFill>
-            <a:prstDash val="solid"/>
-          </a:ln>
-        </p:spPr>
-      </p:sp>
-      <p:sp>
-        <p:nvSpPr>
-          <p:cNvPr id="13" name="box-text-3"/>
-          <p:cNvSpPr txBox="1"/>
-          <p:nvPr/>
-        </p:nvSpPr>
-        <p:spPr>
-          <a:xfrm>
-            <a:off x="6309360" y="2011680"/>
-            <a:ext cx="1554480" cy="1188720"/>
-          </a:xfrm>
-          <a:prstGeom prst="rect">
-            <a:avLst/>
-          </a:prstGeom>
-          <a:noFill/>
-          <a:ln/>
-        </p:spPr>
-        <p:txBody>
-          <a:bodyPr wrap="square" lIns="0" tIns="0" rIns="0" bIns="0" rtlCol="0" anchor="ctr"/>
-          <a:lstStyle/>
-          <a:p>
-            <a:pPr algn="ctr" indent="0" marL="0">
-              <a:buNone/>
-            </a:pPr>
-            <a:r>
-              <a:rPr lang="en-US" sz="1600" dirty="0">
-                <a:solidFill>
-                  <a:schemeClr val="tx1"/>
-                </a:solidFill>
-              </a:rPr>
-              <a:t>Prepare</a:t>
-            </a:r>
-            <a:endParaRPr lang="en-US" sz="1600" dirty="0"/>
-          </a:p>
-          <a:p>
-            <a:pPr algn="ctr" indent="0" marL="0">
-              <a:buNone/>
-            </a:pPr>
-            <a:r>
-              <a:rPr lang="en-US" sz="1600" dirty="0">
-                <a:solidFill>
-                  <a:schemeClr val="tx1"/>
-                </a:solidFill>
-              </a:rPr>
-              <a:t>images</a:t>
-            </a:r>
-            <a:endParaRPr lang="en-US" sz="1600" dirty="0"/>
-          </a:p>
-        </p:txBody>
-      </p:sp>
-      <p:sp>
-        <p:nvSpPr>
-          <p:cNvPr id="14" name="arrow-3"/>
-          <p:cNvSpPr/>
-          <p:nvPr/>
-        </p:nvSpPr>
-        <p:spPr>
-          <a:xfrm>
-            <a:off x="7936992" y="2468880"/>
-            <a:ext cx="256032" cy="274320"/>
-          </a:xfrm>
-          <a:prstGeom prst="rightArrow">
-            <a:avLst/>
-          </a:prstGeom>
-          <a:solidFill>
-            <a:schemeClr val="accent4"/>
-          </a:solidFill>
-          <a:ln/>
-        </p:spPr>
-      </p:sp>
-      <p:sp>
-        <p:nvSpPr>
-          <p:cNvPr id="15" name="box-4"/>
-          <p:cNvSpPr/>
-          <p:nvPr/>
-        </p:nvSpPr>
-        <p:spPr>
-          <a:xfrm>
-            <a:off x="8229600" y="2011680"/>
-            <a:ext cx="1554480" cy="1188720"/>
-          </a:xfrm>
-          <a:prstGeom prst="rect">
-            <a:avLst/>
-          </a:prstGeom>
-          <a:solidFill>
-            <a:srgbClr val="F6E9E9"/>
-          </a:solidFill>
-          <a:ln w="12700">
-            <a:solidFill>
-              <a:schemeClr val="accent4"/>
-            </a:solidFill>
-            <a:prstDash val="solid"/>
-          </a:ln>
-        </p:spPr>
-      </p:sp>
-      <p:sp>
-        <p:nvSpPr>
-          <p:cNvPr id="16" name="box-text-4"/>
-          <p:cNvSpPr txBox="1"/>
-          <p:nvPr/>
-        </p:nvSpPr>
-        <p:spPr>
-          <a:xfrm>
-            <a:off x="8229600" y="2011680"/>
-            <a:ext cx="1554480" cy="1188720"/>
-          </a:xfrm>
-          <a:prstGeom prst="rect">
-            <a:avLst/>
-          </a:prstGeom>
-          <a:noFill/>
-          <a:ln/>
-        </p:spPr>
-        <p:txBody>
-          <a:bodyPr wrap="square" lIns="0" tIns="0" rIns="0" bIns="0" rtlCol="0" anchor="ctr"/>
-          <a:lstStyle/>
-          <a:p>
-            <a:pPr algn="ctr" indent="0" marL="0">
-              <a:buNone/>
-            </a:pPr>
-            <a:r>
-              <a:rPr lang="en-US" sz="1600" dirty="0">
-                <a:solidFill>
-                  <a:schemeClr val="tx1"/>
-                </a:solidFill>
-              </a:rPr>
-              <a:t>Train</a:t>
-            </a:r>
-            <a:endParaRPr lang="en-US" sz="1600" dirty="0"/>
-          </a:p>
-          <a:p>
-            <a:pPr algn="ctr" indent="0" marL="0">
-              <a:buNone/>
-            </a:pPr>
-            <a:r>
-              <a:rPr lang="en-US" sz="1600" dirty="0">
-                <a:solidFill>
-                  <a:schemeClr val="tx1"/>
-                </a:solidFill>
-              </a:rPr>
-              <a:t>LoRA</a:t>
-            </a:r>
-            <a:endParaRPr lang="en-US" sz="1600" dirty="0"/>
-          </a:p>
-        </p:txBody>
-      </p:sp>
-      <p:sp>
-        <p:nvSpPr>
-          <p:cNvPr id="17" name="arrow-4"/>
-          <p:cNvSpPr/>
-          <p:nvPr/>
-        </p:nvSpPr>
-        <p:spPr>
-          <a:xfrm>
-            <a:off x="9857232" y="2468880"/>
-            <a:ext cx="256032" cy="274320"/>
-          </a:xfrm>
-          <a:prstGeom prst="rightArrow">
-            <a:avLst/>
-          </a:prstGeom>
-          <a:solidFill>
-            <a:schemeClr val="accent4"/>
-          </a:solidFill>
-          <a:ln/>
-        </p:spPr>
-      </p:sp>
-      <p:sp>
-        <p:nvSpPr>
-          <p:cNvPr id="18" name="box-5"/>
-          <p:cNvSpPr/>
-          <p:nvPr/>
-        </p:nvSpPr>
-        <p:spPr>
-          <a:xfrm>
-            <a:off x="10149840" y="2011680"/>
-            <a:ext cx="1554480" cy="1188720"/>
-          </a:xfrm>
-          <a:prstGeom prst="rect">
-            <a:avLst/>
-          </a:prstGeom>
-          <a:solidFill>
-            <a:srgbClr val="F6E9E9"/>
-          </a:solidFill>
-          <a:ln w="12700">
-            <a:solidFill>
-              <a:schemeClr val="accent4"/>
-            </a:solidFill>
-            <a:prstDash val="solid"/>
-          </a:ln>
-        </p:spPr>
-      </p:sp>
-      <p:sp>
-        <p:nvSpPr>
-          <p:cNvPr id="19" name="box-text-5"/>
-          <p:cNvSpPr txBox="1"/>
-          <p:nvPr/>
-        </p:nvSpPr>
-        <p:spPr>
-          <a:xfrm>
-            <a:off x="10149840" y="2011680"/>
-            <a:ext cx="1554480" cy="1188720"/>
-          </a:xfrm>
-          <a:prstGeom prst="rect">
-            <a:avLst/>
-          </a:prstGeom>
-          <a:noFill/>
-          <a:ln/>
-        </p:spPr>
-        <p:txBody>
-          <a:bodyPr wrap="square" lIns="0" tIns="0" rIns="0" bIns="0" rtlCol="0" anchor="ctr"/>
-          <a:lstStyle/>
-          <a:p>
-            <a:pPr algn="ctr" indent="0" marL="0">
-              <a:buNone/>
-            </a:pPr>
-            <a:r>
-              <a:rPr lang="en-US" sz="1600" dirty="0">
-                <a:solidFill>
-                  <a:schemeClr val="tx1"/>
-                </a:solidFill>
-              </a:rPr>
-              <a:t>Generate</a:t>
-            </a:r>
-            <a:endParaRPr lang="en-US" sz="1600" dirty="0"/>
-          </a:p>
-          <a:p>
-            <a:pPr algn="ctr" indent="0" marL="0">
-              <a:buNone/>
-            </a:pPr>
-            <a:r>
-              <a:rPr lang="en-US" sz="1600" dirty="0">
-                <a:solidFill>
-                  <a:schemeClr val="tx1"/>
-                </a:solidFill>
-              </a:rPr>
-              <a:t>images</a:t>
-            </a:r>
-            <a:endParaRPr lang="en-US" sz="1600" dirty="0"/>
-          </a:p>
-        </p:txBody>
-      </p:sp>
-      <p:sp>
-        <p:nvSpPr>
-          <p:cNvPr id="20" name="caption"/>
-          <p:cNvSpPr txBox="1"/>
-          <p:nvPr/>
-        </p:nvSpPr>
-        <p:spPr>
-          <a:xfrm>
-            <a:off x="548640" y="3383280"/>
-            <a:ext cx="7315200" cy="274320"/>
-          </a:xfrm>
-          <a:prstGeom prst="rect">
-            <a:avLst/>
-          </a:prstGeom>
-          <a:noFill/>
-          <a:ln/>
-        </p:spPr>
-        <p:txBody>
-          <a:bodyPr wrap="square" lIns="0" tIns="0" rIns="0" bIns="0" rtlCol="0" anchor="ctr"/>
-          <a:lstStyle/>
-          <a:p>
-            <a:pPr algn="ctr" indent="0" marL="0">
-              <a:buNone/>
-            </a:pPr>
-            <a:r>
-              <a:rPr lang="en-US" sz="1400" dirty="0">
-                <a:solidFill>
-                  <a:schemeClr val="accent4"/>
-                </a:solidFill>
-              </a:rPr>
-              <a:t>Milestone 1</a:t>
-            </a:r>
-            <a:endParaRPr lang="en-US" sz="1400" dirty="0"/>
-          </a:p>
-        </p:txBody>
-      </p:sp>
-      <p:sp>
-        <p:nvSpPr>
-          <p:cNvPr id="21" name="caption"/>
-          <p:cNvSpPr txBox="1"/>
-          <p:nvPr/>
-        </p:nvSpPr>
-        <p:spPr>
-          <a:xfrm>
-            <a:off x="8229600" y="3383280"/>
-            <a:ext cx="3383280" cy="274320"/>
-          </a:xfrm>
-          <a:prstGeom prst="rect">
-            <a:avLst/>
-          </a:prstGeom>
-          <a:noFill/>
-          <a:ln/>
-        </p:spPr>
-        <p:txBody>
-          <a:bodyPr wrap="square" lIns="0" tIns="0" rIns="0" bIns="0" rtlCol="0" anchor="ctr"/>
-          <a:lstStyle/>
-          <a:p>
-            <a:pPr algn="ctr" indent="0" marL="0">
-              <a:buNone/>
-            </a:pPr>
-            <a:r>
-              <a:rPr lang="en-US" sz="1400" dirty="0">
-                <a:solidFill>
-                  <a:schemeClr val="accent4"/>
-                </a:solidFill>
-              </a:rPr>
-              <a:t>Milestone 2</a:t>
-            </a:r>
-            <a:endParaRPr lang="en-US" sz="1400" dirty="0"/>
-          </a:p>
-        </p:txBody>
-      </p:sp>
-      <p:sp>
-        <p:nvSpPr>
-          <p:cNvPr id="22" name="points"/>
-          <p:cNvSpPr txBox="1"/>
-          <p:nvPr/>
-        </p:nvSpPr>
-        <p:spPr>
-          <a:xfrm>
-            <a:off x="548640" y="4206240"/>
-            <a:ext cx="11064240" cy="1463040"/>
+            <a:off x="822960" y="4407408"/>
+            <a:ext cx="10607040" cy="914400"/>
           </a:xfrm>
           <a:prstGeom prst="rect">
             <a:avLst/>
@@ -5454,14 +6460,14 @@
               <a:buChar char="•"/>
             </a:pPr>
             <a:r>
-              <a:rPr lang="en-US" sz="1800" dirty="0">
+              <a:rPr lang="en-US" sz="1700" dirty="0">
                 <a:solidFill>
                   <a:schemeClr val="tx1"/>
                 </a:solidFill>
               </a:rPr>
               <a:t>Steps 1-4 run on my laptop (MacBook), training runs on Google Colab (T4 GPU).</a:t>
             </a:r>
-            <a:endParaRPr lang="en-US" sz="1800" dirty="0"/>
+            <a:endParaRPr lang="en-US" sz="1700" dirty="0"/>
           </a:p>
           <a:p>
             <a:pPr marL="342900" indent="-342900">
@@ -5472,14 +6478,14 @@
               <a:buChar char="•"/>
             </a:pPr>
             <a:r>
-              <a:rPr lang="en-US" sz="1800" dirty="0">
+              <a:rPr lang="en-US" sz="1700" dirty="0">
                 <a:solidFill>
                   <a:schemeClr val="tx1"/>
                 </a:solidFill>
               </a:rPr>
               <a:t>Everything is controlled by config files and scripts, so the results can be reproduced.</a:t>
             </a:r>
-            <a:endParaRPr lang="en-US" sz="1800" dirty="0"/>
+            <a:endParaRPr lang="en-US" sz="1700" dirty="0"/>
           </a:p>
         </p:txBody>
       </p:sp>
@@ -5511,7 +6517,7 @@
           <a:bodyPr/>
           <a:lstStyle>
             <a:lvl1pPr>
-              <a:defRPr sz="1100">
+              <a:defRPr sz="1000">
                 <a:solidFill>
                   <a:schemeClr val="accent4"/>
                 </a:solidFill>
@@ -5593,14 +6599,345 @@
       </p:sp>
       <p:sp>
         <p:nvSpPr>
-          <p:cNvPr id="3" name="points"/>
+          <p:cNvPr id="3" name="t1"/>
+          <p:cNvSpPr/>
+          <p:nvPr/>
+        </p:nvSpPr>
+        <p:spPr>
+          <a:xfrm>
+            <a:off x="548640" y="1280160"/>
+            <a:ext cx="1783080" cy="1371600"/>
+          </a:xfrm>
+          <a:prstGeom prst="roundRect">
+            <a:avLst>
+              <a:gd name="adj" fmla="val 6667"/>
+            </a:avLst>
+          </a:prstGeom>
+          <a:solidFill>
+            <a:schemeClr val="bg2"/>
+          </a:solidFill>
+          <a:ln/>
+        </p:spPr>
+      </p:sp>
+      <p:sp>
+        <p:nvSpPr>
+          <p:cNvPr id="4" name="t1-big"/>
           <p:cNvSpPr txBox="1"/>
           <p:nvPr/>
         </p:nvSpPr>
         <p:spPr>
           <a:xfrm>
-            <a:off x="548640" y="1280160"/>
-            <a:ext cx="5669280" cy="1280160"/>
+            <a:off x="548640" y="1389888"/>
+            <a:ext cx="1783080" cy="754380"/>
+          </a:xfrm>
+          <a:prstGeom prst="rect">
+            <a:avLst/>
+          </a:prstGeom>
+          <a:noFill/>
+          <a:ln/>
+        </p:spPr>
+        <p:txBody>
+          <a:bodyPr wrap="square" lIns="0" tIns="0" rIns="0" bIns="0" rtlCol="0" anchor="ctr"/>
+          <a:lstStyle/>
+          <a:p>
+            <a:pPr algn="ctr" indent="0" marL="0">
+              <a:buNone/>
+            </a:pPr>
+            <a:r>
+              <a:rPr lang="en-US" sz="3400" b="1" dirty="0">
+                <a:solidFill>
+                  <a:schemeClr val="tx2"/>
+                </a:solidFill>
+                <a:latin typeface="Cambria" pitchFamily="34" charset="0"/>
+                <a:ea typeface="Cambria" pitchFamily="34" charset="-122"/>
+                <a:cs typeface="Cambria" pitchFamily="34" charset="-120"/>
+              </a:rPr>
+              <a:t>200</a:t>
+            </a:r>
+            <a:endParaRPr lang="en-US" sz="3400" dirty="0"/>
+          </a:p>
+        </p:txBody>
+      </p:sp>
+      <p:sp>
+        <p:nvSpPr>
+          <p:cNvPr id="5" name="t1-small"/>
+          <p:cNvSpPr txBox="1"/>
+          <p:nvPr/>
+        </p:nvSpPr>
+        <p:spPr>
+          <a:xfrm>
+            <a:off x="640080" y="2103120"/>
+            <a:ext cx="1600200" cy="493776"/>
+          </a:xfrm>
+          <a:prstGeom prst="rect">
+            <a:avLst/>
+          </a:prstGeom>
+          <a:noFill/>
+          <a:ln/>
+        </p:spPr>
+        <p:txBody>
+          <a:bodyPr wrap="square" lIns="0" tIns="0" rIns="0" bIns="0" rtlCol="0" anchor="t"/>
+          <a:lstStyle/>
+          <a:p>
+            <a:pPr algn="ctr" indent="0" marL="0">
+              <a:buNone/>
+            </a:pPr>
+            <a:r>
+              <a:rPr lang="en-US" sz="1300" dirty="0">
+                <a:solidFill>
+                  <a:schemeClr val="tx1"/>
+                </a:solidFill>
+              </a:rPr>
+              <a:t>downloaded</a:t>
+            </a:r>
+            <a:endParaRPr lang="en-US" sz="1300" dirty="0"/>
+          </a:p>
+        </p:txBody>
+      </p:sp>
+      <p:sp>
+        <p:nvSpPr>
+          <p:cNvPr id="6" name="t-arrow-1"/>
+          <p:cNvSpPr/>
+          <p:nvPr/>
+        </p:nvSpPr>
+        <p:spPr>
+          <a:xfrm>
+            <a:off x="2395728" y="1828800"/>
+            <a:ext cx="274320" cy="274320"/>
+          </a:xfrm>
+          <a:prstGeom prst="rightArrow">
+            <a:avLst/>
+          </a:prstGeom>
+          <a:solidFill>
+            <a:schemeClr val="accent1"/>
+          </a:solidFill>
+          <a:ln/>
+        </p:spPr>
+      </p:sp>
+      <p:sp>
+        <p:nvSpPr>
+          <p:cNvPr id="7" name="t2"/>
+          <p:cNvSpPr/>
+          <p:nvPr/>
+        </p:nvSpPr>
+        <p:spPr>
+          <a:xfrm>
+            <a:off x="2743200" y="1280160"/>
+            <a:ext cx="1783080" cy="1371600"/>
+          </a:xfrm>
+          <a:prstGeom prst="roundRect">
+            <a:avLst>
+              <a:gd name="adj" fmla="val 6667"/>
+            </a:avLst>
+          </a:prstGeom>
+          <a:solidFill>
+            <a:schemeClr val="bg2"/>
+          </a:solidFill>
+          <a:ln/>
+        </p:spPr>
+      </p:sp>
+      <p:sp>
+        <p:nvSpPr>
+          <p:cNvPr id="8" name="t2-big"/>
+          <p:cNvSpPr txBox="1"/>
+          <p:nvPr/>
+        </p:nvSpPr>
+        <p:spPr>
+          <a:xfrm>
+            <a:off x="2743200" y="1389888"/>
+            <a:ext cx="1783080" cy="754380"/>
+          </a:xfrm>
+          <a:prstGeom prst="rect">
+            <a:avLst/>
+          </a:prstGeom>
+          <a:noFill/>
+          <a:ln/>
+        </p:spPr>
+        <p:txBody>
+          <a:bodyPr wrap="square" lIns="0" tIns="0" rIns="0" bIns="0" rtlCol="0" anchor="ctr"/>
+          <a:lstStyle/>
+          <a:p>
+            <a:pPr algn="ctr" indent="0" marL="0">
+              <a:buNone/>
+            </a:pPr>
+            <a:r>
+              <a:rPr lang="en-US" sz="3400" b="1" dirty="0">
+                <a:solidFill>
+                  <a:schemeClr val="tx2"/>
+                </a:solidFill>
+                <a:latin typeface="Cambria" pitchFamily="34" charset="0"/>
+                <a:ea typeface="Cambria" pitchFamily="34" charset="-122"/>
+                <a:cs typeface="Cambria" pitchFamily="34" charset="-120"/>
+              </a:rPr>
+              <a:t>134</a:t>
+            </a:r>
+            <a:endParaRPr lang="en-US" sz="3400" dirty="0"/>
+          </a:p>
+        </p:txBody>
+      </p:sp>
+      <p:sp>
+        <p:nvSpPr>
+          <p:cNvPr id="9" name="t2-small"/>
+          <p:cNvSpPr txBox="1"/>
+          <p:nvPr/>
+        </p:nvSpPr>
+        <p:spPr>
+          <a:xfrm>
+            <a:off x="2834640" y="2103120"/>
+            <a:ext cx="1600200" cy="493776"/>
+          </a:xfrm>
+          <a:prstGeom prst="rect">
+            <a:avLst/>
+          </a:prstGeom>
+          <a:noFill/>
+          <a:ln/>
+        </p:spPr>
+        <p:txBody>
+          <a:bodyPr wrap="square" lIns="0" tIns="0" rIns="0" bIns="0" rtlCol="0" anchor="t"/>
+          <a:lstStyle/>
+          <a:p>
+            <a:pPr algn="ctr" indent="0" marL="0">
+              <a:buNone/>
+            </a:pPr>
+            <a:r>
+              <a:rPr lang="en-US" sz="1300" dirty="0">
+                <a:solidFill>
+                  <a:schemeClr val="tx1"/>
+                </a:solidFill>
+              </a:rPr>
+              <a:t>after cleaning</a:t>
+            </a:r>
+            <a:endParaRPr lang="en-US" sz="1300" dirty="0"/>
+          </a:p>
+        </p:txBody>
+      </p:sp>
+      <p:sp>
+        <p:nvSpPr>
+          <p:cNvPr id="10" name="t-arrow-2"/>
+          <p:cNvSpPr/>
+          <p:nvPr/>
+        </p:nvSpPr>
+        <p:spPr>
+          <a:xfrm>
+            <a:off x="4590288" y="1828800"/>
+            <a:ext cx="274320" cy="274320"/>
+          </a:xfrm>
+          <a:prstGeom prst="rightArrow">
+            <a:avLst/>
+          </a:prstGeom>
+          <a:solidFill>
+            <a:schemeClr val="accent1"/>
+          </a:solidFill>
+          <a:ln/>
+        </p:spPr>
+      </p:sp>
+      <p:sp>
+        <p:nvSpPr>
+          <p:cNvPr id="11" name="t3"/>
+          <p:cNvSpPr/>
+          <p:nvPr/>
+        </p:nvSpPr>
+        <p:spPr>
+          <a:xfrm>
+            <a:off x="4937760" y="1280160"/>
+            <a:ext cx="1463040" cy="1371600"/>
+          </a:xfrm>
+          <a:prstGeom prst="roundRect">
+            <a:avLst>
+              <a:gd name="adj" fmla="val 6667"/>
+            </a:avLst>
+          </a:prstGeom>
+          <a:solidFill>
+            <a:schemeClr val="accent6"/>
+          </a:solidFill>
+          <a:ln/>
+        </p:spPr>
+      </p:sp>
+      <p:sp>
+        <p:nvSpPr>
+          <p:cNvPr id="12" name="t3-big"/>
+          <p:cNvSpPr txBox="1"/>
+          <p:nvPr/>
+        </p:nvSpPr>
+        <p:spPr>
+          <a:xfrm>
+            <a:off x="4937760" y="1389888"/>
+            <a:ext cx="1463040" cy="754380"/>
+          </a:xfrm>
+          <a:prstGeom prst="rect">
+            <a:avLst/>
+          </a:prstGeom>
+          <a:noFill/>
+          <a:ln/>
+        </p:spPr>
+        <p:txBody>
+          <a:bodyPr wrap="square" lIns="0" tIns="0" rIns="0" bIns="0" rtlCol="0" anchor="ctr"/>
+          <a:lstStyle/>
+          <a:p>
+            <a:pPr algn="ctr" indent="0" marL="0">
+              <a:buNone/>
+            </a:pPr>
+            <a:r>
+              <a:rPr lang="en-US" sz="3400" b="1" dirty="0">
+                <a:solidFill>
+                  <a:schemeClr val="accent2"/>
+                </a:solidFill>
+                <a:latin typeface="Cambria" pitchFamily="34" charset="0"/>
+                <a:ea typeface="Cambria" pitchFamily="34" charset="-122"/>
+                <a:cs typeface="Cambria" pitchFamily="34" charset="-120"/>
+              </a:rPr>
+              <a:t>122</a:t>
+            </a:r>
+            <a:endParaRPr lang="en-US" sz="3400" dirty="0"/>
+          </a:p>
+        </p:txBody>
+      </p:sp>
+      <p:sp>
+        <p:nvSpPr>
+          <p:cNvPr id="13" name="t3-small"/>
+          <p:cNvSpPr txBox="1"/>
+          <p:nvPr/>
+        </p:nvSpPr>
+        <p:spPr>
+          <a:xfrm>
+            <a:off x="5029200" y="2103120"/>
+            <a:ext cx="1280160" cy="493776"/>
+          </a:xfrm>
+          <a:prstGeom prst="rect">
+            <a:avLst/>
+          </a:prstGeom>
+          <a:noFill/>
+          <a:ln/>
+        </p:spPr>
+        <p:txBody>
+          <a:bodyPr wrap="square" lIns="0" tIns="0" rIns="0" bIns="0" rtlCol="0" anchor="t"/>
+          <a:lstStyle/>
+          <a:p>
+            <a:pPr algn="ctr" indent="0" marL="0">
+              <a:buNone/>
+            </a:pPr>
+            <a:r>
+              <a:rPr lang="en-US" sz="1300" dirty="0">
+                <a:solidFill>
+                  <a:schemeClr val="tx1"/>
+                </a:solidFill>
+              </a:rPr>
+              <a:t>training</a:t>
+            </a:r>
+            <a:endParaRPr lang="en-US" sz="1300" dirty="0"/>
+          </a:p>
+        </p:txBody>
+      </p:sp>
+      <p:sp>
+        <p:nvSpPr>
+          <p:cNvPr id="14" name="points"/>
+          <p:cNvSpPr txBox="1"/>
+          <p:nvPr/>
+        </p:nvSpPr>
+        <p:spPr>
+          <a:xfrm>
+            <a:off x="548640" y="2971800"/>
+            <a:ext cx="5852160" cy="3108960"/>
           </a:xfrm>
           <a:prstGeom prst="rect">
             <a:avLst/>
@@ -5620,14 +6957,14 @@
               <a:buChar char="•"/>
             </a:pPr>
             <a:r>
-              <a:rPr lang="en-US" sz="1800" dirty="0">
+              <a:rPr lang="en-US" sz="1600" dirty="0">
                 <a:solidFill>
                   <a:schemeClr val="tx1"/>
                 </a:solidFill>
               </a:rPr>
-              <a:t>Downloaded 200 Ravi Varma paintings from Wikimedia Commons (most are public domain).</a:t>
-            </a:r>
-            <a:endParaRPr lang="en-US" sz="1800" dirty="0"/>
+              <a:t>Downloaded from Wikimedia Commons (most are public domain).</a:t>
+            </a:r>
+            <a:endParaRPr lang="en-US" sz="1600" dirty="0"/>
           </a:p>
           <a:p>
             <a:pPr marL="342900" indent="-342900">
@@ -5638,104 +6975,15 @@
               <a:buChar char="•"/>
             </a:pPr>
             <a:r>
-              <a:rPr lang="en-US" sz="1800" dirty="0">
+              <a:rPr lang="en-US" sz="1600" dirty="0">
                 <a:solidFill>
                   <a:schemeClr val="tx1"/>
                 </a:solidFill>
               </a:rPr>
-              <a:t>Removed 66 images:</a:t>
-            </a:r>
-            <a:endParaRPr lang="en-US" sz="1800" dirty="0"/>
-          </a:p>
-        </p:txBody>
-      </p:sp>
-      <p:sp>
-        <p:nvSpPr>
-          <p:cNvPr id="4" name="removed-list"/>
-          <p:cNvSpPr txBox="1"/>
-          <p:nvPr/>
-        </p:nvSpPr>
-        <p:spPr>
-          <a:xfrm>
-            <a:off x="822960" y="2514600"/>
-            <a:ext cx="5394960" cy="1188720"/>
-          </a:xfrm>
-          <a:prstGeom prst="rect">
-            <a:avLst/>
-          </a:prstGeom>
-          <a:noFill/>
-          <a:ln/>
-        </p:spPr>
-        <p:txBody>
-          <a:bodyPr wrap="square" lIns="0" tIns="0" rIns="0" bIns="0" rtlCol="0" anchor="t"/>
-          <a:lstStyle/>
-          <a:p>
-            <a:pPr lvl="1" marL="457200" indent="-228600">
-              <a:buSzPct val="100000"/>
-              <a:buChar char="•"/>
-            </a:pPr>
-            <a:r>
-              <a:rPr lang="en-US" sz="1600" dirty="0">
-                <a:solidFill>
-                  <a:schemeClr val="tx1"/>
-                </a:solidFill>
-              </a:rPr>
-              <a:t>26 were low resolution (upscaled from very small originals)</a:t>
+              <a:t>Removed 26 low-resolution, 33 duplicate and 7 non-painting images.</a:t>
             </a:r>
             <a:endParaRPr lang="en-US" sz="1600" dirty="0"/>
           </a:p>
-          <a:p>
-            <a:pPr lvl="1" marL="457200" indent="-228600">
-              <a:buSzPct val="100000"/>
-              <a:buChar char="•"/>
-            </a:pPr>
-            <a:r>
-              <a:rPr lang="en-US" sz="1600" dirty="0">
-                <a:solidFill>
-                  <a:schemeClr val="tx1"/>
-                </a:solidFill>
-              </a:rPr>
-              <a:t>33 were duplicates of the same painting</a:t>
-            </a:r>
-            <a:endParaRPr lang="en-US" sz="1600" dirty="0"/>
-          </a:p>
-          <a:p>
-            <a:pPr lvl="1" marL="457200" indent="-228600">
-              <a:buSzPct val="100000"/>
-              <a:buChar char="•"/>
-            </a:pPr>
-            <a:r>
-              <a:rPr lang="en-US" sz="1600" dirty="0">
-                <a:solidFill>
-                  <a:schemeClr val="tx1"/>
-                </a:solidFill>
-              </a:rPr>
-              <a:t>7 were not paintings (stamps, museum photos, grids)</a:t>
-            </a:r>
-            <a:endParaRPr lang="en-US" sz="1600" dirty="0"/>
-          </a:p>
-        </p:txBody>
-      </p:sp>
-      <p:sp>
-        <p:nvSpPr>
-          <p:cNvPr id="5" name="points"/>
-          <p:cNvSpPr txBox="1"/>
-          <p:nvPr/>
-        </p:nvSpPr>
-        <p:spPr>
-          <a:xfrm>
-            <a:off x="548640" y="3840480"/>
-            <a:ext cx="5669280" cy="1828800"/>
-          </a:xfrm>
-          <a:prstGeom prst="rect">
-            <a:avLst/>
-          </a:prstGeom>
-          <a:noFill/>
-          <a:ln/>
-        </p:spPr>
-        <p:txBody>
-          <a:bodyPr wrap="square" lIns="0" tIns="0" rIns="0" bIns="0" rtlCol="0" anchor="t"/>
-          <a:lstStyle/>
           <a:p>
             <a:pPr marL="342900" indent="-342900">
               <a:spcAft>
@@ -5745,14 +6993,14 @@
               <a:buChar char="•"/>
             </a:pPr>
             <a:r>
-              <a:rPr lang="en-US" sz="1800" dirty="0">
+              <a:rPr lang="en-US" sz="1600" dirty="0">
                 <a:solidFill>
                   <a:schemeClr val="tx1"/>
                 </a:solidFill>
               </a:rPr>
-              <a:t>Final: 134 images, 122 for training and 12 kept aside for testing.</a:t>
-            </a:r>
-            <a:endParaRPr lang="en-US" sz="1800" dirty="0"/>
+              <a:t>12 images kept aside for testing.</a:t>
+            </a:r>
+            <a:endParaRPr lang="en-US" sz="1600" dirty="0"/>
           </a:p>
           <a:p>
             <a:pPr marL="342900" indent="-342900">
@@ -5763,20 +7011,20 @@
               <a:buChar char="•"/>
             </a:pPr>
             <a:r>
-              <a:rPr lang="en-US" sz="1800" dirty="0">
+              <a:rPr lang="en-US" sz="1600" dirty="0">
                 <a:solidFill>
                   <a:schemeClr val="tx1"/>
                 </a:solidFill>
               </a:rPr>
-              <a:t>Images resized without cutting off heads/feet (different sizes for portrait and landscape).</a:t>
-            </a:r>
-            <a:endParaRPr lang="en-US" sz="1800" dirty="0"/>
+              <a:t>Images resized without cutting off heads/feet.</a:t>
+            </a:r>
+            <a:endParaRPr lang="en-US" sz="1600" dirty="0"/>
           </a:p>
         </p:txBody>
       </p:sp>
       <p:pic>
         <p:nvPicPr>
-          <p:cNvPr id="6" name="dataset-images" descr="/private/tmp/claude-501/-Users-shashwatsahu-Desktop-the-next-ravi-varma/b50e4b20-09e3-45d0-8877-560ccb85868c/scratchpad/deck/assets/mosaic.jpg">    </p:cNvPr>
+          <p:cNvPr id="15" name="dataset-images" descr="/private/tmp/claude-501/-Users-shashwatsahu-Desktop-the-next-ravi-varma/b50e4b20-09e3-45d0-8877-560ccb85868c/scratchpad/deck/assets/mosaic.jpg">    </p:cNvPr>
           <p:cNvPicPr>
             <a:picLocks noChangeAspect="1"/>
           </p:cNvPicPr>
@@ -5790,24 +7038,31 @@
         </p:blipFill>
         <p:spPr>
           <a:xfrm>
-            <a:off x="6583680" y="1280160"/>
-            <a:ext cx="5029200" cy="2642616"/>
-          </a:xfrm>
-          <a:prstGeom prst="rect">
-            <a:avLst/>
-          </a:prstGeom>
+            <a:off x="6766560" y="1280160"/>
+            <a:ext cx="4846320" cy="2542032"/>
+          </a:xfrm>
+          <a:prstGeom prst="rect">
+            <a:avLst/>
+          </a:prstGeom>
+          <a:effectLst>
+            <a:outerShdw sx="100000" sy="100000" kx="0" ky="0" algn="bl" rotWithShape="0" blurRad="76200" dist="38100" dir="2700000">
+              <a:srgbClr val="000000">
+                <a:alpha val="28000"/>
+              </a:srgbClr>
+            </a:outerShdw>
+          </a:effectLst>
         </p:spPr>
       </p:pic>
       <p:sp>
         <p:nvSpPr>
-          <p:cNvPr id="7" name="caption"/>
+          <p:cNvPr id="16" name="caption"/>
           <p:cNvSpPr txBox="1"/>
           <p:nvPr/>
         </p:nvSpPr>
         <p:spPr>
           <a:xfrm>
-            <a:off x="6583680" y="3977640"/>
-            <a:ext cx="5029200" cy="274320"/>
+            <a:off x="6766560" y="3886200"/>
+            <a:ext cx="4846320" cy="274320"/>
           </a:xfrm>
           <a:prstGeom prst="rect">
             <a:avLst/>
@@ -5836,7 +7091,7 @@
       </p:sp>
       <p:pic>
         <p:nvPicPr>
-          <p:cNvPr id="8" name="removed-images" descr="/private/tmp/claude-501/-Users-shashwatsahu-Desktop-the-next-ravi-varma/b50e4b20-09e3-45d0-8877-560ccb85868c/scratchpad/deck/assets/excluded.jpg">    </p:cNvPr>
+          <p:cNvPr id="17" name="removed-images" descr="/private/tmp/claude-501/-Users-shashwatsahu-Desktop-the-next-ravi-varma/b50e4b20-09e3-45d0-8877-560ccb85868c/scratchpad/deck/assets/excluded.jpg">    </p:cNvPr>
           <p:cNvPicPr>
             <a:picLocks noChangeAspect="1"/>
           </p:cNvPicPr>
@@ -5850,24 +7105,31 @@
         </p:blipFill>
         <p:spPr>
           <a:xfrm>
-            <a:off x="6583680" y="4434840"/>
-            <a:ext cx="5029200" cy="1508760"/>
-          </a:xfrm>
-          <a:prstGeom prst="rect">
-            <a:avLst/>
-          </a:prstGeom>
+            <a:off x="6766560" y="4343400"/>
+            <a:ext cx="4846320" cy="1453896"/>
+          </a:xfrm>
+          <a:prstGeom prst="rect">
+            <a:avLst/>
+          </a:prstGeom>
+          <a:effectLst>
+            <a:outerShdw sx="100000" sy="100000" kx="0" ky="0" algn="bl" rotWithShape="0" blurRad="76200" dist="38100" dir="2700000">
+              <a:srgbClr val="000000">
+                <a:alpha val="28000"/>
+              </a:srgbClr>
+            </a:outerShdw>
+          </a:effectLst>
         </p:spPr>
       </p:pic>
       <p:sp>
         <p:nvSpPr>
-          <p:cNvPr id="9" name="caption"/>
+          <p:cNvPr id="18" name="caption"/>
           <p:cNvSpPr txBox="1"/>
           <p:nvPr/>
         </p:nvSpPr>
         <p:spPr>
           <a:xfrm>
-            <a:off x="6583680" y="5989320"/>
-            <a:ext cx="5029200" cy="274320"/>
+            <a:off x="6766560" y="5870448"/>
+            <a:ext cx="4846320" cy="274320"/>
           </a:xfrm>
           <a:prstGeom prst="rect">
             <a:avLst/>
@@ -5922,7 +7184,7 @@
           <a:bodyPr/>
           <a:lstStyle>
             <a:lvl1pPr>
-              <a:defRPr sz="1100">
+              <a:defRPr sz="1000">
                 <a:solidFill>
                   <a:schemeClr val="accent4"/>
                 </a:solidFill>
@@ -6024,6 +7286,13 @@
           <a:prstGeom prst="rect">
             <a:avLst/>
           </a:prstGeom>
+          <a:effectLst>
+            <a:outerShdw sx="100000" sy="100000" kx="0" ky="0" algn="bl" rotWithShape="0" blurRad="76200" dist="38100" dir="2700000">
+              <a:srgbClr val="000000">
+                <a:alpha val="28000"/>
+              </a:srgbClr>
+            </a:outerShdw>
+          </a:effectLst>
         </p:spPr>
       </p:pic>
       <p:sp>
@@ -6035,7 +7304,7 @@
         <p:spPr>
           <a:xfrm>
             <a:off x="3657600" y="1280160"/>
-            <a:ext cx="7955280" cy="3291840"/>
+            <a:ext cx="7955280" cy="3200400"/>
           </a:xfrm>
           <a:prstGeom prst="rect">
             <a:avLst/>
@@ -6055,14 +7324,14 @@
               <a:buChar char="•"/>
             </a:pPr>
             <a:r>
-              <a:rPr lang="en-US" sz="1800" dirty="0">
+              <a:rPr lang="en-US" sz="1700" dirty="0">
                 <a:solidFill>
                   <a:schemeClr val="tx1"/>
                 </a:solidFill>
               </a:rPr>
               <a:t>Each image needs a text caption for training.</a:t>
             </a:r>
-            <a:endParaRPr lang="en-US" sz="1800" dirty="0"/>
+            <a:endParaRPr lang="en-US" sz="1700" dirty="0"/>
           </a:p>
           <a:p>
             <a:pPr marL="342900" indent="-342900">
@@ -6073,14 +7342,14 @@
               <a:buChar char="•"/>
             </a:pPr>
             <a:r>
-              <a:rPr lang="en-US" sz="1800" dirty="0">
+              <a:rPr lang="en-US" sz="1700" dirty="0">
                 <a:solidFill>
                   <a:schemeClr val="tx1"/>
                 </a:solidFill>
               </a:rPr>
               <a:t>Used BLIP (an image captioning model) to describe the image and BLIP-VQA to answer fixed questions (clothing, jewellery, pose, setting, etc.).</a:t>
             </a:r>
-            <a:endParaRPr lang="en-US" sz="1800" dirty="0"/>
+            <a:endParaRPr lang="en-US" sz="1700" dirty="0"/>
           </a:p>
           <a:p>
             <a:pPr marL="342900" indent="-342900">
@@ -6091,14 +7360,14 @@
               <a:buChar char="•"/>
             </a:pPr>
             <a:r>
-              <a:rPr lang="en-US" sz="1800" dirty="0">
+              <a:rPr lang="en-US" sz="1700" dirty="0">
                 <a:solidFill>
                   <a:schemeClr val="tx1"/>
                 </a:solidFill>
               </a:rPr>
               <a:t>Wrong answers like "phone" were filtered out.</a:t>
             </a:r>
-            <a:endParaRPr lang="en-US" sz="1800" dirty="0"/>
+            <a:endParaRPr lang="en-US" sz="1700" dirty="0"/>
           </a:p>
           <a:p>
             <a:pPr marL="342900" indent="-342900">
@@ -6109,14 +7378,14 @@
               <a:buChar char="•"/>
             </a:pPr>
             <a:r>
-              <a:rPr lang="en-US" sz="1800" dirty="0">
+              <a:rPr lang="en-US" sz="1700" dirty="0">
                 <a:solidFill>
                   <a:schemeClr val="tx1"/>
                 </a:solidFill>
               </a:rPr>
               <a:t>Every caption starts with a trigger word &lt;rvvarma&gt; so the model links it to the style.</a:t>
             </a:r>
-            <a:endParaRPr lang="en-US" sz="1800" dirty="0"/>
+            <a:endParaRPr lang="en-US" sz="1700" dirty="0"/>
           </a:p>
         </p:txBody>
       </p:sp>
@@ -6128,14 +7397,16 @@
         </p:nvSpPr>
         <p:spPr>
           <a:xfrm>
-            <a:off x="3657600" y="4617720"/>
-            <a:ext cx="7955280" cy="1188720"/>
-          </a:xfrm>
-          <a:prstGeom prst="rect">
-            <a:avLst/>
+            <a:off x="3657600" y="4572000"/>
+            <a:ext cx="7955280" cy="1234440"/>
+          </a:xfrm>
+          <a:prstGeom prst="roundRect">
+            <a:avLst>
+              <a:gd name="adj" fmla="val 7407"/>
+            </a:avLst>
           </a:prstGeom>
           <a:solidFill>
-            <a:schemeClr val="bg2"/>
+            <a:schemeClr val="accent5"/>
           </a:solidFill>
           <a:ln/>
         </p:spPr>
@@ -6148,8 +7419,8 @@
         </p:nvSpPr>
         <p:spPr>
           <a:xfrm>
-            <a:off x="3840480" y="4709160"/>
-            <a:ext cx="7589520" cy="1005840"/>
+            <a:off x="3886200" y="4645152"/>
+            <a:ext cx="7498080" cy="1097280"/>
           </a:xfrm>
           <a:prstGeom prst="rect">
             <a:avLst/>
@@ -6165,18 +7436,19 @@
               <a:buNone/>
             </a:pPr>
             <a:r>
-              <a:rPr lang="en-US" sz="1500" b="1" dirty="0">
-                <a:solidFill>
-                  <a:schemeClr val="tx1"/>
-                </a:solidFill>
-              </a:rPr>
-              <a:t>Example caption: </a:t>
+              <a:rPr lang="en-US" sz="1400" b="1" dirty="0">
+                <a:solidFill>
+                  <a:schemeClr val="tx2"/>
+                </a:solidFill>
+              </a:rPr>
+              <a:t>Example caption
+</a:t>
             </a:r>
             <a:pPr indent="0" marL="0">
               <a:buNone/>
             </a:pPr>
             <a:r>
-              <a:rPr lang="en-US" sz="1500" dirty="0">
+              <a:rPr lang="en-US" sz="1500" i="1" dirty="0">
                 <a:solidFill>
                   <a:schemeClr val="tx1"/>
                 </a:solidFill>
@@ -6215,7 +7487,7 @@
           <a:bodyPr/>
           <a:lstStyle>
             <a:lvl1pPr>
-              <a:defRPr sz="1100">
+              <a:defRPr sz="1000">
                 <a:solidFill>
                   <a:schemeClr val="accent4"/>
                 </a:solidFill>
@@ -6297,14 +7569,333 @@
       </p:sp>
       <p:sp>
         <p:nvSpPr>
-          <p:cNvPr id="3" name="points"/>
+          <p:cNvPr id="3" name="train-0"/>
+          <p:cNvSpPr/>
+          <p:nvPr/>
+        </p:nvSpPr>
+        <p:spPr>
+          <a:xfrm>
+            <a:off x="548640" y="1280160"/>
+            <a:ext cx="1874520" cy="1463040"/>
+          </a:xfrm>
+          <a:prstGeom prst="roundRect">
+            <a:avLst>
+              <a:gd name="adj" fmla="val 6250"/>
+            </a:avLst>
+          </a:prstGeom>
+          <a:solidFill>
+            <a:schemeClr val="accent5"/>
+          </a:solidFill>
+          <a:ln/>
+        </p:spPr>
+      </p:sp>
+      <p:sp>
+        <p:nvSpPr>
+          <p:cNvPr id="4" name="train-0-big"/>
           <p:cNvSpPr txBox="1"/>
           <p:nvPr/>
         </p:nvSpPr>
         <p:spPr>
           <a:xfrm>
-            <a:off x="548640" y="1280160"/>
-            <a:ext cx="5852160" cy="4572000"/>
+            <a:off x="548640" y="1389888"/>
+            <a:ext cx="1874520" cy="804672"/>
+          </a:xfrm>
+          <a:prstGeom prst="rect">
+            <a:avLst/>
+          </a:prstGeom>
+          <a:noFill/>
+          <a:ln/>
+        </p:spPr>
+        <p:txBody>
+          <a:bodyPr wrap="square" lIns="0" tIns="0" rIns="0" bIns="0" rtlCol="0" anchor="ctr"/>
+          <a:lstStyle/>
+          <a:p>
+            <a:pPr algn="ctr" indent="0" marL="0">
+              <a:buNone/>
+            </a:pPr>
+            <a:r>
+              <a:rPr lang="en-US" sz="3400" b="1" dirty="0">
+                <a:solidFill>
+                  <a:schemeClr val="tx2"/>
+                </a:solidFill>
+                <a:latin typeface="Cambria" pitchFamily="34" charset="0"/>
+                <a:ea typeface="Cambria" pitchFamily="34" charset="-122"/>
+                <a:cs typeface="Cambria" pitchFamily="34" charset="-120"/>
+              </a:rPr>
+              <a:t>3.2M</a:t>
+            </a:r>
+            <a:endParaRPr lang="en-US" sz="3400" dirty="0"/>
+          </a:p>
+        </p:txBody>
+      </p:sp>
+      <p:sp>
+        <p:nvSpPr>
+          <p:cNvPr id="5" name="train-0-small"/>
+          <p:cNvSpPr txBox="1"/>
+          <p:nvPr/>
+        </p:nvSpPr>
+        <p:spPr>
+          <a:xfrm>
+            <a:off x="640080" y="2157984"/>
+            <a:ext cx="1691640" cy="526694"/>
+          </a:xfrm>
+          <a:prstGeom prst="rect">
+            <a:avLst/>
+          </a:prstGeom>
+          <a:noFill/>
+          <a:ln/>
+        </p:spPr>
+        <p:txBody>
+          <a:bodyPr wrap="square" lIns="0" tIns="0" rIns="0" bIns="0" rtlCol="0" anchor="t"/>
+          <a:lstStyle/>
+          <a:p>
+            <a:pPr algn="ctr" indent="0" marL="0">
+              <a:buNone/>
+            </a:pPr>
+            <a:r>
+              <a:rPr lang="en-US" sz="1300" dirty="0">
+                <a:solidFill>
+                  <a:schemeClr val="tx1"/>
+                </a:solidFill>
+              </a:rPr>
+              <a:t>parameters trained</a:t>
+            </a:r>
+            <a:endParaRPr lang="en-US" sz="1300" dirty="0"/>
+          </a:p>
+          <a:p>
+            <a:pPr algn="ctr" indent="0" marL="0">
+              <a:buNone/>
+            </a:pPr>
+            <a:r>
+              <a:rPr lang="en-US" sz="1300" dirty="0">
+                <a:solidFill>
+                  <a:schemeClr val="tx1"/>
+                </a:solidFill>
+              </a:rPr>
+              <a:t>(0.37% of the model)</a:t>
+            </a:r>
+            <a:endParaRPr lang="en-US" sz="1300" dirty="0"/>
+          </a:p>
+        </p:txBody>
+      </p:sp>
+      <p:sp>
+        <p:nvSpPr>
+          <p:cNvPr id="6" name="train-1"/>
+          <p:cNvSpPr/>
+          <p:nvPr/>
+        </p:nvSpPr>
+        <p:spPr>
+          <a:xfrm>
+            <a:off x="2606040" y="1280160"/>
+            <a:ext cx="1874520" cy="1463040"/>
+          </a:xfrm>
+          <a:prstGeom prst="roundRect">
+            <a:avLst>
+              <a:gd name="adj" fmla="val 6250"/>
+            </a:avLst>
+          </a:prstGeom>
+          <a:solidFill>
+            <a:schemeClr val="accent5"/>
+          </a:solidFill>
+          <a:ln/>
+        </p:spPr>
+      </p:sp>
+      <p:sp>
+        <p:nvSpPr>
+          <p:cNvPr id="7" name="train-1-big"/>
+          <p:cNvSpPr txBox="1"/>
+          <p:nvPr/>
+        </p:nvSpPr>
+        <p:spPr>
+          <a:xfrm>
+            <a:off x="2606040" y="1389888"/>
+            <a:ext cx="1874520" cy="804672"/>
+          </a:xfrm>
+          <a:prstGeom prst="rect">
+            <a:avLst/>
+          </a:prstGeom>
+          <a:noFill/>
+          <a:ln/>
+        </p:spPr>
+        <p:txBody>
+          <a:bodyPr wrap="square" lIns="0" tIns="0" rIns="0" bIns="0" rtlCol="0" anchor="ctr"/>
+          <a:lstStyle/>
+          <a:p>
+            <a:pPr algn="ctr" indent="0" marL="0">
+              <a:buNone/>
+            </a:pPr>
+            <a:r>
+              <a:rPr lang="en-US" sz="3400" b="1" dirty="0">
+                <a:solidFill>
+                  <a:schemeClr val="tx2"/>
+                </a:solidFill>
+                <a:latin typeface="Cambria" pitchFamily="34" charset="0"/>
+                <a:ea typeface="Cambria" pitchFamily="34" charset="-122"/>
+                <a:cs typeface="Cambria" pitchFamily="34" charset="-120"/>
+              </a:rPr>
+              <a:t>~1 hr</a:t>
+            </a:r>
+            <a:endParaRPr lang="en-US" sz="3400" dirty="0"/>
+          </a:p>
+        </p:txBody>
+      </p:sp>
+      <p:sp>
+        <p:nvSpPr>
+          <p:cNvPr id="8" name="train-1-small"/>
+          <p:cNvSpPr txBox="1"/>
+          <p:nvPr/>
+        </p:nvSpPr>
+        <p:spPr>
+          <a:xfrm>
+            <a:off x="2697480" y="2157984"/>
+            <a:ext cx="1691640" cy="526694"/>
+          </a:xfrm>
+          <a:prstGeom prst="rect">
+            <a:avLst/>
+          </a:prstGeom>
+          <a:noFill/>
+          <a:ln/>
+        </p:spPr>
+        <p:txBody>
+          <a:bodyPr wrap="square" lIns="0" tIns="0" rIns="0" bIns="0" rtlCol="0" anchor="t"/>
+          <a:lstStyle/>
+          <a:p>
+            <a:pPr algn="ctr" indent="0" marL="0">
+              <a:buNone/>
+            </a:pPr>
+            <a:r>
+              <a:rPr lang="en-US" sz="1300" dirty="0">
+                <a:solidFill>
+                  <a:schemeClr val="tx1"/>
+                </a:solidFill>
+              </a:rPr>
+              <a:t>on Google Colab</a:t>
+            </a:r>
+            <a:endParaRPr lang="en-US" sz="1300" dirty="0"/>
+          </a:p>
+          <a:p>
+            <a:pPr algn="ctr" indent="0" marL="0">
+              <a:buNone/>
+            </a:pPr>
+            <a:r>
+              <a:rPr lang="en-US" sz="1300" dirty="0">
+                <a:solidFill>
+                  <a:schemeClr val="tx1"/>
+                </a:solidFill>
+              </a:rPr>
+              <a:t>(T4 GPU)</a:t>
+            </a:r>
+            <a:endParaRPr lang="en-US" sz="1300" dirty="0"/>
+          </a:p>
+        </p:txBody>
+      </p:sp>
+      <p:sp>
+        <p:nvSpPr>
+          <p:cNvPr id="9" name="train-2"/>
+          <p:cNvSpPr/>
+          <p:nvPr/>
+        </p:nvSpPr>
+        <p:spPr>
+          <a:xfrm>
+            <a:off x="4663440" y="1280160"/>
+            <a:ext cx="1874520" cy="1463040"/>
+          </a:xfrm>
+          <a:prstGeom prst="roundRect">
+            <a:avLst>
+              <a:gd name="adj" fmla="val 6250"/>
+            </a:avLst>
+          </a:prstGeom>
+          <a:solidFill>
+            <a:schemeClr val="accent5"/>
+          </a:solidFill>
+          <a:ln/>
+        </p:spPr>
+      </p:sp>
+      <p:sp>
+        <p:nvSpPr>
+          <p:cNvPr id="10" name="train-2-big"/>
+          <p:cNvSpPr txBox="1"/>
+          <p:nvPr/>
+        </p:nvSpPr>
+        <p:spPr>
+          <a:xfrm>
+            <a:off x="4663440" y="1389888"/>
+            <a:ext cx="1874520" cy="804672"/>
+          </a:xfrm>
+          <a:prstGeom prst="rect">
+            <a:avLst/>
+          </a:prstGeom>
+          <a:noFill/>
+          <a:ln/>
+        </p:spPr>
+        <p:txBody>
+          <a:bodyPr wrap="square" lIns="0" tIns="0" rIns="0" bIns="0" rtlCol="0" anchor="ctr"/>
+          <a:lstStyle/>
+          <a:p>
+            <a:pPr algn="ctr" indent="0" marL="0">
+              <a:buNone/>
+            </a:pPr>
+            <a:r>
+              <a:rPr lang="en-US" sz="3400" b="1" dirty="0">
+                <a:solidFill>
+                  <a:schemeClr val="tx2"/>
+                </a:solidFill>
+                <a:latin typeface="Cambria" pitchFamily="34" charset="0"/>
+                <a:ea typeface="Cambria" pitchFamily="34" charset="-122"/>
+                <a:cs typeface="Cambria" pitchFamily="34" charset="-120"/>
+              </a:rPr>
+              <a:t>1500</a:t>
+            </a:r>
+            <a:endParaRPr lang="en-US" sz="3400" dirty="0"/>
+          </a:p>
+        </p:txBody>
+      </p:sp>
+      <p:sp>
+        <p:nvSpPr>
+          <p:cNvPr id="11" name="train-2-small"/>
+          <p:cNvSpPr txBox="1"/>
+          <p:nvPr/>
+        </p:nvSpPr>
+        <p:spPr>
+          <a:xfrm>
+            <a:off x="4754880" y="2157984"/>
+            <a:ext cx="1691640" cy="526694"/>
+          </a:xfrm>
+          <a:prstGeom prst="rect">
+            <a:avLst/>
+          </a:prstGeom>
+          <a:noFill/>
+          <a:ln/>
+        </p:spPr>
+        <p:txBody>
+          <a:bodyPr wrap="square" lIns="0" tIns="0" rIns="0" bIns="0" rtlCol="0" anchor="t"/>
+          <a:lstStyle/>
+          <a:p>
+            <a:pPr algn="ctr" indent="0" marL="0">
+              <a:buNone/>
+            </a:pPr>
+            <a:r>
+              <a:rPr lang="en-US" sz="1300" dirty="0">
+                <a:solidFill>
+                  <a:schemeClr val="tx1"/>
+                </a:solidFill>
+              </a:rPr>
+              <a:t>training steps</a:t>
+            </a:r>
+            <a:endParaRPr lang="en-US" sz="1300" dirty="0"/>
+          </a:p>
+        </p:txBody>
+      </p:sp>
+      <p:sp>
+        <p:nvSpPr>
+          <p:cNvPr id="12" name="points"/>
+          <p:cNvSpPr txBox="1"/>
+          <p:nvPr/>
+        </p:nvSpPr>
+        <p:spPr>
+          <a:xfrm>
+            <a:off x="548640" y="3108960"/>
+            <a:ext cx="6035040" cy="2743200"/>
           </a:xfrm>
           <a:prstGeom prst="rect">
             <a:avLst/>
@@ -6324,14 +7915,14 @@
               <a:buChar char="•"/>
             </a:pPr>
             <a:r>
-              <a:rPr lang="en-US" sz="1800" dirty="0">
+              <a:rPr lang="en-US" sz="1700" dirty="0">
                 <a:solidFill>
                   <a:schemeClr val="tx1"/>
                 </a:solidFill>
               </a:rPr>
               <a:t>LoRA trains only a small number of extra weights; the original Stable Diffusion model is not changed.</a:t>
             </a:r>
-            <a:endParaRPr lang="en-US" sz="1800" dirty="0"/>
+            <a:endParaRPr lang="en-US" sz="1700" dirty="0"/>
           </a:p>
           <a:p>
             <a:pPr marL="342900" indent="-342900">
@@ -6342,50 +7933,14 @@
               <a:buChar char="•"/>
             </a:pPr>
             <a:r>
-              <a:rPr lang="en-US" sz="1800" dirty="0">
+              <a:rPr lang="en-US" sz="1700" dirty="0">
                 <a:solidFill>
                   <a:schemeClr val="tx1"/>
                 </a:solidFill>
               </a:rPr>
-              <a:t>Only 3.2 million parameters are trained (0.37% of the model).</a:t>
-            </a:r>
-            <a:endParaRPr lang="en-US" sz="1800" dirty="0"/>
-          </a:p>
-          <a:p>
-            <a:pPr marL="342900" indent="-342900">
-              <a:spcAft>
-                <a:spcPts val="1000"/>
-              </a:spcAft>
-              <a:buSzPct val="100000"/>
-              <a:buChar char="•"/>
-            </a:pPr>
-            <a:r>
-              <a:rPr lang="en-US" sz="1800" dirty="0">
-                <a:solidFill>
-                  <a:schemeClr val="tx1"/>
-                </a:solidFill>
-              </a:rPr>
-              <a:t>Trained on Google Colab with a T4 GPU, took about 1 hour for 1500 steps.</a:t>
-            </a:r>
-            <a:endParaRPr lang="en-US" sz="1800" dirty="0"/>
-          </a:p>
-          <a:p>
-            <a:pPr marL="342900" indent="-342900">
-              <a:spcAft>
-                <a:spcPts val="1000"/>
-              </a:spcAft>
-              <a:buSzPct val="100000"/>
-              <a:buChar char="•"/>
-            </a:pPr>
-            <a:r>
-              <a:rPr lang="en-US" sz="1800" dirty="0">
-                <a:solidFill>
-                  <a:schemeClr val="tx1"/>
-                </a:solidFill>
-              </a:rPr>
               <a:t>Saved a checkpoint every 250 steps and generated test images to track progress.</a:t>
             </a:r>
-            <a:endParaRPr lang="en-US" sz="1800" dirty="0"/>
+            <a:endParaRPr lang="en-US" sz="1700" dirty="0"/>
           </a:p>
         </p:txBody>
       </p:sp>
@@ -6404,18 +7959,18 @@
           </p:nvPr>
         </p:nvGraphicFramePr>
         <p:xfrm>
-          <a:off x="6858000" y="1371600"/>
-          <a:ext cx="4754880" cy="914400"/>
+          <a:off x="6949440" y="1280160"/>
+          <a:ext cx="4663440" cy="914400"/>
         </p:xfrm>
         <a:graphic>
           <a:graphicData uri="http://schemas.openxmlformats.org/drawingml/2006/table">
             <a:tbl>
               <a:tblPr/>
               <a:tblGrid>
-                <a:gridCol w="2011680"/>
+                <a:gridCol w="1920240"/>
                 <a:gridCol w="2743200"/>
               </a:tblGrid>
-              <a:tr h="502920">
+              <a:tr h="566928">
                 <a:tc>
                   <a:txBody>
                     <a:bodyPr/>
@@ -6425,47 +7980,47 @@
                         <a:buNone/>
                       </a:pPr>
                       <a:r>
-                        <a:rPr lang="en-US" sz="1600" b="1" dirty="0">
+                        <a:rPr lang="en-US" sz="1500" b="1" dirty="0">
                           <a:solidFill>
                             <a:schemeClr val="bg1"/>
                           </a:solidFill>
                         </a:rPr>
                         <a:t>Parameter</a:t>
                       </a:r>
-                      <a:endParaRPr lang="en-US" sz="1600" dirty="0"/>
+                      <a:endParaRPr lang="en-US" sz="1500" dirty="0"/>
                     </a:p>
                   </a:txBody>
                   <a:tcPr marL="91440" marR="91440" marT="45720" marB="45720" anchor="ctr">
-                    <a:lnL w="12700" cap="flat" cmpd="sng" algn="ctr">
+                    <a:lnL w="25400" cap="flat" cmpd="sng" algn="ctr">
                       <a:solidFill>
-                        <a:srgbClr val="D9D9D9"/>
+                        <a:srgbClr val="FFFFFF"/>
                       </a:solidFill>
                       <a:prstDash val="solid"/>
                       <a:round/>
                       <a:headEnd type="none" w="med" len="med"/>
                       <a:tailEnd type="none" w="med" len="med"/>
                     </a:lnL>
-                    <a:lnR w="12700" cap="flat" cmpd="sng" algn="ctr">
+                    <a:lnR w="25400" cap="flat" cmpd="sng" algn="ctr">
                       <a:solidFill>
-                        <a:srgbClr val="D9D9D9"/>
+                        <a:srgbClr val="FFFFFF"/>
                       </a:solidFill>
                       <a:prstDash val="solid"/>
                       <a:round/>
                       <a:headEnd type="none" w="med" len="med"/>
                       <a:tailEnd type="none" w="med" len="med"/>
                     </a:lnR>
-                    <a:lnT w="12700" cap="flat" cmpd="sng" algn="ctr">
+                    <a:lnT w="25400" cap="flat" cmpd="sng" algn="ctr">
                       <a:solidFill>
-                        <a:srgbClr val="D9D9D9"/>
+                        <a:srgbClr val="FFFFFF"/>
                       </a:solidFill>
                       <a:prstDash val="solid"/>
                       <a:round/>
                       <a:headEnd type="none" w="med" len="med"/>
                       <a:tailEnd type="none" w="med" len="med"/>
                     </a:lnT>
-                    <a:lnB w="12700" cap="flat" cmpd="sng" algn="ctr">
+                    <a:lnB w="25400" cap="flat" cmpd="sng" algn="ctr">
                       <a:solidFill>
-                        <a:srgbClr val="D9D9D9"/>
+                        <a:srgbClr val="FFFFFF"/>
                       </a:solidFill>
                       <a:prstDash val="solid"/>
                       <a:round/>
@@ -6486,47 +8041,47 @@
                         <a:buNone/>
                       </a:pPr>
                       <a:r>
-                        <a:rPr lang="en-US" sz="1600" b="1" dirty="0">
+                        <a:rPr lang="en-US" sz="1500" b="1" dirty="0">
                           <a:solidFill>
                             <a:schemeClr val="bg1"/>
                           </a:solidFill>
                         </a:rPr>
                         <a:t>Value</a:t>
                       </a:r>
-                      <a:endParaRPr lang="en-US" sz="1600" dirty="0"/>
+                      <a:endParaRPr lang="en-US" sz="1500" dirty="0"/>
                     </a:p>
                   </a:txBody>
                   <a:tcPr marL="91440" marR="91440" marT="45720" marB="45720" anchor="ctr">
-                    <a:lnL w="12700" cap="flat" cmpd="sng" algn="ctr">
+                    <a:lnL w="25400" cap="flat" cmpd="sng" algn="ctr">
                       <a:solidFill>
-                        <a:srgbClr val="D9D9D9"/>
+                        <a:srgbClr val="FFFFFF"/>
                       </a:solidFill>
                       <a:prstDash val="solid"/>
                       <a:round/>
                       <a:headEnd type="none" w="med" len="med"/>
                       <a:tailEnd type="none" w="med" len="med"/>
                     </a:lnL>
-                    <a:lnR w="12700" cap="flat" cmpd="sng" algn="ctr">
+                    <a:lnR w="25400" cap="flat" cmpd="sng" algn="ctr">
                       <a:solidFill>
-                        <a:srgbClr val="D9D9D9"/>
+                        <a:srgbClr val="FFFFFF"/>
                       </a:solidFill>
                       <a:prstDash val="solid"/>
                       <a:round/>
                       <a:headEnd type="none" w="med" len="med"/>
                       <a:tailEnd type="none" w="med" len="med"/>
                     </a:lnR>
-                    <a:lnT w="12700" cap="flat" cmpd="sng" algn="ctr">
+                    <a:lnT w="25400" cap="flat" cmpd="sng" algn="ctr">
                       <a:solidFill>
-                        <a:srgbClr val="D9D9D9"/>
+                        <a:srgbClr val="FFFFFF"/>
                       </a:solidFill>
                       <a:prstDash val="solid"/>
                       <a:round/>
                       <a:headEnd type="none" w="med" len="med"/>
                       <a:tailEnd type="none" w="med" len="med"/>
                     </a:lnT>
-                    <a:lnB w="12700" cap="flat" cmpd="sng" algn="ctr">
+                    <a:lnB w="25400" cap="flat" cmpd="sng" algn="ctr">
                       <a:solidFill>
-                        <a:srgbClr val="D9D9D9"/>
+                        <a:srgbClr val="FFFFFF"/>
                       </a:solidFill>
                       <a:prstDash val="solid"/>
                       <a:round/>
@@ -6539,7 +8094,7 @@
                   </a:tcPr>
                 </a:tc>
               </a:tr>
-              <a:tr h="502920">
+              <a:tr h="566928">
                 <a:tc>
                   <a:txBody>
                     <a:bodyPr/>
@@ -6549,53 +8104,56 @@
                         <a:buNone/>
                       </a:pPr>
                       <a:r>
-                        <a:rPr lang="en-US" sz="1600" dirty="0">
+                        <a:rPr lang="en-US" sz="1500" dirty="0">
                           <a:solidFill>
                             <a:schemeClr val="tx1"/>
                           </a:solidFill>
                         </a:rPr>
                         <a:t>Base model</a:t>
                       </a:r>
-                      <a:endParaRPr lang="en-US" sz="1600" dirty="0"/>
+                      <a:endParaRPr lang="en-US" sz="1500" dirty="0"/>
                     </a:p>
                   </a:txBody>
                   <a:tcPr marL="91440" marR="91440" marT="45720" marB="45720" anchor="ctr">
-                    <a:lnL w="12700" cap="flat" cmpd="sng" algn="ctr">
+                    <a:lnL w="25400" cap="flat" cmpd="sng" algn="ctr">
                       <a:solidFill>
-                        <a:srgbClr val="D9D9D9"/>
+                        <a:srgbClr val="FFFFFF"/>
                       </a:solidFill>
                       <a:prstDash val="solid"/>
                       <a:round/>
                       <a:headEnd type="none" w="med" len="med"/>
                       <a:tailEnd type="none" w="med" len="med"/>
                     </a:lnL>
-                    <a:lnR w="12700" cap="flat" cmpd="sng" algn="ctr">
+                    <a:lnR w="25400" cap="flat" cmpd="sng" algn="ctr">
                       <a:solidFill>
-                        <a:srgbClr val="D9D9D9"/>
+                        <a:srgbClr val="FFFFFF"/>
                       </a:solidFill>
                       <a:prstDash val="solid"/>
                       <a:round/>
                       <a:headEnd type="none" w="med" len="med"/>
                       <a:tailEnd type="none" w="med" len="med"/>
                     </a:lnR>
-                    <a:lnT w="12700" cap="flat" cmpd="sng" algn="ctr">
+                    <a:lnT w="25400" cap="flat" cmpd="sng" algn="ctr">
                       <a:solidFill>
-                        <a:srgbClr val="D9D9D9"/>
+                        <a:srgbClr val="FFFFFF"/>
                       </a:solidFill>
                       <a:prstDash val="solid"/>
                       <a:round/>
                       <a:headEnd type="none" w="med" len="med"/>
                       <a:tailEnd type="none" w="med" len="med"/>
                     </a:lnT>
-                    <a:lnB w="12700" cap="flat" cmpd="sng" algn="ctr">
+                    <a:lnB w="25400" cap="flat" cmpd="sng" algn="ctr">
                       <a:solidFill>
-                        <a:srgbClr val="D9D9D9"/>
+                        <a:srgbClr val="FFFFFF"/>
                       </a:solidFill>
                       <a:prstDash val="solid"/>
                       <a:round/>
                       <a:headEnd type="none" w="med" len="med"/>
                       <a:tailEnd type="none" w="med" len="med"/>
                     </a:lnB>
+                    <a:solidFill>
+                      <a:schemeClr val="bg2"/>
+                    </a:solidFill>
                   </a:tcPr>
                 </a:tc>
                 <a:tc>
@@ -6607,57 +8165,60 @@
                         <a:buNone/>
                       </a:pPr>
                       <a:r>
-                        <a:rPr lang="en-US" sz="1600" dirty="0">
+                        <a:rPr lang="en-US" sz="1500" dirty="0">
                           <a:solidFill>
                             <a:schemeClr val="tx1"/>
                           </a:solidFill>
                         </a:rPr>
                         <a:t>Stable Diffusion 1.5</a:t>
                       </a:r>
-                      <a:endParaRPr lang="en-US" sz="1600" dirty="0"/>
+                      <a:endParaRPr lang="en-US" sz="1500" dirty="0"/>
                     </a:p>
                   </a:txBody>
                   <a:tcPr marL="91440" marR="91440" marT="45720" marB="45720" anchor="ctr">
-                    <a:lnL w="12700" cap="flat" cmpd="sng" algn="ctr">
+                    <a:lnL w="25400" cap="flat" cmpd="sng" algn="ctr">
                       <a:solidFill>
-                        <a:srgbClr val="D9D9D9"/>
+                        <a:srgbClr val="FFFFFF"/>
                       </a:solidFill>
                       <a:prstDash val="solid"/>
                       <a:round/>
                       <a:headEnd type="none" w="med" len="med"/>
                       <a:tailEnd type="none" w="med" len="med"/>
                     </a:lnL>
-                    <a:lnR w="12700" cap="flat" cmpd="sng" algn="ctr">
+                    <a:lnR w="25400" cap="flat" cmpd="sng" algn="ctr">
                       <a:solidFill>
-                        <a:srgbClr val="D9D9D9"/>
+                        <a:srgbClr val="FFFFFF"/>
                       </a:solidFill>
                       <a:prstDash val="solid"/>
                       <a:round/>
                       <a:headEnd type="none" w="med" len="med"/>
                       <a:tailEnd type="none" w="med" len="med"/>
                     </a:lnR>
-                    <a:lnT w="12700" cap="flat" cmpd="sng" algn="ctr">
+                    <a:lnT w="25400" cap="flat" cmpd="sng" algn="ctr">
                       <a:solidFill>
-                        <a:srgbClr val="D9D9D9"/>
+                        <a:srgbClr val="FFFFFF"/>
                       </a:solidFill>
                       <a:prstDash val="solid"/>
                       <a:round/>
                       <a:headEnd type="none" w="med" len="med"/>
                       <a:tailEnd type="none" w="med" len="med"/>
                     </a:lnT>
-                    <a:lnB w="12700" cap="flat" cmpd="sng" algn="ctr">
+                    <a:lnB w="25400" cap="flat" cmpd="sng" algn="ctr">
                       <a:solidFill>
-                        <a:srgbClr val="D9D9D9"/>
+                        <a:srgbClr val="FFFFFF"/>
                       </a:solidFill>
                       <a:prstDash val="solid"/>
                       <a:round/>
                       <a:headEnd type="none" w="med" len="med"/>
                       <a:tailEnd type="none" w="med" len="med"/>
                     </a:lnB>
+                    <a:solidFill>
+                      <a:schemeClr val="bg2"/>
+                    </a:solidFill>
                   </a:tcPr>
                 </a:tc>
               </a:tr>
-              <a:tr h="502920">
+              <a:tr h="566928">
                 <a:tc>
                   <a:txBody>
                     <a:bodyPr/>
@@ -6667,53 +8228,56 @@
                         <a:buNone/>
                       </a:pPr>
                       <a:r>
-                        <a:rPr lang="en-US" sz="1600" dirty="0">
+                        <a:rPr lang="en-US" sz="1500" dirty="0">
                           <a:solidFill>
                             <a:schemeClr val="tx1"/>
                           </a:solidFill>
                         </a:rPr>
                         <a:t>LoRA rank / alpha</a:t>
                       </a:r>
-                      <a:endParaRPr lang="en-US" sz="1600" dirty="0"/>
+                      <a:endParaRPr lang="en-US" sz="1500" dirty="0"/>
                     </a:p>
                   </a:txBody>
                   <a:tcPr marL="91440" marR="91440" marT="45720" marB="45720" anchor="ctr">
-                    <a:lnL w="12700" cap="flat" cmpd="sng" algn="ctr">
+                    <a:lnL w="25400" cap="flat" cmpd="sng" algn="ctr">
                       <a:solidFill>
-                        <a:srgbClr val="D9D9D9"/>
+                        <a:srgbClr val="FFFFFF"/>
                       </a:solidFill>
                       <a:prstDash val="solid"/>
                       <a:round/>
                       <a:headEnd type="none" w="med" len="med"/>
                       <a:tailEnd type="none" w="med" len="med"/>
                     </a:lnL>
-                    <a:lnR w="12700" cap="flat" cmpd="sng" algn="ctr">
+                    <a:lnR w="25400" cap="flat" cmpd="sng" algn="ctr">
                       <a:solidFill>
-                        <a:srgbClr val="D9D9D9"/>
+                        <a:srgbClr val="FFFFFF"/>
                       </a:solidFill>
                       <a:prstDash val="solid"/>
                       <a:round/>
                       <a:headEnd type="none" w="med" len="med"/>
                       <a:tailEnd type="none" w="med" len="med"/>
                     </a:lnR>
-                    <a:lnT w="12700" cap="flat" cmpd="sng" algn="ctr">
+                    <a:lnT w="25400" cap="flat" cmpd="sng" algn="ctr">
                       <a:solidFill>
-                        <a:srgbClr val="D9D9D9"/>
+                        <a:srgbClr val="FFFFFF"/>
                       </a:solidFill>
                       <a:prstDash val="solid"/>
                       <a:round/>
                       <a:headEnd type="none" w="med" len="med"/>
                       <a:tailEnd type="none" w="med" len="med"/>
                     </a:lnT>
-                    <a:lnB w="12700" cap="flat" cmpd="sng" algn="ctr">
+                    <a:lnB w="25400" cap="flat" cmpd="sng" algn="ctr">
                       <a:solidFill>
-                        <a:srgbClr val="D9D9D9"/>
+                        <a:srgbClr val="FFFFFF"/>
                       </a:solidFill>
                       <a:prstDash val="solid"/>
                       <a:round/>
                       <a:headEnd type="none" w="med" len="med"/>
                       <a:tailEnd type="none" w="med" len="med"/>
                     </a:lnB>
+                    <a:solidFill>
+                      <a:schemeClr val="bg2"/>
+                    </a:solidFill>
                   </a:tcPr>
                 </a:tc>
                 <a:tc>
@@ -6725,57 +8289,60 @@
                         <a:buNone/>
                       </a:pPr>
                       <a:r>
-                        <a:rPr lang="en-US" sz="1600" dirty="0">
+                        <a:rPr lang="en-US" sz="1500" dirty="0">
                           <a:solidFill>
                             <a:schemeClr val="tx1"/>
                           </a:solidFill>
                         </a:rPr>
                         <a:t>16 / 16</a:t>
                       </a:r>
-                      <a:endParaRPr lang="en-US" sz="1600" dirty="0"/>
+                      <a:endParaRPr lang="en-US" sz="1500" dirty="0"/>
                     </a:p>
                   </a:txBody>
                   <a:tcPr marL="91440" marR="91440" marT="45720" marB="45720" anchor="ctr">
-                    <a:lnL w="12700" cap="flat" cmpd="sng" algn="ctr">
+                    <a:lnL w="25400" cap="flat" cmpd="sng" algn="ctr">
                       <a:solidFill>
-                        <a:srgbClr val="D9D9D9"/>
+                        <a:srgbClr val="FFFFFF"/>
                       </a:solidFill>
                       <a:prstDash val="solid"/>
                       <a:round/>
                       <a:headEnd type="none" w="med" len="med"/>
                       <a:tailEnd type="none" w="med" len="med"/>
                     </a:lnL>
-                    <a:lnR w="12700" cap="flat" cmpd="sng" algn="ctr">
+                    <a:lnR w="25400" cap="flat" cmpd="sng" algn="ctr">
                       <a:solidFill>
-                        <a:srgbClr val="D9D9D9"/>
+                        <a:srgbClr val="FFFFFF"/>
                       </a:solidFill>
                       <a:prstDash val="solid"/>
                       <a:round/>
                       <a:headEnd type="none" w="med" len="med"/>
                       <a:tailEnd type="none" w="med" len="med"/>
                     </a:lnR>
-                    <a:lnT w="12700" cap="flat" cmpd="sng" algn="ctr">
+                    <a:lnT w="25400" cap="flat" cmpd="sng" algn="ctr">
                       <a:solidFill>
-                        <a:srgbClr val="D9D9D9"/>
+                        <a:srgbClr val="FFFFFF"/>
                       </a:solidFill>
                       <a:prstDash val="solid"/>
                       <a:round/>
                       <a:headEnd type="none" w="med" len="med"/>
                       <a:tailEnd type="none" w="med" len="med"/>
                     </a:lnT>
-                    <a:lnB w="12700" cap="flat" cmpd="sng" algn="ctr">
+                    <a:lnB w="25400" cap="flat" cmpd="sng" algn="ctr">
                       <a:solidFill>
-                        <a:srgbClr val="D9D9D9"/>
+                        <a:srgbClr val="FFFFFF"/>
                       </a:solidFill>
                       <a:prstDash val="solid"/>
                       <a:round/>
                       <a:headEnd type="none" w="med" len="med"/>
                       <a:tailEnd type="none" w="med" len="med"/>
                     </a:lnB>
+                    <a:solidFill>
+                      <a:schemeClr val="bg2"/>
+                    </a:solidFill>
                   </a:tcPr>
                 </a:tc>
               </a:tr>
-              <a:tr h="502920">
+              <a:tr h="566928">
                 <a:tc>
                   <a:txBody>
                     <a:bodyPr/>
@@ -6785,53 +8352,56 @@
                         <a:buNone/>
                       </a:pPr>
                       <a:r>
-                        <a:rPr lang="en-US" sz="1600" dirty="0">
+                        <a:rPr lang="en-US" sz="1500" dirty="0">
                           <a:solidFill>
                             <a:schemeClr val="tx1"/>
                           </a:solidFill>
                         </a:rPr>
                         <a:t>Learning rate</a:t>
                       </a:r>
-                      <a:endParaRPr lang="en-US" sz="1600" dirty="0"/>
+                      <a:endParaRPr lang="en-US" sz="1500" dirty="0"/>
                     </a:p>
                   </a:txBody>
                   <a:tcPr marL="91440" marR="91440" marT="45720" marB="45720" anchor="ctr">
-                    <a:lnL w="12700" cap="flat" cmpd="sng" algn="ctr">
+                    <a:lnL w="25400" cap="flat" cmpd="sng" algn="ctr">
                       <a:solidFill>
-                        <a:srgbClr val="D9D9D9"/>
+                        <a:srgbClr val="FFFFFF"/>
                       </a:solidFill>
                       <a:prstDash val="solid"/>
                       <a:round/>
                       <a:headEnd type="none" w="med" len="med"/>
                       <a:tailEnd type="none" w="med" len="med"/>
                     </a:lnL>
-                    <a:lnR w="12700" cap="flat" cmpd="sng" algn="ctr">
+                    <a:lnR w="25400" cap="flat" cmpd="sng" algn="ctr">
                       <a:solidFill>
-                        <a:srgbClr val="D9D9D9"/>
+                        <a:srgbClr val="FFFFFF"/>
                       </a:solidFill>
                       <a:prstDash val="solid"/>
                       <a:round/>
                       <a:headEnd type="none" w="med" len="med"/>
                       <a:tailEnd type="none" w="med" len="med"/>
                     </a:lnR>
-                    <a:lnT w="12700" cap="flat" cmpd="sng" algn="ctr">
+                    <a:lnT w="25400" cap="flat" cmpd="sng" algn="ctr">
                       <a:solidFill>
-                        <a:srgbClr val="D9D9D9"/>
+                        <a:srgbClr val="FFFFFF"/>
                       </a:solidFill>
                       <a:prstDash val="solid"/>
                       <a:round/>
                       <a:headEnd type="none" w="med" len="med"/>
                       <a:tailEnd type="none" w="med" len="med"/>
                     </a:lnT>
-                    <a:lnB w="12700" cap="flat" cmpd="sng" algn="ctr">
+                    <a:lnB w="25400" cap="flat" cmpd="sng" algn="ctr">
                       <a:solidFill>
-                        <a:srgbClr val="D9D9D9"/>
+                        <a:srgbClr val="FFFFFF"/>
                       </a:solidFill>
                       <a:prstDash val="solid"/>
                       <a:round/>
                       <a:headEnd type="none" w="med" len="med"/>
                       <a:tailEnd type="none" w="med" len="med"/>
                     </a:lnB>
+                    <a:solidFill>
+                      <a:schemeClr val="bg2"/>
+                    </a:solidFill>
                   </a:tcPr>
                 </a:tc>
                 <a:tc>
@@ -6843,57 +8413,60 @@
                         <a:buNone/>
                       </a:pPr>
                       <a:r>
-                        <a:rPr lang="en-US" sz="1600" dirty="0">
+                        <a:rPr lang="en-US" sz="1500" dirty="0">
                           <a:solidFill>
                             <a:schemeClr val="tx1"/>
                           </a:solidFill>
                         </a:rPr>
                         <a:t>0.0001</a:t>
                       </a:r>
-                      <a:endParaRPr lang="en-US" sz="1600" dirty="0"/>
+                      <a:endParaRPr lang="en-US" sz="1500" dirty="0"/>
                     </a:p>
                   </a:txBody>
                   <a:tcPr marL="91440" marR="91440" marT="45720" marB="45720" anchor="ctr">
-                    <a:lnL w="12700" cap="flat" cmpd="sng" algn="ctr">
+                    <a:lnL w="25400" cap="flat" cmpd="sng" algn="ctr">
                       <a:solidFill>
-                        <a:srgbClr val="D9D9D9"/>
+                        <a:srgbClr val="FFFFFF"/>
                       </a:solidFill>
                       <a:prstDash val="solid"/>
                       <a:round/>
                       <a:headEnd type="none" w="med" len="med"/>
                       <a:tailEnd type="none" w="med" len="med"/>
                     </a:lnL>
-                    <a:lnR w="12700" cap="flat" cmpd="sng" algn="ctr">
+                    <a:lnR w="25400" cap="flat" cmpd="sng" algn="ctr">
                       <a:solidFill>
-                        <a:srgbClr val="D9D9D9"/>
+                        <a:srgbClr val="FFFFFF"/>
                       </a:solidFill>
                       <a:prstDash val="solid"/>
                       <a:round/>
                       <a:headEnd type="none" w="med" len="med"/>
                       <a:tailEnd type="none" w="med" len="med"/>
                     </a:lnR>
-                    <a:lnT w="12700" cap="flat" cmpd="sng" algn="ctr">
+                    <a:lnT w="25400" cap="flat" cmpd="sng" algn="ctr">
                       <a:solidFill>
-                        <a:srgbClr val="D9D9D9"/>
+                        <a:srgbClr val="FFFFFF"/>
                       </a:solidFill>
                       <a:prstDash val="solid"/>
                       <a:round/>
                       <a:headEnd type="none" w="med" len="med"/>
                       <a:tailEnd type="none" w="med" len="med"/>
                     </a:lnT>
-                    <a:lnB w="12700" cap="flat" cmpd="sng" algn="ctr">
+                    <a:lnB w="25400" cap="flat" cmpd="sng" algn="ctr">
                       <a:solidFill>
-                        <a:srgbClr val="D9D9D9"/>
+                        <a:srgbClr val="FFFFFF"/>
                       </a:solidFill>
                       <a:prstDash val="solid"/>
                       <a:round/>
                       <a:headEnd type="none" w="med" len="med"/>
                       <a:tailEnd type="none" w="med" len="med"/>
                     </a:lnB>
+                    <a:solidFill>
+                      <a:schemeClr val="bg2"/>
+                    </a:solidFill>
                   </a:tcPr>
                 </a:tc>
               </a:tr>
-              <a:tr h="502920">
+              <a:tr h="566928">
                 <a:tc>
                   <a:txBody>
                     <a:bodyPr/>
@@ -6903,53 +8476,56 @@
                         <a:buNone/>
                       </a:pPr>
                       <a:r>
-                        <a:rPr lang="en-US" sz="1600" dirty="0">
+                        <a:rPr lang="en-US" sz="1500" dirty="0">
                           <a:solidFill>
                             <a:schemeClr val="tx1"/>
                           </a:solidFill>
                         </a:rPr>
                         <a:t>Batch size</a:t>
                       </a:r>
-                      <a:endParaRPr lang="en-US" sz="1600" dirty="0"/>
+                      <a:endParaRPr lang="en-US" sz="1500" dirty="0"/>
                     </a:p>
                   </a:txBody>
                   <a:tcPr marL="91440" marR="91440" marT="45720" marB="45720" anchor="ctr">
-                    <a:lnL w="12700" cap="flat" cmpd="sng" algn="ctr">
+                    <a:lnL w="25400" cap="flat" cmpd="sng" algn="ctr">
                       <a:solidFill>
-                        <a:srgbClr val="D9D9D9"/>
+                        <a:srgbClr val="FFFFFF"/>
                       </a:solidFill>
                       <a:prstDash val="solid"/>
                       <a:round/>
                       <a:headEnd type="none" w="med" len="med"/>
                       <a:tailEnd type="none" w="med" len="med"/>
                     </a:lnL>
-                    <a:lnR w="12700" cap="flat" cmpd="sng" algn="ctr">
+                    <a:lnR w="25400" cap="flat" cmpd="sng" algn="ctr">
                       <a:solidFill>
-                        <a:srgbClr val="D9D9D9"/>
+                        <a:srgbClr val="FFFFFF"/>
                       </a:solidFill>
                       <a:prstDash val="solid"/>
                       <a:round/>
                       <a:headEnd type="none" w="med" len="med"/>
                       <a:tailEnd type="none" w="med" len="med"/>
                     </a:lnR>
-                    <a:lnT w="12700" cap="flat" cmpd="sng" algn="ctr">
+                    <a:lnT w="25400" cap="flat" cmpd="sng" algn="ctr">
                       <a:solidFill>
-                        <a:srgbClr val="D9D9D9"/>
+                        <a:srgbClr val="FFFFFF"/>
                       </a:solidFill>
                       <a:prstDash val="solid"/>
                       <a:round/>
                       <a:headEnd type="none" w="med" len="med"/>
                       <a:tailEnd type="none" w="med" len="med"/>
                     </a:lnT>
-                    <a:lnB w="12700" cap="flat" cmpd="sng" algn="ctr">
+                    <a:lnB w="25400" cap="flat" cmpd="sng" algn="ctr">
                       <a:solidFill>
-                        <a:srgbClr val="D9D9D9"/>
+                        <a:srgbClr val="FFFFFF"/>
                       </a:solidFill>
                       <a:prstDash val="solid"/>
                       <a:round/>
                       <a:headEnd type="none" w="med" len="med"/>
                       <a:tailEnd type="none" w="med" len="med"/>
                     </a:lnB>
+                    <a:solidFill>
+                      <a:schemeClr val="bg2"/>
+                    </a:solidFill>
                   </a:tcPr>
                 </a:tc>
                 <a:tc>
@@ -6961,57 +8537,60 @@
                         <a:buNone/>
                       </a:pPr>
                       <a:r>
-                        <a:rPr lang="en-US" sz="1600" dirty="0">
+                        <a:rPr lang="en-US" sz="1500" dirty="0">
                           <a:solidFill>
                             <a:schemeClr val="tx1"/>
                           </a:solidFill>
                         </a:rPr>
                         <a:t>1 (gradient accumulation 4)</a:t>
                       </a:r>
-                      <a:endParaRPr lang="en-US" sz="1600" dirty="0"/>
+                      <a:endParaRPr lang="en-US" sz="1500" dirty="0"/>
                     </a:p>
                   </a:txBody>
                   <a:tcPr marL="91440" marR="91440" marT="45720" marB="45720" anchor="ctr">
-                    <a:lnL w="12700" cap="flat" cmpd="sng" algn="ctr">
+                    <a:lnL w="25400" cap="flat" cmpd="sng" algn="ctr">
                       <a:solidFill>
-                        <a:srgbClr val="D9D9D9"/>
+                        <a:srgbClr val="FFFFFF"/>
                       </a:solidFill>
                       <a:prstDash val="solid"/>
                       <a:round/>
                       <a:headEnd type="none" w="med" len="med"/>
                       <a:tailEnd type="none" w="med" len="med"/>
                     </a:lnL>
-                    <a:lnR w="12700" cap="flat" cmpd="sng" algn="ctr">
+                    <a:lnR w="25400" cap="flat" cmpd="sng" algn="ctr">
                       <a:solidFill>
-                        <a:srgbClr val="D9D9D9"/>
+                        <a:srgbClr val="FFFFFF"/>
                       </a:solidFill>
                       <a:prstDash val="solid"/>
                       <a:round/>
                       <a:headEnd type="none" w="med" len="med"/>
                       <a:tailEnd type="none" w="med" len="med"/>
                     </a:lnR>
-                    <a:lnT w="12700" cap="flat" cmpd="sng" algn="ctr">
+                    <a:lnT w="25400" cap="flat" cmpd="sng" algn="ctr">
                       <a:solidFill>
-                        <a:srgbClr val="D9D9D9"/>
+                        <a:srgbClr val="FFFFFF"/>
                       </a:solidFill>
                       <a:prstDash val="solid"/>
                       <a:round/>
                       <a:headEnd type="none" w="med" len="med"/>
                       <a:tailEnd type="none" w="med" len="med"/>
                     </a:lnT>
-                    <a:lnB w="12700" cap="flat" cmpd="sng" algn="ctr">
+                    <a:lnB w="25400" cap="flat" cmpd="sng" algn="ctr">
                       <a:solidFill>
-                        <a:srgbClr val="D9D9D9"/>
+                        <a:srgbClr val="FFFFFF"/>
                       </a:solidFill>
                       <a:prstDash val="solid"/>
                       <a:round/>
                       <a:headEnd type="none" w="med" len="med"/>
                       <a:tailEnd type="none" w="med" len="med"/>
                     </a:lnB>
+                    <a:solidFill>
+                      <a:schemeClr val="bg2"/>
+                    </a:solidFill>
                   </a:tcPr>
                 </a:tc>
               </a:tr>
-              <a:tr h="502920">
+              <a:tr h="566928">
                 <a:tc>
                   <a:txBody>
                     <a:bodyPr/>
@@ -7021,53 +8600,56 @@
                         <a:buNone/>
                       </a:pPr>
                       <a:r>
-                        <a:rPr lang="en-US" sz="1600" dirty="0">
+                        <a:rPr lang="en-US" sz="1500" dirty="0">
                           <a:solidFill>
                             <a:schemeClr val="tx1"/>
                           </a:solidFill>
                         </a:rPr>
                         <a:t>Training steps</a:t>
                       </a:r>
-                      <a:endParaRPr lang="en-US" sz="1600" dirty="0"/>
+                      <a:endParaRPr lang="en-US" sz="1500" dirty="0"/>
                     </a:p>
                   </a:txBody>
                   <a:tcPr marL="91440" marR="91440" marT="45720" marB="45720" anchor="ctr">
-                    <a:lnL w="12700" cap="flat" cmpd="sng" algn="ctr">
+                    <a:lnL w="25400" cap="flat" cmpd="sng" algn="ctr">
                       <a:solidFill>
-                        <a:srgbClr val="D9D9D9"/>
+                        <a:srgbClr val="FFFFFF"/>
                       </a:solidFill>
                       <a:prstDash val="solid"/>
                       <a:round/>
                       <a:headEnd type="none" w="med" len="med"/>
                       <a:tailEnd type="none" w="med" len="med"/>
                     </a:lnL>
-                    <a:lnR w="12700" cap="flat" cmpd="sng" algn="ctr">
+                    <a:lnR w="25400" cap="flat" cmpd="sng" algn="ctr">
                       <a:solidFill>
-                        <a:srgbClr val="D9D9D9"/>
+                        <a:srgbClr val="FFFFFF"/>
                       </a:solidFill>
                       <a:prstDash val="solid"/>
                       <a:round/>
                       <a:headEnd type="none" w="med" len="med"/>
                       <a:tailEnd type="none" w="med" len="med"/>
                     </a:lnR>
-                    <a:lnT w="12700" cap="flat" cmpd="sng" algn="ctr">
+                    <a:lnT w="25400" cap="flat" cmpd="sng" algn="ctr">
                       <a:solidFill>
-                        <a:srgbClr val="D9D9D9"/>
+                        <a:srgbClr val="FFFFFF"/>
                       </a:solidFill>
                       <a:prstDash val="solid"/>
                       <a:round/>
                       <a:headEnd type="none" w="med" len="med"/>
                       <a:tailEnd type="none" w="med" len="med"/>
                     </a:lnT>
-                    <a:lnB w="12700" cap="flat" cmpd="sng" algn="ctr">
+                    <a:lnB w="25400" cap="flat" cmpd="sng" algn="ctr">
                       <a:solidFill>
-                        <a:srgbClr val="D9D9D9"/>
+                        <a:srgbClr val="FFFFFF"/>
                       </a:solidFill>
                       <a:prstDash val="solid"/>
                       <a:round/>
                       <a:headEnd type="none" w="med" len="med"/>
                       <a:tailEnd type="none" w="med" len="med"/>
                     </a:lnB>
+                    <a:solidFill>
+                      <a:schemeClr val="bg2"/>
+                    </a:solidFill>
                   </a:tcPr>
                 </a:tc>
                 <a:tc>
@@ -7079,57 +8661,60 @@
                         <a:buNone/>
                       </a:pPr>
                       <a:r>
-                        <a:rPr lang="en-US" sz="1600" dirty="0">
+                        <a:rPr lang="en-US" sz="1500" dirty="0">
                           <a:solidFill>
                             <a:schemeClr val="tx1"/>
                           </a:solidFill>
                         </a:rPr>
                         <a:t>1500</a:t>
                       </a:r>
-                      <a:endParaRPr lang="en-US" sz="1600" dirty="0"/>
+                      <a:endParaRPr lang="en-US" sz="1500" dirty="0"/>
                     </a:p>
                   </a:txBody>
                   <a:tcPr marL="91440" marR="91440" marT="45720" marB="45720" anchor="ctr">
-                    <a:lnL w="12700" cap="flat" cmpd="sng" algn="ctr">
+                    <a:lnL w="25400" cap="flat" cmpd="sng" algn="ctr">
                       <a:solidFill>
-                        <a:srgbClr val="D9D9D9"/>
+                        <a:srgbClr val="FFFFFF"/>
                       </a:solidFill>
                       <a:prstDash val="solid"/>
                       <a:round/>
                       <a:headEnd type="none" w="med" len="med"/>
                       <a:tailEnd type="none" w="med" len="med"/>
                     </a:lnL>
-                    <a:lnR w="12700" cap="flat" cmpd="sng" algn="ctr">
+                    <a:lnR w="25400" cap="flat" cmpd="sng" algn="ctr">
                       <a:solidFill>
-                        <a:srgbClr val="D9D9D9"/>
+                        <a:srgbClr val="FFFFFF"/>
                       </a:solidFill>
                       <a:prstDash val="solid"/>
                       <a:round/>
                       <a:headEnd type="none" w="med" len="med"/>
                       <a:tailEnd type="none" w="med" len="med"/>
                     </a:lnR>
-                    <a:lnT w="12700" cap="flat" cmpd="sng" algn="ctr">
+                    <a:lnT w="25400" cap="flat" cmpd="sng" algn="ctr">
                       <a:solidFill>
-                        <a:srgbClr val="D9D9D9"/>
+                        <a:srgbClr val="FFFFFF"/>
                       </a:solidFill>
                       <a:prstDash val="solid"/>
                       <a:round/>
                       <a:headEnd type="none" w="med" len="med"/>
                       <a:tailEnd type="none" w="med" len="med"/>
                     </a:lnT>
-                    <a:lnB w="12700" cap="flat" cmpd="sng" algn="ctr">
+                    <a:lnB w="25400" cap="flat" cmpd="sng" algn="ctr">
                       <a:solidFill>
-                        <a:srgbClr val="D9D9D9"/>
+                        <a:srgbClr val="FFFFFF"/>
                       </a:solidFill>
                       <a:prstDash val="solid"/>
                       <a:round/>
                       <a:headEnd type="none" w="med" len="med"/>
                       <a:tailEnd type="none" w="med" len="med"/>
                     </a:lnB>
+                    <a:solidFill>
+                      <a:schemeClr val="bg2"/>
+                    </a:solidFill>
                   </a:tcPr>
                 </a:tc>
               </a:tr>
-              <a:tr h="502920">
+              <a:tr h="566928">
                 <a:tc>
                   <a:txBody>
                     <a:bodyPr/>
@@ -7139,53 +8724,56 @@
                         <a:buNone/>
                       </a:pPr>
                       <a:r>
-                        <a:rPr lang="en-US" sz="1600" dirty="0">
+                        <a:rPr lang="en-US" sz="1500" dirty="0">
                           <a:solidFill>
                             <a:schemeClr val="tx1"/>
                           </a:solidFill>
                         </a:rPr>
                         <a:t>Precision</a:t>
                       </a:r>
-                      <a:endParaRPr lang="en-US" sz="1600" dirty="0"/>
+                      <a:endParaRPr lang="en-US" sz="1500" dirty="0"/>
                     </a:p>
                   </a:txBody>
                   <a:tcPr marL="91440" marR="91440" marT="45720" marB="45720" anchor="ctr">
-                    <a:lnL w="12700" cap="flat" cmpd="sng" algn="ctr">
+                    <a:lnL w="25400" cap="flat" cmpd="sng" algn="ctr">
                       <a:solidFill>
-                        <a:srgbClr val="D9D9D9"/>
+                        <a:srgbClr val="FFFFFF"/>
                       </a:solidFill>
                       <a:prstDash val="solid"/>
                       <a:round/>
                       <a:headEnd type="none" w="med" len="med"/>
                       <a:tailEnd type="none" w="med" len="med"/>
                     </a:lnL>
-                    <a:lnR w="12700" cap="flat" cmpd="sng" algn="ctr">
+                    <a:lnR w="25400" cap="flat" cmpd="sng" algn="ctr">
                       <a:solidFill>
-                        <a:srgbClr val="D9D9D9"/>
+                        <a:srgbClr val="FFFFFF"/>
                       </a:solidFill>
                       <a:prstDash val="solid"/>
                       <a:round/>
                       <a:headEnd type="none" w="med" len="med"/>
                       <a:tailEnd type="none" w="med" len="med"/>
                     </a:lnR>
-                    <a:lnT w="12700" cap="flat" cmpd="sng" algn="ctr">
+                    <a:lnT w="25400" cap="flat" cmpd="sng" algn="ctr">
                       <a:solidFill>
-                        <a:srgbClr val="D9D9D9"/>
+                        <a:srgbClr val="FFFFFF"/>
                       </a:solidFill>
                       <a:prstDash val="solid"/>
                       <a:round/>
                       <a:headEnd type="none" w="med" len="med"/>
                       <a:tailEnd type="none" w="med" len="med"/>
                     </a:lnT>
-                    <a:lnB w="12700" cap="flat" cmpd="sng" algn="ctr">
+                    <a:lnB w="25400" cap="flat" cmpd="sng" algn="ctr">
                       <a:solidFill>
-                        <a:srgbClr val="D9D9D9"/>
+                        <a:srgbClr val="FFFFFF"/>
                       </a:solidFill>
                       <a:prstDash val="solid"/>
                       <a:round/>
                       <a:headEnd type="none" w="med" len="med"/>
                       <a:tailEnd type="none" w="med" len="med"/>
                     </a:lnB>
+                    <a:solidFill>
+                      <a:schemeClr val="bg2"/>
+                    </a:solidFill>
                   </a:tcPr>
                 </a:tc>
                 <a:tc>
@@ -7197,53 +8785,56 @@
                         <a:buNone/>
                       </a:pPr>
                       <a:r>
-                        <a:rPr lang="en-US" sz="1600" dirty="0">
+                        <a:rPr lang="en-US" sz="1500" dirty="0">
                           <a:solidFill>
                             <a:schemeClr val="tx1"/>
                           </a:solidFill>
                         </a:rPr>
                         <a:t>fp16</a:t>
                       </a:r>
-                      <a:endParaRPr lang="en-US" sz="1600" dirty="0"/>
+                      <a:endParaRPr lang="en-US" sz="1500" dirty="0"/>
                     </a:p>
                   </a:txBody>
                   <a:tcPr marL="91440" marR="91440" marT="45720" marB="45720" anchor="ctr">
-                    <a:lnL w="12700" cap="flat" cmpd="sng" algn="ctr">
+                    <a:lnL w="25400" cap="flat" cmpd="sng" algn="ctr">
                       <a:solidFill>
-                        <a:srgbClr val="D9D9D9"/>
+                        <a:srgbClr val="FFFFFF"/>
                       </a:solidFill>
                       <a:prstDash val="solid"/>
                       <a:round/>
                       <a:headEnd type="none" w="med" len="med"/>
                       <a:tailEnd type="none" w="med" len="med"/>
                     </a:lnL>
-                    <a:lnR w="12700" cap="flat" cmpd="sng" algn="ctr">
+                    <a:lnR w="25400" cap="flat" cmpd="sng" algn="ctr">
                       <a:solidFill>
-                        <a:srgbClr val="D9D9D9"/>
+                        <a:srgbClr val="FFFFFF"/>
                       </a:solidFill>
                       <a:prstDash val="solid"/>
                       <a:round/>
                       <a:headEnd type="none" w="med" len="med"/>
                       <a:tailEnd type="none" w="med" len="med"/>
                     </a:lnR>
-                    <a:lnT w="12700" cap="flat" cmpd="sng" algn="ctr">
+                    <a:lnT w="25400" cap="flat" cmpd="sng" algn="ctr">
                       <a:solidFill>
-                        <a:srgbClr val="D9D9D9"/>
+                        <a:srgbClr val="FFFFFF"/>
                       </a:solidFill>
                       <a:prstDash val="solid"/>
                       <a:round/>
                       <a:headEnd type="none" w="med" len="med"/>
                       <a:tailEnd type="none" w="med" len="med"/>
                     </a:lnT>
-                    <a:lnB w="12700" cap="flat" cmpd="sng" algn="ctr">
+                    <a:lnB w="25400" cap="flat" cmpd="sng" algn="ctr">
                       <a:solidFill>
-                        <a:srgbClr val="D9D9D9"/>
+                        <a:srgbClr val="FFFFFF"/>
                       </a:solidFill>
                       <a:prstDash val="solid"/>
                       <a:round/>
                       <a:headEnd type="none" w="med" len="med"/>
                       <a:tailEnd type="none" w="med" len="med"/>
                     </a:lnB>
+                    <a:solidFill>
+                      <a:schemeClr val="bg2"/>
+                    </a:solidFill>
                   </a:tcPr>
                 </a:tc>
               </a:tr>
@@ -7279,7 +8870,7 @@
           <a:bodyPr/>
           <a:lstStyle>
             <a:lvl1pPr>
-              <a:defRPr sz="1100">
+              <a:defRPr sz="1000">
                 <a:solidFill>
                   <a:schemeClr val="accent4"/>
                 </a:solidFill>
@@ -7381,6 +8972,13 @@
           <a:prstGeom prst="rect">
             <a:avLst/>
           </a:prstGeom>
+          <a:effectLst>
+            <a:outerShdw sx="100000" sy="100000" kx="0" ky="0" algn="bl" rotWithShape="0" blurRad="76200" dist="38100" dir="2700000">
+              <a:srgbClr val="000000">
+                <a:alpha val="28000"/>
+              </a:srgbClr>
+            </a:outerShdw>
+          </a:effectLst>
         </p:spPr>
       </p:pic>
       <p:sp>
@@ -7391,7 +8989,7 @@
         </p:nvSpPr>
         <p:spPr>
           <a:xfrm>
-            <a:off x="822960" y="5943600"/>
+            <a:off x="822960" y="5989320"/>
             <a:ext cx="10515600" cy="274320"/>
           </a:xfrm>
           <a:prstGeom prst="rect">
@@ -7447,7 +9045,7 @@
           <a:bodyPr/>
           <a:lstStyle>
             <a:lvl1pPr>
-              <a:defRPr sz="1100">
+              <a:defRPr sz="1000">
                 <a:solidFill>
                   <a:schemeClr val="accent4"/>
                 </a:solidFill>
@@ -7527,9 +9125,31 @@
           </a:p>
         </p:txBody>
       </p:sp>
+      <p:sp>
+        <p:nvSpPr>
+          <p:cNvPr id="3" name="palace-panel"/>
+          <p:cNvSpPr/>
+          <p:nvPr/>
+        </p:nvSpPr>
+        <p:spPr>
+          <a:xfrm>
+            <a:off x="457200" y="1143000"/>
+            <a:ext cx="3749040" cy="3429000"/>
+          </a:xfrm>
+          <a:prstGeom prst="roundRect">
+            <a:avLst>
+              <a:gd name="adj" fmla="val 2667"/>
+            </a:avLst>
+          </a:prstGeom>
+          <a:solidFill>
+            <a:schemeClr val="bg2"/>
+          </a:solidFill>
+          <a:ln/>
+        </p:spPr>
+      </p:sp>
       <p:pic>
         <p:nvPicPr>
-          <p:cNvPr id="3" name="palace-base" descr="/private/tmp/claude-501/-Users-shashwatsahu-Desktop-the-next-ravi-varma/b50e4b20-09e3-45d0-8877-560ccb85868c/scratchpad/deck/assets/palace_base.jpg">    </p:cNvPr>
+          <p:cNvPr id="4" name="palace-base" descr="/private/tmp/claude-501/-Users-shashwatsahu-Desktop-the-next-ravi-varma/b50e4b20-09e3-45d0-8877-560ccb85868c/scratchpad/deck/assets/palace_base.jpg">    </p:cNvPr>
           <p:cNvPicPr>
             <a:picLocks noChangeAspect="1"/>
           </p:cNvPicPr>
@@ -7543,17 +9163,24 @@
         </p:blipFill>
         <p:spPr>
           <a:xfrm>
-            <a:off x="548640" y="1508760"/>
-            <a:ext cx="1783080" cy="2551176"/>
-          </a:xfrm>
-          <a:prstGeom prst="rect">
-            <a:avLst/>
-          </a:prstGeom>
+            <a:off x="548640" y="1600200"/>
+            <a:ext cx="1737360" cy="2478024"/>
+          </a:xfrm>
+          <a:prstGeom prst="rect">
+            <a:avLst/>
+          </a:prstGeom>
+          <a:effectLst>
+            <a:outerShdw sx="100000" sy="100000" kx="0" ky="0" algn="bl" rotWithShape="0" blurRad="76200" dist="38100" dir="2700000">
+              <a:srgbClr val="000000">
+                <a:alpha val="28000"/>
+              </a:srgbClr>
+            </a:outerShdw>
+          </a:effectLst>
         </p:spPr>
       </p:pic>
       <p:pic>
         <p:nvPicPr>
-          <p:cNvPr id="4" name="palace-lora" descr="/private/tmp/claude-501/-Users-shashwatsahu-Desktop-the-next-ravi-varma/b50e4b20-09e3-45d0-8877-560ccb85868c/scratchpad/deck/assets/palace_lora.jpg">    </p:cNvPr>
+          <p:cNvPr id="5" name="palace-lora" descr="/private/tmp/claude-501/-Users-shashwatsahu-Desktop-the-next-ravi-varma/b50e4b20-09e3-45d0-8877-560ccb85868c/scratchpad/deck/assets/palace_lora.jpg">    </p:cNvPr>
           <p:cNvPicPr>
             <a:picLocks noChangeAspect="1"/>
           </p:cNvPicPr>
@@ -7567,24 +9194,31 @@
         </p:blipFill>
         <p:spPr>
           <a:xfrm>
-            <a:off x="2377440" y="1508760"/>
-            <a:ext cx="1783080" cy="2551176"/>
-          </a:xfrm>
-          <a:prstGeom prst="rect">
-            <a:avLst/>
-          </a:prstGeom>
+            <a:off x="2377440" y="1600200"/>
+            <a:ext cx="1737360" cy="2478024"/>
+          </a:xfrm>
+          <a:prstGeom prst="rect">
+            <a:avLst/>
+          </a:prstGeom>
+          <a:effectLst>
+            <a:outerShdw sx="100000" sy="100000" kx="0" ky="0" algn="bl" rotWithShape="0" blurRad="76200" dist="38100" dir="2700000">
+              <a:srgbClr val="000000">
+                <a:alpha val="28000"/>
+              </a:srgbClr>
+            </a:outerShdw>
+          </a:effectLst>
         </p:spPr>
       </p:pic>
       <p:sp>
         <p:nvSpPr>
-          <p:cNvPr id="5" name="palace-l1"/>
+          <p:cNvPr id="6" name="palace-l1"/>
           <p:cNvSpPr txBox="1"/>
           <p:nvPr/>
         </p:nvSpPr>
         <p:spPr>
           <a:xfrm>
-            <a:off x="548640" y="1188720"/>
-            <a:ext cx="1783080" cy="274320"/>
+            <a:off x="548640" y="1234440"/>
+            <a:ext cx="1737360" cy="292608"/>
           </a:xfrm>
           <a:prstGeom prst="rect">
             <a:avLst/>
@@ -7613,14 +9247,14 @@
       </p:sp>
       <p:sp>
         <p:nvSpPr>
-          <p:cNvPr id="6" name="palace-l2"/>
+          <p:cNvPr id="7" name="palace-l2"/>
           <p:cNvSpPr txBox="1"/>
           <p:nvPr/>
         </p:nvSpPr>
         <p:spPr>
           <a:xfrm>
-            <a:off x="2377440" y="1188720"/>
-            <a:ext cx="1783080" cy="274320"/>
+            <a:off x="2377440" y="1234440"/>
+            <a:ext cx="1737360" cy="292608"/>
           </a:xfrm>
           <a:prstGeom prst="rect">
             <a:avLst/>
@@ -7649,14 +9283,14 @@
       </p:sp>
       <p:sp>
         <p:nvSpPr>
-          <p:cNvPr id="7" name="caption"/>
+          <p:cNvPr id="8" name="caption"/>
           <p:cNvSpPr txBox="1"/>
           <p:nvPr/>
         </p:nvSpPr>
         <p:spPr>
           <a:xfrm>
-            <a:off x="548640" y="4114800"/>
-            <a:ext cx="3611880" cy="274320"/>
+            <a:off x="548640" y="4206240"/>
+            <a:ext cx="3566160" cy="274320"/>
           </a:xfrm>
           <a:prstGeom prst="rect">
             <a:avLst/>
@@ -7672,9 +9306,9 @@
               <a:buNone/>
             </a:pPr>
             <a:r>
-              <a:rPr lang="en-US" sz="1200" i="1" dirty="0">
-                <a:solidFill>
-                  <a:schemeClr val="accent4"/>
+              <a:rPr lang="en-US" sz="1200" b="1" dirty="0">
+                <a:solidFill>
+                  <a:schemeClr val="tx1"/>
                 </a:solidFill>
               </a:rPr>
               <a:t>Royal woman in a palace</a:t>
@@ -7682,10 +9316,32 @@
             <a:endParaRPr lang="en-US" sz="1200" dirty="0"/>
           </a:p>
         </p:txBody>
+      </p:sp>
+      <p:sp>
+        <p:nvSpPr>
+          <p:cNvPr id="9" name="portrait-panel"/>
+          <p:cNvSpPr/>
+          <p:nvPr/>
+        </p:nvSpPr>
+        <p:spPr>
+          <a:xfrm>
+            <a:off x="4251960" y="1143000"/>
+            <a:ext cx="3749040" cy="3429000"/>
+          </a:xfrm>
+          <a:prstGeom prst="roundRect">
+            <a:avLst>
+              <a:gd name="adj" fmla="val 2667"/>
+            </a:avLst>
+          </a:prstGeom>
+          <a:solidFill>
+            <a:schemeClr val="bg2"/>
+          </a:solidFill>
+          <a:ln/>
+        </p:spPr>
       </p:sp>
       <p:pic>
         <p:nvPicPr>
-          <p:cNvPr id="8" name="portrait-base" descr="/private/tmp/claude-501/-Users-shashwatsahu-Desktop-the-next-ravi-varma/b50e4b20-09e3-45d0-8877-560ccb85868c/scratchpad/deck/assets/portrait_base.jpg">    </p:cNvPr>
+          <p:cNvPr id="10" name="portrait-base" descr="/private/tmp/claude-501/-Users-shashwatsahu-Desktop-the-next-ravi-varma/b50e4b20-09e3-45d0-8877-560ccb85868c/scratchpad/deck/assets/portrait_base.jpg">    </p:cNvPr>
           <p:cNvPicPr>
             <a:picLocks noChangeAspect="1"/>
           </p:cNvPicPr>
@@ -7699,17 +9355,24 @@
         </p:blipFill>
         <p:spPr>
           <a:xfrm>
-            <a:off x="4343400" y="1508760"/>
-            <a:ext cx="1783080" cy="2551176"/>
-          </a:xfrm>
-          <a:prstGeom prst="rect">
-            <a:avLst/>
-          </a:prstGeom>
+            <a:off x="4343400" y="1600200"/>
+            <a:ext cx="1737360" cy="2478024"/>
+          </a:xfrm>
+          <a:prstGeom prst="rect">
+            <a:avLst/>
+          </a:prstGeom>
+          <a:effectLst>
+            <a:outerShdw sx="100000" sy="100000" kx="0" ky="0" algn="bl" rotWithShape="0" blurRad="76200" dist="38100" dir="2700000">
+              <a:srgbClr val="000000">
+                <a:alpha val="28000"/>
+              </a:srgbClr>
+            </a:outerShdw>
+          </a:effectLst>
         </p:spPr>
       </p:pic>
       <p:pic>
         <p:nvPicPr>
-          <p:cNvPr id="9" name="portrait-lora" descr="/private/tmp/claude-501/-Users-shashwatsahu-Desktop-the-next-ravi-varma/b50e4b20-09e3-45d0-8877-560ccb85868c/scratchpad/deck/assets/portrait_lora.jpg">    </p:cNvPr>
+          <p:cNvPr id="11" name="portrait-lora" descr="/private/tmp/claude-501/-Users-shashwatsahu-Desktop-the-next-ravi-varma/b50e4b20-09e3-45d0-8877-560ccb85868c/scratchpad/deck/assets/portrait_lora.jpg">    </p:cNvPr>
           <p:cNvPicPr>
             <a:picLocks noChangeAspect="1"/>
           </p:cNvPicPr>
@@ -7723,24 +9386,31 @@
         </p:blipFill>
         <p:spPr>
           <a:xfrm>
-            <a:off x="6172200" y="1508760"/>
-            <a:ext cx="1783080" cy="2551176"/>
-          </a:xfrm>
-          <a:prstGeom prst="rect">
-            <a:avLst/>
-          </a:prstGeom>
+            <a:off x="6172200" y="1600200"/>
+            <a:ext cx="1737360" cy="2478024"/>
+          </a:xfrm>
+          <a:prstGeom prst="rect">
+            <a:avLst/>
+          </a:prstGeom>
+          <a:effectLst>
+            <a:outerShdw sx="100000" sy="100000" kx="0" ky="0" algn="bl" rotWithShape="0" blurRad="76200" dist="38100" dir="2700000">
+              <a:srgbClr val="000000">
+                <a:alpha val="28000"/>
+              </a:srgbClr>
+            </a:outerShdw>
+          </a:effectLst>
         </p:spPr>
       </p:pic>
       <p:sp>
         <p:nvSpPr>
-          <p:cNvPr id="10" name="portrait-l1"/>
+          <p:cNvPr id="12" name="portrait-l1"/>
           <p:cNvSpPr txBox="1"/>
           <p:nvPr/>
         </p:nvSpPr>
         <p:spPr>
           <a:xfrm>
-            <a:off x="4343400" y="1188720"/>
-            <a:ext cx="1783080" cy="274320"/>
+            <a:off x="4343400" y="1234440"/>
+            <a:ext cx="1737360" cy="292608"/>
           </a:xfrm>
           <a:prstGeom prst="rect">
             <a:avLst/>
@@ -7769,14 +9439,14 @@
       </p:sp>
       <p:sp>
         <p:nvSpPr>
-          <p:cNvPr id="11" name="portrait-l2"/>
+          <p:cNvPr id="13" name="portrait-l2"/>
           <p:cNvSpPr txBox="1"/>
           <p:nvPr/>
         </p:nvSpPr>
         <p:spPr>
           <a:xfrm>
-            <a:off x="6172200" y="1188720"/>
-            <a:ext cx="1783080" cy="274320"/>
+            <a:off x="6172200" y="1234440"/>
+            <a:ext cx="1737360" cy="292608"/>
           </a:xfrm>
           <a:prstGeom prst="rect">
             <a:avLst/>
@@ -7805,14 +9475,14 @@
       </p:sp>
       <p:sp>
         <p:nvSpPr>
-          <p:cNvPr id="12" name="caption"/>
+          <p:cNvPr id="14" name="caption"/>
           <p:cNvSpPr txBox="1"/>
           <p:nvPr/>
         </p:nvSpPr>
         <p:spPr>
           <a:xfrm>
-            <a:off x="4343400" y="4114800"/>
-            <a:ext cx="3611880" cy="274320"/>
+            <a:off x="4343400" y="4206240"/>
+            <a:ext cx="3566160" cy="274320"/>
           </a:xfrm>
           <a:prstGeom prst="rect">
             <a:avLst/>
@@ -7828,9 +9498,9 @@
               <a:buNone/>
             </a:pPr>
             <a:r>
-              <a:rPr lang="en-US" sz="1200" i="1" dirty="0">
-                <a:solidFill>
-                  <a:schemeClr val="accent4"/>
+              <a:rPr lang="en-US" sz="1200" b="1" dirty="0">
+                <a:solidFill>
+                  <a:schemeClr val="tx1"/>
                 </a:solidFill>
               </a:rPr>
               <a:t>Royal portrait</a:t>
@@ -7838,10 +9508,32 @@
             <a:endParaRPr lang="en-US" sz="1200" dirty="0"/>
           </a:p>
         </p:txBody>
+      </p:sp>
+      <p:sp>
+        <p:nvSpPr>
+          <p:cNvPr id="15" name="window-panel"/>
+          <p:cNvSpPr/>
+          <p:nvPr/>
+        </p:nvSpPr>
+        <p:spPr>
+          <a:xfrm>
+            <a:off x="8046720" y="1143000"/>
+            <a:ext cx="3749040" cy="3429000"/>
+          </a:xfrm>
+          <a:prstGeom prst="roundRect">
+            <a:avLst>
+              <a:gd name="adj" fmla="val 2667"/>
+            </a:avLst>
+          </a:prstGeom>
+          <a:solidFill>
+            <a:schemeClr val="bg2"/>
+          </a:solidFill>
+          <a:ln/>
+        </p:spPr>
       </p:sp>
       <p:pic>
         <p:nvPicPr>
-          <p:cNvPr id="13" name="window-base" descr="/private/tmp/claude-501/-Users-shashwatsahu-Desktop-the-next-ravi-varma/b50e4b20-09e3-45d0-8877-560ccb85868c/scratchpad/deck/assets/window_base.jpg">    </p:cNvPr>
+          <p:cNvPr id="16" name="window-base" descr="/private/tmp/claude-501/-Users-shashwatsahu-Desktop-the-next-ravi-varma/b50e4b20-09e3-45d0-8877-560ccb85868c/scratchpad/deck/assets/window_base.jpg">    </p:cNvPr>
           <p:cNvPicPr>
             <a:picLocks noChangeAspect="1"/>
           </p:cNvPicPr>
@@ -7855,17 +9547,24 @@
         </p:blipFill>
         <p:spPr>
           <a:xfrm>
-            <a:off x="8138160" y="1508760"/>
-            <a:ext cx="1783080" cy="2551176"/>
-          </a:xfrm>
-          <a:prstGeom prst="rect">
-            <a:avLst/>
-          </a:prstGeom>
+            <a:off x="8138160" y="1600200"/>
+            <a:ext cx="1737360" cy="2478024"/>
+          </a:xfrm>
+          <a:prstGeom prst="rect">
+            <a:avLst/>
+          </a:prstGeom>
+          <a:effectLst>
+            <a:outerShdw sx="100000" sy="100000" kx="0" ky="0" algn="bl" rotWithShape="0" blurRad="76200" dist="38100" dir="2700000">
+              <a:srgbClr val="000000">
+                <a:alpha val="28000"/>
+              </a:srgbClr>
+            </a:outerShdw>
+          </a:effectLst>
         </p:spPr>
       </p:pic>
       <p:pic>
         <p:nvPicPr>
-          <p:cNvPr id="14" name="window-lora" descr="/private/tmp/claude-501/-Users-shashwatsahu-Desktop-the-next-ravi-varma/b50e4b20-09e3-45d0-8877-560ccb85868c/scratchpad/deck/assets/window_lora.jpg">    </p:cNvPr>
+          <p:cNvPr id="17" name="window-lora" descr="/private/tmp/claude-501/-Users-shashwatsahu-Desktop-the-next-ravi-varma/b50e4b20-09e3-45d0-8877-560ccb85868c/scratchpad/deck/assets/window_lora.jpg">    </p:cNvPr>
           <p:cNvPicPr>
             <a:picLocks noChangeAspect="1"/>
           </p:cNvPicPr>
@@ -7879,24 +9578,31 @@
         </p:blipFill>
         <p:spPr>
           <a:xfrm>
-            <a:off x="9966960" y="1508760"/>
-            <a:ext cx="1783080" cy="2551176"/>
-          </a:xfrm>
-          <a:prstGeom prst="rect">
-            <a:avLst/>
-          </a:prstGeom>
+            <a:off x="9966960" y="1600200"/>
+            <a:ext cx="1737360" cy="2478024"/>
+          </a:xfrm>
+          <a:prstGeom prst="rect">
+            <a:avLst/>
+          </a:prstGeom>
+          <a:effectLst>
+            <a:outerShdw sx="100000" sy="100000" kx="0" ky="0" algn="bl" rotWithShape="0" blurRad="76200" dist="38100" dir="2700000">
+              <a:srgbClr val="000000">
+                <a:alpha val="28000"/>
+              </a:srgbClr>
+            </a:outerShdw>
+          </a:effectLst>
         </p:spPr>
       </p:pic>
       <p:sp>
         <p:nvSpPr>
-          <p:cNvPr id="15" name="window-l1"/>
+          <p:cNvPr id="18" name="window-l1"/>
           <p:cNvSpPr txBox="1"/>
           <p:nvPr/>
         </p:nvSpPr>
         <p:spPr>
           <a:xfrm>
-            <a:off x="8138160" y="1188720"/>
-            <a:ext cx="1783080" cy="274320"/>
+            <a:off x="8138160" y="1234440"/>
+            <a:ext cx="1737360" cy="292608"/>
           </a:xfrm>
           <a:prstGeom prst="rect">
             <a:avLst/>
@@ -7925,14 +9631,14 @@
       </p:sp>
       <p:sp>
         <p:nvSpPr>
-          <p:cNvPr id="16" name="window-l2"/>
+          <p:cNvPr id="19" name="window-l2"/>
           <p:cNvSpPr txBox="1"/>
           <p:nvPr/>
         </p:nvSpPr>
         <p:spPr>
           <a:xfrm>
-            <a:off x="9966960" y="1188720"/>
-            <a:ext cx="1783080" cy="274320"/>
+            <a:off x="9966960" y="1234440"/>
+            <a:ext cx="1737360" cy="292608"/>
           </a:xfrm>
           <a:prstGeom prst="rect">
             <a:avLst/>
@@ -7961,14 +9667,14 @@
       </p:sp>
       <p:sp>
         <p:nvSpPr>
-          <p:cNvPr id="17" name="caption"/>
+          <p:cNvPr id="20" name="caption"/>
           <p:cNvSpPr txBox="1"/>
           <p:nvPr/>
         </p:nvSpPr>
         <p:spPr>
           <a:xfrm>
-            <a:off x="8138160" y="4114800"/>
-            <a:ext cx="3611880" cy="274320"/>
+            <a:off x="8138160" y="4206240"/>
+            <a:ext cx="3566160" cy="274320"/>
           </a:xfrm>
           <a:prstGeom prst="rect">
             <a:avLst/>
@@ -7984,9 +9690,9 @@
               <a:buNone/>
             </a:pPr>
             <a:r>
-              <a:rPr lang="en-US" sz="1200" i="1" dirty="0">
-                <a:solidFill>
-                  <a:schemeClr val="accent4"/>
+              <a:rPr lang="en-US" sz="1200" b="1" dirty="0">
+                <a:solidFill>
+                  <a:schemeClr val="tx1"/>
                 </a:solidFill>
               </a:rPr>
               <a:t>Woman beside a window</a:t>
@@ -7997,14 +9703,14 @@
       </p:sp>
       <p:sp>
         <p:nvSpPr>
-          <p:cNvPr id="18" name="points"/>
+          <p:cNvPr id="21" name="points"/>
           <p:cNvSpPr txBox="1"/>
           <p:nvPr/>
         </p:nvSpPr>
         <p:spPr>
           <a:xfrm>
-            <a:off x="548640" y="4663440"/>
-            <a:ext cx="11064240" cy="1463040"/>
+            <a:off x="548640" y="4846320"/>
+            <a:ext cx="11064240" cy="1371600"/>
           </a:xfrm>
           <a:prstGeom prst="rect">
             <a:avLst/>
@@ -8024,14 +9730,14 @@
               <a:buChar char="•"/>
             </a:pPr>
             <a:r>
-              <a:rPr lang="en-US" sz="1700" dirty="0">
+              <a:rPr lang="en-US" sz="1600" dirty="0">
                 <a:solidFill>
                   <a:schemeClr val="tx1"/>
                 </a:solidFill>
               </a:rPr>
               <a:t>With LoRA the images look more like Ravi Varma's style: full-figure poses, pillars, carpets, darker painted backgrounds.</a:t>
             </a:r>
-            <a:endParaRPr lang="en-US" sz="1700" dirty="0"/>
+            <a:endParaRPr lang="en-US" sz="1600" dirty="0"/>
           </a:p>
           <a:p>
             <a:pPr marL="342900" indent="-342900">
@@ -8042,14 +9748,14 @@
               <a:buChar char="•"/>
             </a:pPr>
             <a:r>
-              <a:rPr lang="en-US" sz="1700" dirty="0">
+              <a:rPr lang="en-US" sz="1600" dirty="0">
                 <a:solidFill>
                   <a:schemeClr val="tx1"/>
                 </a:solidFill>
               </a:rPr>
               <a:t>The base model added picture frames in 5 of 15 images; our model added none.</a:t>
             </a:r>
-            <a:endParaRPr lang="en-US" sz="1700" dirty="0"/>
+            <a:endParaRPr lang="en-US" sz="1600" dirty="0"/>
           </a:p>
         </p:txBody>
       </p:sp>
@@ -8081,7 +9787,7 @@
           <a:bodyPr/>
           <a:lstStyle>
             <a:lvl1pPr>
-              <a:defRPr sz="1100">
+              <a:defRPr sz="1000">
                 <a:solidFill>
                   <a:schemeClr val="accent4"/>
                 </a:solidFill>
@@ -8107,49 +9813,49 @@
 </file>
 
 <file path=ppt/theme/theme1.xml><?xml version="1.0" encoding="utf-8"?>
-<a:theme xmlns:a="http://schemas.openxmlformats.org/drawingml/2006/main" name="Simple Maroon">
+<a:theme xmlns:a="http://schemas.openxmlformats.org/drawingml/2006/main" name="Varma Maroon">
   <a:themeElements>
-    <a:clrScheme name="Simple Maroon">
+    <a:clrScheme name="Varma Maroon">
       <a:dk1>
-        <a:srgbClr val="222222"/>
+        <a:srgbClr val="262220"/>
       </a:dk1>
       <a:lt1>
         <a:srgbClr val="FFFFFF"/>
       </a:lt1>
       <a:dk2>
-        <a:srgbClr val="7A1F1F"/>
+        <a:srgbClr val="6E1B1B"/>
       </a:dk2>
       <a:lt2>
-        <a:srgbClr val="F2F2F2"/>
+        <a:srgbClr val="F4EFEA"/>
       </a:lt2>
       <a:accent1>
-        <a:srgbClr val="7A1F1F"/>
+        <a:srgbClr val="B8862B"/>
       </a:accent1>
       <a:accent2>
         <a:srgbClr val="2E6B5E"/>
       </a:accent2>
       <a:accent3>
-        <a:srgbClr val="B8862B"/>
+        <a:srgbClr val="8C2F2F"/>
       </a:accent3>
       <a:accent4>
-        <a:srgbClr val="666666"/>
+        <a:srgbClr val="6B6560"/>
       </a:accent4>
       <a:accent5>
-        <a:srgbClr val="D9D9D9"/>
+        <a:srgbClr val="F3E3C3"/>
       </a:accent5>
       <a:accent6>
-        <a:srgbClr val="3A3A3A"/>
+        <a:srgbClr val="E3EFEC"/>
       </a:accent6>
       <a:hlink>
         <a:srgbClr val="2E6B5E"/>
       </a:hlink>
       <a:folHlink>
-        <a:srgbClr val="7A1F1F"/>
+        <a:srgbClr val="6E1B1B"/>
       </a:folHlink>
     </a:clrScheme>
-    <a:fontScheme name="Simple Maroon">
+    <a:fontScheme name="Varma Maroon">
       <a:majorFont>
-        <a:latin typeface="Calibri"/>
+        <a:latin typeface="Cambria"/>
         <a:ea typeface=""/>
         <a:cs typeface=""/>
         <a:font script="Jpan" typeface="游ゴシック Light"/>
